--- a/presentations/out/Химические, электрические факторы и излучение.pptx
+++ b/presentations/out/Химические, электрические факторы и излучение.pptx
@@ -15,6 +15,10 @@
     <p:sldId id="263" r:id="rId14"/>
     <p:sldId id="264" r:id="rId15"/>
     <p:sldId id="265" r:id="rId16"/>
+    <p:sldId id="266" r:id="rId17"/>
+    <p:sldId id="267" r:id="rId18"/>
+    <p:sldId id="268" r:id="rId19"/>
+    <p:sldId id="269" r:id="rId20"/>
   </p:sldIdLst>
   <p:sldSz cx="12191695" cy="6858000" type="screen4x3"/>
   <p:notesSz cx="6858000" cy="9144000"/>
@@ -3371,6 +3375,2216 @@
         <p:spPr>
           <a:xfrm>
             <a:off x="0" y="0"/>
+            <a:ext cx="12191695" cy="6858000"/>
+          </a:xfrm>
+          <a:prstGeom prst="rect">
+            <a:avLst/>
+          </a:prstGeom>
+          <a:solidFill>
+            <a:srgbClr val="FFFFFF"/>
+          </a:solidFill>
+          <a:ln>
+            <a:noFill/>
+          </a:ln>
+        </p:spPr>
+        <p:style>
+          <a:lnRef idx="1">
+            <a:schemeClr val="accent1"/>
+          </a:lnRef>
+          <a:fillRef idx="3">
+            <a:schemeClr val="accent1"/>
+          </a:fillRef>
+          <a:effectRef idx="2">
+            <a:schemeClr val="accent1"/>
+          </a:effectRef>
+          <a:fontRef idx="minor">
+            <a:schemeClr val="lt1"/>
+          </a:fontRef>
+        </p:style>
+        <p:txBody>
+          <a:bodyPr rtlCol="0" anchor="ctr"/>
+          <a:lstStyle/>
+          <a:p>
+            <a:pPr algn="ctr"/>
+          </a:p>
+        </p:txBody>
+      </p:sp>
+      <p:sp>
+        <p:nvSpPr>
+          <p:cNvPr id="3" name="TextBox 2"/>
+          <p:cNvSpPr txBox="1"/>
+          <p:nvPr/>
+        </p:nvSpPr>
+        <p:spPr>
+          <a:xfrm>
+            <a:off x="700000" y="250000"/>
+            <a:ext cx="11200000" cy="550000"/>
+          </a:xfrm>
+          <a:prstGeom prst="rect">
+            <a:avLst/>
+          </a:prstGeom>
+          <a:noFill/>
+        </p:spPr>
+        <p:txBody>
+          <a:bodyPr wrap="square" anchor="t">
+            <a:spAutoFit/>
+          </a:bodyPr>
+          <a:lstStyle/>
+          <a:p>
+            <a:pPr algn="l"/>
+            <a:r>
+              <a:rPr sz="2200" b="1">
+                <a:solidFill>
+                  <a:srgbClr val="333333"/>
+                </a:solidFill>
+                <a:latin typeface="Open Sans"/>
+                <a:ea typeface="Open Sans"/>
+                <a:cs typeface="Open Sans"/>
+              </a:rPr>
+              <a:t>СОЛНЕЧНЫЙ ОЖОГ</a:t>
+            </a:r>
+          </a:p>
+        </p:txBody>
+      </p:sp>
+      <p:sp>
+        <p:nvSpPr>
+          <p:cNvPr id="4" name="Rectangle 3"/>
+          <p:cNvSpPr/>
+          <p:nvPr/>
+        </p:nvSpPr>
+        <p:spPr>
+          <a:xfrm>
+            <a:off x="700000" y="850000"/>
+            <a:ext cx="9000000" cy="28000"/>
+          </a:xfrm>
+          <a:prstGeom prst="rect">
+            <a:avLst/>
+          </a:prstGeom>
+          <a:solidFill>
+            <a:srgbClr val="555555"/>
+          </a:solidFill>
+          <a:ln>
+            <a:noFill/>
+          </a:ln>
+        </p:spPr>
+        <p:style>
+          <a:lnRef idx="1">
+            <a:schemeClr val="accent1"/>
+          </a:lnRef>
+          <a:fillRef idx="3">
+            <a:schemeClr val="accent1"/>
+          </a:fillRef>
+          <a:effectRef idx="2">
+            <a:schemeClr val="accent1"/>
+          </a:effectRef>
+          <a:fontRef idx="minor">
+            <a:schemeClr val="lt1"/>
+          </a:fontRef>
+        </p:style>
+        <p:txBody>
+          <a:bodyPr rtlCol="0" anchor="ctr"/>
+          <a:lstStyle/>
+          <a:p>
+            <a:pPr algn="ctr"/>
+          </a:p>
+        </p:txBody>
+      </p:sp>
+      <p:sp>
+        <p:nvSpPr>
+          <p:cNvPr id="5" name="TextBox 4"/>
+          <p:cNvSpPr txBox="1"/>
+          <p:nvPr/>
+        </p:nvSpPr>
+        <p:spPr>
+          <a:xfrm>
+            <a:off x="700000" y="920000"/>
+            <a:ext cx="11000000" cy="350000"/>
+          </a:xfrm>
+          <a:prstGeom prst="rect">
+            <a:avLst/>
+          </a:prstGeom>
+          <a:noFill/>
+        </p:spPr>
+        <p:txBody>
+          <a:bodyPr wrap="square" anchor="t">
+            <a:spAutoFit/>
+          </a:bodyPr>
+          <a:lstStyle/>
+          <a:p>
+            <a:pPr algn="l"/>
+            <a:r>
+              <a:rPr sz="1200" b="0">
+                <a:solidFill>
+                  <a:srgbClr val="666666"/>
+                </a:solidFill>
+                <a:latin typeface="Open Sans"/>
+                <a:ea typeface="Open Sans"/>
+                <a:cs typeface="Open Sans"/>
+              </a:rPr>
+              <a:t>Оказание первой помощи при травмах, ранениях и поражениях, прочих состояниях</a:t>
+            </a:r>
+          </a:p>
+        </p:txBody>
+      </p:sp>
+      <p:sp>
+        <p:nvSpPr>
+          <p:cNvPr id="6" name="Rectangle 5"/>
+          <p:cNvSpPr/>
+          <p:nvPr/>
+        </p:nvSpPr>
+        <p:spPr>
+          <a:xfrm>
+            <a:off x="0" y="2800000"/>
+            <a:ext cx="420000" cy="420000"/>
+          </a:xfrm>
+          <a:prstGeom prst="rect">
+            <a:avLst/>
+          </a:prstGeom>
+          <a:solidFill>
+            <a:srgbClr val="555555"/>
+          </a:solidFill>
+          <a:ln>
+            <a:noFill/>
+          </a:ln>
+        </p:spPr>
+        <p:style>
+          <a:lnRef idx="1">
+            <a:schemeClr val="accent1"/>
+          </a:lnRef>
+          <a:fillRef idx="3">
+            <a:schemeClr val="accent1"/>
+          </a:fillRef>
+          <a:effectRef idx="2">
+            <a:schemeClr val="accent1"/>
+          </a:effectRef>
+          <a:fontRef idx="minor">
+            <a:schemeClr val="lt1"/>
+          </a:fontRef>
+        </p:style>
+        <p:txBody>
+          <a:bodyPr rtlCol="0" anchor="ctr"/>
+          <a:lstStyle/>
+          <a:p>
+            <a:pPr algn="ctr"/>
+          </a:p>
+        </p:txBody>
+      </p:sp>
+      <p:sp>
+        <p:nvSpPr>
+          <p:cNvPr id="7" name="TextBox 6"/>
+          <p:cNvSpPr txBox="1"/>
+          <p:nvPr/>
+        </p:nvSpPr>
+        <p:spPr>
+          <a:xfrm>
+            <a:off x="0" y="2800000"/>
+            <a:ext cx="420000" cy="420000"/>
+          </a:xfrm>
+          <a:prstGeom prst="rect">
+            <a:avLst/>
+          </a:prstGeom>
+          <a:noFill/>
+        </p:spPr>
+        <p:txBody>
+          <a:bodyPr wrap="square" anchor="ctr">
+            <a:spAutoFit/>
+          </a:bodyPr>
+          <a:lstStyle/>
+          <a:p>
+            <a:pPr algn="ctr"/>
+            <a:r>
+              <a:rPr sz="1400" b="1">
+                <a:solidFill>
+                  <a:srgbClr val="FFFFFF"/>
+                </a:solidFill>
+                <a:latin typeface="Open Sans"/>
+                <a:ea typeface="Open Sans"/>
+                <a:cs typeface="Open Sans"/>
+              </a:rPr>
+              <a:t>10</a:t>
+            </a:r>
+          </a:p>
+        </p:txBody>
+      </p:sp>
+      <p:sp>
+        <p:nvSpPr>
+          <p:cNvPr id="8" name="TextBox 7"/>
+          <p:cNvSpPr txBox="1"/>
+          <p:nvPr/>
+        </p:nvSpPr>
+        <p:spPr>
+          <a:xfrm>
+            <a:off x="700000" y="1450000"/>
+            <a:ext cx="11000000" cy="4000000"/>
+          </a:xfrm>
+          <a:prstGeom prst="rect">
+            <a:avLst/>
+          </a:prstGeom>
+          <a:noFill/>
+        </p:spPr>
+        <p:txBody>
+          <a:bodyPr wrap="square">
+            <a:spAutoFit/>
+          </a:bodyPr>
+          <a:lstStyle/>
+          <a:p>
+            <a:pPr algn="l">
+              <a:spcAft>
+                <a:spcPts val="800"/>
+              </a:spcAft>
+            </a:pPr>
+            <a:r>
+              <a:rPr sz="1400" b="0">
+                <a:solidFill>
+                  <a:srgbClr val="333333"/>
+                </a:solidFill>
+                <a:latin typeface="Open Sans"/>
+                <a:ea typeface="Open Sans"/>
+                <a:cs typeface="Open Sans"/>
+              </a:rPr>
+              <a:t>•  Прекратите пребывание под прямыми лучами и перейдите в тень.</a:t>
+            </a:r>
+          </a:p>
+          <a:p>
+            <a:pPr algn="l">
+              <a:spcAft>
+                <a:spcPts val="800"/>
+              </a:spcAft>
+            </a:pPr>
+            <a:r>
+              <a:rPr sz="1400" b="0">
+                <a:solidFill>
+                  <a:srgbClr val="333333"/>
+                </a:solidFill>
+                <a:latin typeface="Open Sans"/>
+                <a:ea typeface="Open Sans"/>
+                <a:cs typeface="Open Sans"/>
+              </a:rPr>
+              <a:t>•  Охлаждайте покрасневшую болезненную кожу прохладной водой.</a:t>
+            </a:r>
+          </a:p>
+          <a:p>
+            <a:pPr algn="l">
+              <a:spcAft>
+                <a:spcPts val="800"/>
+              </a:spcAft>
+            </a:pPr>
+            <a:r>
+              <a:rPr sz="1400" b="0">
+                <a:solidFill>
+                  <a:srgbClr val="333333"/>
+                </a:solidFill>
+                <a:latin typeface="Open Sans"/>
+                <a:ea typeface="Open Sans"/>
+                <a:cs typeface="Open Sans"/>
+              </a:rPr>
+              <a:t>•  При пузырях наложите свободную сухую стерильную повязку.</a:t>
+            </a:r>
+          </a:p>
+          <a:p>
+            <a:pPr algn="l">
+              <a:spcAft>
+                <a:spcPts val="800"/>
+              </a:spcAft>
+            </a:pPr>
+            <a:r>
+              <a:rPr sz="1400" b="0">
+                <a:solidFill>
+                  <a:srgbClr val="333333"/>
+                </a:solidFill>
+                <a:latin typeface="Open Sans"/>
+                <a:ea typeface="Open Sans"/>
+                <a:cs typeface="Open Sans"/>
+              </a:rPr>
+              <a:t>•  Не вскрывайте пузыри, не наносите жир и раздражающие вещества.</a:t>
+            </a:r>
+          </a:p>
+          <a:p>
+            <a:pPr algn="l">
+              <a:spcAft>
+                <a:spcPts val="800"/>
+              </a:spcAft>
+            </a:pPr>
+            <a:r>
+              <a:rPr sz="1400" b="0">
+                <a:solidFill>
+                  <a:srgbClr val="333333"/>
+                </a:solidFill>
+                <a:latin typeface="Open Sans"/>
+                <a:ea typeface="Open Sans"/>
+                <a:cs typeface="Open Sans"/>
+              </a:rPr>
+              <a:t>•  При обширном ожоге, слабости или повышении температуры вызовите скорую помощь.</a:t>
+            </a:r>
+          </a:p>
+        </p:txBody>
+      </p:sp>
+      <p:sp>
+        <p:nvSpPr>
+          <p:cNvPr id="9" name="Rounded Rectangle 8"/>
+          <p:cNvSpPr/>
+          <p:nvPr/>
+        </p:nvSpPr>
+        <p:spPr>
+          <a:xfrm>
+            <a:off x="700000" y="5600000"/>
+            <a:ext cx="11000000" cy="1000000"/>
+          </a:xfrm>
+          <a:prstGeom prst="roundRect">
+            <a:avLst/>
+          </a:prstGeom>
+          <a:solidFill>
+            <a:srgbClr val="F5F0E1"/>
+          </a:solidFill>
+          <a:ln>
+            <a:noFill/>
+          </a:ln>
+        </p:spPr>
+        <p:style>
+          <a:lnRef idx="1">
+            <a:schemeClr val="accent1"/>
+          </a:lnRef>
+          <a:fillRef idx="3">
+            <a:schemeClr val="accent1"/>
+          </a:fillRef>
+          <a:effectRef idx="2">
+            <a:schemeClr val="accent1"/>
+          </a:effectRef>
+          <a:fontRef idx="minor">
+            <a:schemeClr val="lt1"/>
+          </a:fontRef>
+        </p:style>
+        <p:txBody>
+          <a:bodyPr rtlCol="0" anchor="ctr"/>
+          <a:lstStyle/>
+          <a:p>
+            <a:pPr algn="ctr"/>
+          </a:p>
+        </p:txBody>
+      </p:sp>
+      <p:sp>
+        <p:nvSpPr>
+          <p:cNvPr id="10" name="TextBox 9"/>
+          <p:cNvSpPr txBox="1"/>
+          <p:nvPr/>
+        </p:nvSpPr>
+        <p:spPr>
+          <a:xfrm>
+            <a:off x="950000" y="5800000"/>
+            <a:ext cx="10500000" cy="600000"/>
+          </a:xfrm>
+          <a:prstGeom prst="rect">
+            <a:avLst/>
+          </a:prstGeom>
+          <a:noFill/>
+        </p:spPr>
+        <p:txBody>
+          <a:bodyPr wrap="square" anchor="ctr">
+            <a:spAutoFit/>
+          </a:bodyPr>
+          <a:lstStyle/>
+          <a:p>
+            <a:pPr algn="l"/>
+            <a:r>
+              <a:rPr sz="1200" b="0">
+                <a:solidFill>
+                  <a:srgbClr val="333333"/>
+                </a:solidFill>
+                <a:latin typeface="Open Sans"/>
+                <a:ea typeface="Open Sans"/>
+                <a:cs typeface="Open Sans"/>
+              </a:rPr>
+              <a:t>Солнечный ожог может сочетаться с общим перегреванием и обезвоживанием.</a:t>
+            </a:r>
+          </a:p>
+        </p:txBody>
+      </p:sp>
+    </p:spTree>
+  </p:cSld>
+  <p:clrMapOvr>
+    <a:masterClrMapping/>
+  </p:clrMapOvr>
+</p:sld>
+</file>
+
+<file path=ppt/slides/slide11.xml><?xml version="1.0" encoding="utf-8"?>
+<p:sld xmlns:a="http://schemas.openxmlformats.org/drawingml/2006/main" xmlns:p="http://schemas.openxmlformats.org/presentationml/2006/main" xmlns:r="http://schemas.openxmlformats.org/officeDocument/2006/relationships">
+  <p:cSld>
+    <p:spTree>
+      <p:nvGrpSpPr>
+        <p:cNvPr id="1" name=""/>
+        <p:cNvGrpSpPr/>
+        <p:nvPr/>
+      </p:nvGrpSpPr>
+      <p:grpSpPr/>
+      <p:sp>
+        <p:nvSpPr>
+          <p:cNvPr id="2" name="Rectangle 1"/>
+          <p:cNvSpPr/>
+          <p:nvPr/>
+        </p:nvSpPr>
+        <p:spPr>
+          <a:xfrm>
+            <a:off x="0" y="0"/>
+            <a:ext cx="12191695" cy="6858000"/>
+          </a:xfrm>
+          <a:prstGeom prst="rect">
+            <a:avLst/>
+          </a:prstGeom>
+          <a:solidFill>
+            <a:srgbClr val="FFFFFF"/>
+          </a:solidFill>
+          <a:ln>
+            <a:noFill/>
+          </a:ln>
+        </p:spPr>
+        <p:style>
+          <a:lnRef idx="1">
+            <a:schemeClr val="accent1"/>
+          </a:lnRef>
+          <a:fillRef idx="3">
+            <a:schemeClr val="accent1"/>
+          </a:fillRef>
+          <a:effectRef idx="2">
+            <a:schemeClr val="accent1"/>
+          </a:effectRef>
+          <a:fontRef idx="minor">
+            <a:schemeClr val="lt1"/>
+          </a:fontRef>
+        </p:style>
+        <p:txBody>
+          <a:bodyPr rtlCol="0" anchor="ctr"/>
+          <a:lstStyle/>
+          <a:p>
+            <a:pPr algn="ctr"/>
+          </a:p>
+        </p:txBody>
+      </p:sp>
+      <p:sp>
+        <p:nvSpPr>
+          <p:cNvPr id="3" name="TextBox 2"/>
+          <p:cNvSpPr txBox="1"/>
+          <p:nvPr/>
+        </p:nvSpPr>
+        <p:spPr>
+          <a:xfrm>
+            <a:off x="700000" y="250000"/>
+            <a:ext cx="11200000" cy="550000"/>
+          </a:xfrm>
+          <a:prstGeom prst="rect">
+            <a:avLst/>
+          </a:prstGeom>
+          <a:noFill/>
+        </p:spPr>
+        <p:txBody>
+          <a:bodyPr wrap="square" anchor="t">
+            <a:spAutoFit/>
+          </a:bodyPr>
+          <a:lstStyle/>
+          <a:p>
+            <a:pPr algn="l"/>
+            <a:r>
+              <a:rPr sz="2200" b="1">
+                <a:solidFill>
+                  <a:srgbClr val="333333"/>
+                </a:solidFill>
+                <a:latin typeface="Open Sans"/>
+                <a:ea typeface="Open Sans"/>
+                <a:cs typeface="Open Sans"/>
+              </a:rPr>
+              <a:t>СОЛНЕЧНЫЙ УДАР И ПЕРЕГРЕВАНИЕ</a:t>
+            </a:r>
+          </a:p>
+        </p:txBody>
+      </p:sp>
+      <p:sp>
+        <p:nvSpPr>
+          <p:cNvPr id="4" name="Rectangle 3"/>
+          <p:cNvSpPr/>
+          <p:nvPr/>
+        </p:nvSpPr>
+        <p:spPr>
+          <a:xfrm>
+            <a:off x="700000" y="850000"/>
+            <a:ext cx="9000000" cy="28000"/>
+          </a:xfrm>
+          <a:prstGeom prst="rect">
+            <a:avLst/>
+          </a:prstGeom>
+          <a:solidFill>
+            <a:srgbClr val="555555"/>
+          </a:solidFill>
+          <a:ln>
+            <a:noFill/>
+          </a:ln>
+        </p:spPr>
+        <p:style>
+          <a:lnRef idx="1">
+            <a:schemeClr val="accent1"/>
+          </a:lnRef>
+          <a:fillRef idx="3">
+            <a:schemeClr val="accent1"/>
+          </a:fillRef>
+          <a:effectRef idx="2">
+            <a:schemeClr val="accent1"/>
+          </a:effectRef>
+          <a:fontRef idx="minor">
+            <a:schemeClr val="lt1"/>
+          </a:fontRef>
+        </p:style>
+        <p:txBody>
+          <a:bodyPr rtlCol="0" anchor="ctr"/>
+          <a:lstStyle/>
+          <a:p>
+            <a:pPr algn="ctr"/>
+          </a:p>
+        </p:txBody>
+      </p:sp>
+      <p:sp>
+        <p:nvSpPr>
+          <p:cNvPr id="5" name="TextBox 4"/>
+          <p:cNvSpPr txBox="1"/>
+          <p:nvPr/>
+        </p:nvSpPr>
+        <p:spPr>
+          <a:xfrm>
+            <a:off x="700000" y="920000"/>
+            <a:ext cx="11000000" cy="350000"/>
+          </a:xfrm>
+          <a:prstGeom prst="rect">
+            <a:avLst/>
+          </a:prstGeom>
+          <a:noFill/>
+        </p:spPr>
+        <p:txBody>
+          <a:bodyPr wrap="square" anchor="t">
+            <a:spAutoFit/>
+          </a:bodyPr>
+          <a:lstStyle/>
+          <a:p>
+            <a:pPr algn="l"/>
+            <a:r>
+              <a:rPr sz="1200" b="0">
+                <a:solidFill>
+                  <a:srgbClr val="666666"/>
+                </a:solidFill>
+                <a:latin typeface="Open Sans"/>
+                <a:ea typeface="Open Sans"/>
+                <a:cs typeface="Open Sans"/>
+              </a:rPr>
+              <a:t>Оказание первой помощи при травмах, ранениях и поражениях, прочих состояниях</a:t>
+            </a:r>
+          </a:p>
+        </p:txBody>
+      </p:sp>
+      <p:sp>
+        <p:nvSpPr>
+          <p:cNvPr id="6" name="Rectangle 5"/>
+          <p:cNvSpPr/>
+          <p:nvPr/>
+        </p:nvSpPr>
+        <p:spPr>
+          <a:xfrm>
+            <a:off x="0" y="2800000"/>
+            <a:ext cx="420000" cy="420000"/>
+          </a:xfrm>
+          <a:prstGeom prst="rect">
+            <a:avLst/>
+          </a:prstGeom>
+          <a:solidFill>
+            <a:srgbClr val="555555"/>
+          </a:solidFill>
+          <a:ln>
+            <a:noFill/>
+          </a:ln>
+        </p:spPr>
+        <p:style>
+          <a:lnRef idx="1">
+            <a:schemeClr val="accent1"/>
+          </a:lnRef>
+          <a:fillRef idx="3">
+            <a:schemeClr val="accent1"/>
+          </a:fillRef>
+          <a:effectRef idx="2">
+            <a:schemeClr val="accent1"/>
+          </a:effectRef>
+          <a:fontRef idx="minor">
+            <a:schemeClr val="lt1"/>
+          </a:fontRef>
+        </p:style>
+        <p:txBody>
+          <a:bodyPr rtlCol="0" anchor="ctr"/>
+          <a:lstStyle/>
+          <a:p>
+            <a:pPr algn="ctr"/>
+          </a:p>
+        </p:txBody>
+      </p:sp>
+      <p:sp>
+        <p:nvSpPr>
+          <p:cNvPr id="7" name="TextBox 6"/>
+          <p:cNvSpPr txBox="1"/>
+          <p:nvPr/>
+        </p:nvSpPr>
+        <p:spPr>
+          <a:xfrm>
+            <a:off x="0" y="2800000"/>
+            <a:ext cx="420000" cy="420000"/>
+          </a:xfrm>
+          <a:prstGeom prst="rect">
+            <a:avLst/>
+          </a:prstGeom>
+          <a:noFill/>
+        </p:spPr>
+        <p:txBody>
+          <a:bodyPr wrap="square" anchor="ctr">
+            <a:spAutoFit/>
+          </a:bodyPr>
+          <a:lstStyle/>
+          <a:p>
+            <a:pPr algn="ctr"/>
+            <a:r>
+              <a:rPr sz="1400" b="1">
+                <a:solidFill>
+                  <a:srgbClr val="FFFFFF"/>
+                </a:solidFill>
+                <a:latin typeface="Open Sans"/>
+                <a:ea typeface="Open Sans"/>
+                <a:cs typeface="Open Sans"/>
+              </a:rPr>
+              <a:t>11</a:t>
+            </a:r>
+          </a:p>
+        </p:txBody>
+      </p:sp>
+      <p:sp>
+        <p:nvSpPr>
+          <p:cNvPr id="8" name="TextBox 7"/>
+          <p:cNvSpPr txBox="1"/>
+          <p:nvPr/>
+        </p:nvSpPr>
+        <p:spPr>
+          <a:xfrm>
+            <a:off x="700000" y="1450000"/>
+            <a:ext cx="11000000" cy="4000000"/>
+          </a:xfrm>
+          <a:prstGeom prst="rect">
+            <a:avLst/>
+          </a:prstGeom>
+          <a:noFill/>
+        </p:spPr>
+        <p:txBody>
+          <a:bodyPr wrap="square">
+            <a:spAutoFit/>
+          </a:bodyPr>
+          <a:lstStyle/>
+          <a:p>
+            <a:pPr algn="l">
+              <a:spcAft>
+                <a:spcPts val="800"/>
+              </a:spcAft>
+            </a:pPr>
+            <a:r>
+              <a:rPr sz="1400" b="0">
+                <a:solidFill>
+                  <a:srgbClr val="333333"/>
+                </a:solidFill>
+                <a:latin typeface="Open Sans"/>
+                <a:ea typeface="Open Sans"/>
+                <a:cs typeface="Open Sans"/>
+              </a:rPr>
+              <a:t>•  Головная боль, слабость, жажда, тошнота и головокружение</a:t>
+            </a:r>
+          </a:p>
+          <a:p>
+            <a:pPr algn="l">
+              <a:spcAft>
+                <a:spcPts val="800"/>
+              </a:spcAft>
+            </a:pPr>
+            <a:r>
+              <a:rPr sz="1400" b="0">
+                <a:solidFill>
+                  <a:srgbClr val="333333"/>
+                </a:solidFill>
+                <a:latin typeface="Open Sans"/>
+                <a:ea typeface="Open Sans"/>
+                <a:cs typeface="Open Sans"/>
+              </a:rPr>
+              <a:t>•  Горячая покрасневшая кожа, учащенное дыхание и сердцебиение</a:t>
+            </a:r>
+          </a:p>
+          <a:p>
+            <a:pPr algn="l">
+              <a:spcAft>
+                <a:spcPts val="800"/>
+              </a:spcAft>
+            </a:pPr>
+            <a:r>
+              <a:rPr sz="1400" b="1">
+                <a:solidFill>
+                  <a:srgbClr val="CC0000"/>
+                </a:solidFill>
+                <a:latin typeface="Open Sans"/>
+                <a:ea typeface="Open Sans"/>
+                <a:cs typeface="Open Sans"/>
+              </a:rPr>
+              <a:t>•  Спутанность, необычное поведение, судороги или потеря сознания</a:t>
+            </a:r>
+          </a:p>
+          <a:p>
+            <a:pPr algn="l">
+              <a:spcAft>
+                <a:spcPts val="800"/>
+              </a:spcAft>
+            </a:pPr>
+            <a:r>
+              <a:rPr sz="1400" b="0">
+                <a:solidFill>
+                  <a:srgbClr val="333333"/>
+                </a:solidFill>
+                <a:latin typeface="Open Sans"/>
+                <a:ea typeface="Open Sans"/>
+                <a:cs typeface="Open Sans"/>
+              </a:rPr>
+              <a:t>•  Перенесите в тень, снимите лишнюю одежду и охлаждайте голову и тело</a:t>
+            </a:r>
+          </a:p>
+          <a:p>
+            <a:pPr algn="l">
+              <a:spcAft>
+                <a:spcPts val="800"/>
+              </a:spcAft>
+            </a:pPr>
+            <a:r>
+              <a:rPr sz="1400" b="0">
+                <a:solidFill>
+                  <a:srgbClr val="333333"/>
+                </a:solidFill>
+                <a:latin typeface="Open Sans"/>
+                <a:ea typeface="Open Sans"/>
+                <a:cs typeface="Open Sans"/>
+              </a:rPr>
+              <a:t>•  При ясном сознании давайте прохладное питье небольшими порциями</a:t>
+            </a:r>
+          </a:p>
+          <a:p>
+            <a:pPr algn="l">
+              <a:spcAft>
+                <a:spcPts val="800"/>
+              </a:spcAft>
+            </a:pPr>
+            <a:r>
+              <a:rPr sz="1400" b="1">
+                <a:solidFill>
+                  <a:srgbClr val="CC0000"/>
+                </a:solidFill>
+                <a:latin typeface="Open Sans"/>
+                <a:ea typeface="Open Sans"/>
+                <a:cs typeface="Open Sans"/>
+              </a:rPr>
+              <a:t>•  При нарушении сознания ничего не давайте через рот и контролируйте дыхание</a:t>
+            </a:r>
+          </a:p>
+        </p:txBody>
+      </p:sp>
+      <p:sp>
+        <p:nvSpPr>
+          <p:cNvPr id="9" name="Rounded Rectangle 8"/>
+          <p:cNvSpPr/>
+          <p:nvPr/>
+        </p:nvSpPr>
+        <p:spPr>
+          <a:xfrm>
+            <a:off x="700000" y="5600000"/>
+            <a:ext cx="11000000" cy="1000000"/>
+          </a:xfrm>
+          <a:prstGeom prst="roundRect">
+            <a:avLst/>
+          </a:prstGeom>
+          <a:solidFill>
+            <a:srgbClr val="F5F0E1"/>
+          </a:solidFill>
+          <a:ln>
+            <a:noFill/>
+          </a:ln>
+        </p:spPr>
+        <p:style>
+          <a:lnRef idx="1">
+            <a:schemeClr val="accent1"/>
+          </a:lnRef>
+          <a:fillRef idx="3">
+            <a:schemeClr val="accent1"/>
+          </a:fillRef>
+          <a:effectRef idx="2">
+            <a:schemeClr val="accent1"/>
+          </a:effectRef>
+          <a:fontRef idx="minor">
+            <a:schemeClr val="lt1"/>
+          </a:fontRef>
+        </p:style>
+        <p:txBody>
+          <a:bodyPr rtlCol="0" anchor="ctr"/>
+          <a:lstStyle/>
+          <a:p>
+            <a:pPr algn="ctr"/>
+          </a:p>
+        </p:txBody>
+      </p:sp>
+      <p:sp>
+        <p:nvSpPr>
+          <p:cNvPr id="10" name="TextBox 9"/>
+          <p:cNvSpPr txBox="1"/>
+          <p:nvPr/>
+        </p:nvSpPr>
+        <p:spPr>
+          <a:xfrm>
+            <a:off x="950000" y="5800000"/>
+            <a:ext cx="10500000" cy="600000"/>
+          </a:xfrm>
+          <a:prstGeom prst="rect">
+            <a:avLst/>
+          </a:prstGeom>
+          <a:noFill/>
+        </p:spPr>
+        <p:txBody>
+          <a:bodyPr wrap="square" anchor="ctr">
+            <a:spAutoFit/>
+          </a:bodyPr>
+          <a:lstStyle/>
+          <a:p>
+            <a:pPr algn="l"/>
+            <a:r>
+              <a:rPr sz="1200" b="0">
+                <a:solidFill>
+                  <a:srgbClr val="333333"/>
+                </a:solidFill>
+                <a:latin typeface="Open Sans"/>
+                <a:ea typeface="Open Sans"/>
+                <a:cs typeface="Open Sans"/>
+              </a:rPr>
+              <a:t>При потере сознания и нормальном дыхании уложите на бок; при отсутствии нормального дыхания начинайте реанимацию.</a:t>
+            </a:r>
+          </a:p>
+        </p:txBody>
+      </p:sp>
+    </p:spTree>
+  </p:cSld>
+  <p:clrMapOvr>
+    <a:masterClrMapping/>
+  </p:clrMapOvr>
+</p:sld>
+</file>
+
+<file path=ppt/slides/slide12.xml><?xml version="1.0" encoding="utf-8"?>
+<p:sld xmlns:a="http://schemas.openxmlformats.org/drawingml/2006/main" xmlns:p="http://schemas.openxmlformats.org/presentationml/2006/main" xmlns:r="http://schemas.openxmlformats.org/officeDocument/2006/relationships">
+  <p:cSld>
+    <p:spTree>
+      <p:nvGrpSpPr>
+        <p:cNvPr id="1" name=""/>
+        <p:cNvGrpSpPr/>
+        <p:nvPr/>
+      </p:nvGrpSpPr>
+      <p:grpSpPr/>
+      <p:sp>
+        <p:nvSpPr>
+          <p:cNvPr id="2" name="Rectangle 1"/>
+          <p:cNvSpPr/>
+          <p:nvPr/>
+        </p:nvSpPr>
+        <p:spPr>
+          <a:xfrm>
+            <a:off x="0" y="0"/>
+            <a:ext cx="12191695" cy="6858000"/>
+          </a:xfrm>
+          <a:prstGeom prst="rect">
+            <a:avLst/>
+          </a:prstGeom>
+          <a:solidFill>
+            <a:srgbClr val="FFFFFF"/>
+          </a:solidFill>
+          <a:ln>
+            <a:noFill/>
+          </a:ln>
+        </p:spPr>
+        <p:style>
+          <a:lnRef idx="1">
+            <a:schemeClr val="accent1"/>
+          </a:lnRef>
+          <a:fillRef idx="3">
+            <a:schemeClr val="accent1"/>
+          </a:fillRef>
+          <a:effectRef idx="2">
+            <a:schemeClr val="accent1"/>
+          </a:effectRef>
+          <a:fontRef idx="minor">
+            <a:schemeClr val="lt1"/>
+          </a:fontRef>
+        </p:style>
+        <p:txBody>
+          <a:bodyPr rtlCol="0" anchor="ctr"/>
+          <a:lstStyle/>
+          <a:p>
+            <a:pPr algn="ctr"/>
+          </a:p>
+        </p:txBody>
+      </p:sp>
+      <p:sp>
+        <p:nvSpPr>
+          <p:cNvPr id="3" name="TextBox 2"/>
+          <p:cNvSpPr txBox="1"/>
+          <p:nvPr/>
+        </p:nvSpPr>
+        <p:spPr>
+          <a:xfrm>
+            <a:off x="700000" y="250000"/>
+            <a:ext cx="11200000" cy="550000"/>
+          </a:xfrm>
+          <a:prstGeom prst="rect">
+            <a:avLst/>
+          </a:prstGeom>
+          <a:noFill/>
+        </p:spPr>
+        <p:txBody>
+          <a:bodyPr wrap="square" anchor="t">
+            <a:spAutoFit/>
+          </a:bodyPr>
+          <a:lstStyle/>
+          <a:p>
+            <a:pPr algn="l"/>
+            <a:r>
+              <a:rPr sz="2200" b="1">
+                <a:solidFill>
+                  <a:srgbClr val="333333"/>
+                </a:solidFill>
+                <a:latin typeface="Open Sans"/>
+                <a:ea typeface="Open Sans"/>
+                <a:cs typeface="Open Sans"/>
+              </a:rPr>
+              <a:t>ГЛАВНОЕ ЗАПОМНИТЬ</a:t>
+            </a:r>
+          </a:p>
+        </p:txBody>
+      </p:sp>
+      <p:sp>
+        <p:nvSpPr>
+          <p:cNvPr id="4" name="Rectangle 3"/>
+          <p:cNvSpPr/>
+          <p:nvPr/>
+        </p:nvSpPr>
+        <p:spPr>
+          <a:xfrm>
+            <a:off x="700000" y="850000"/>
+            <a:ext cx="9000000" cy="28000"/>
+          </a:xfrm>
+          <a:prstGeom prst="rect">
+            <a:avLst/>
+          </a:prstGeom>
+          <a:solidFill>
+            <a:srgbClr val="555555"/>
+          </a:solidFill>
+          <a:ln>
+            <a:noFill/>
+          </a:ln>
+        </p:spPr>
+        <p:style>
+          <a:lnRef idx="1">
+            <a:schemeClr val="accent1"/>
+          </a:lnRef>
+          <a:fillRef idx="3">
+            <a:schemeClr val="accent1"/>
+          </a:fillRef>
+          <a:effectRef idx="2">
+            <a:schemeClr val="accent1"/>
+          </a:effectRef>
+          <a:fontRef idx="minor">
+            <a:schemeClr val="lt1"/>
+          </a:fontRef>
+        </p:style>
+        <p:txBody>
+          <a:bodyPr rtlCol="0" anchor="ctr"/>
+          <a:lstStyle/>
+          <a:p>
+            <a:pPr algn="ctr"/>
+          </a:p>
+        </p:txBody>
+      </p:sp>
+      <p:sp>
+        <p:nvSpPr>
+          <p:cNvPr id="5" name="TextBox 4"/>
+          <p:cNvSpPr txBox="1"/>
+          <p:nvPr/>
+        </p:nvSpPr>
+        <p:spPr>
+          <a:xfrm>
+            <a:off x="700000" y="920000"/>
+            <a:ext cx="11000000" cy="350000"/>
+          </a:xfrm>
+          <a:prstGeom prst="rect">
+            <a:avLst/>
+          </a:prstGeom>
+          <a:noFill/>
+        </p:spPr>
+        <p:txBody>
+          <a:bodyPr wrap="square" anchor="t">
+            <a:spAutoFit/>
+          </a:bodyPr>
+          <a:lstStyle/>
+          <a:p>
+            <a:pPr algn="l"/>
+            <a:r>
+              <a:rPr sz="1200" b="0">
+                <a:solidFill>
+                  <a:srgbClr val="666666"/>
+                </a:solidFill>
+                <a:latin typeface="Open Sans"/>
+                <a:ea typeface="Open Sans"/>
+                <a:cs typeface="Open Sans"/>
+              </a:rPr>
+              <a:t>Оказание первой помощи при травмах, ранениях и поражениях, прочих состояниях</a:t>
+            </a:r>
+          </a:p>
+        </p:txBody>
+      </p:sp>
+      <p:sp>
+        <p:nvSpPr>
+          <p:cNvPr id="6" name="Rectangle 5"/>
+          <p:cNvSpPr/>
+          <p:nvPr/>
+        </p:nvSpPr>
+        <p:spPr>
+          <a:xfrm>
+            <a:off x="0" y="2800000"/>
+            <a:ext cx="420000" cy="420000"/>
+          </a:xfrm>
+          <a:prstGeom prst="rect">
+            <a:avLst/>
+          </a:prstGeom>
+          <a:solidFill>
+            <a:srgbClr val="555555"/>
+          </a:solidFill>
+          <a:ln>
+            <a:noFill/>
+          </a:ln>
+        </p:spPr>
+        <p:style>
+          <a:lnRef idx="1">
+            <a:schemeClr val="accent1"/>
+          </a:lnRef>
+          <a:fillRef idx="3">
+            <a:schemeClr val="accent1"/>
+          </a:fillRef>
+          <a:effectRef idx="2">
+            <a:schemeClr val="accent1"/>
+          </a:effectRef>
+          <a:fontRef idx="minor">
+            <a:schemeClr val="lt1"/>
+          </a:fontRef>
+        </p:style>
+        <p:txBody>
+          <a:bodyPr rtlCol="0" anchor="ctr"/>
+          <a:lstStyle/>
+          <a:p>
+            <a:pPr algn="ctr"/>
+          </a:p>
+        </p:txBody>
+      </p:sp>
+      <p:sp>
+        <p:nvSpPr>
+          <p:cNvPr id="7" name="TextBox 6"/>
+          <p:cNvSpPr txBox="1"/>
+          <p:nvPr/>
+        </p:nvSpPr>
+        <p:spPr>
+          <a:xfrm>
+            <a:off x="0" y="2800000"/>
+            <a:ext cx="420000" cy="420000"/>
+          </a:xfrm>
+          <a:prstGeom prst="rect">
+            <a:avLst/>
+          </a:prstGeom>
+          <a:noFill/>
+        </p:spPr>
+        <p:txBody>
+          <a:bodyPr wrap="square" anchor="ctr">
+            <a:spAutoFit/>
+          </a:bodyPr>
+          <a:lstStyle/>
+          <a:p>
+            <a:pPr algn="ctr"/>
+            <a:r>
+              <a:rPr sz="1400" b="1">
+                <a:solidFill>
+                  <a:srgbClr val="FFFFFF"/>
+                </a:solidFill>
+                <a:latin typeface="Open Sans"/>
+                <a:ea typeface="Open Sans"/>
+                <a:cs typeface="Open Sans"/>
+              </a:rPr>
+              <a:t>12</a:t>
+            </a:r>
+          </a:p>
+        </p:txBody>
+      </p:sp>
+      <p:sp>
+        <p:nvSpPr>
+          <p:cNvPr id="8" name="Rectangle 7"/>
+          <p:cNvSpPr/>
+          <p:nvPr/>
+        </p:nvSpPr>
+        <p:spPr>
+          <a:xfrm>
+            <a:off x="700000" y="1450000"/>
+            <a:ext cx="11000000" cy="833333"/>
+          </a:xfrm>
+          <a:prstGeom prst="rect">
+            <a:avLst/>
+          </a:prstGeom>
+          <a:solidFill>
+            <a:srgbClr val="FFFFFF"/>
+          </a:solidFill>
+          <a:ln w="12700">
+            <a:solidFill>
+              <a:srgbClr val="999999"/>
+            </a:solidFill>
+          </a:ln>
+        </p:spPr>
+        <p:style>
+          <a:lnRef idx="1">
+            <a:schemeClr val="accent1"/>
+          </a:lnRef>
+          <a:fillRef idx="3">
+            <a:schemeClr val="accent1"/>
+          </a:fillRef>
+          <a:effectRef idx="2">
+            <a:schemeClr val="accent1"/>
+          </a:effectRef>
+          <a:fontRef idx="minor">
+            <a:schemeClr val="lt1"/>
+          </a:fontRef>
+        </p:style>
+        <p:txBody>
+          <a:bodyPr rtlCol="0" anchor="ctr"/>
+          <a:lstStyle/>
+          <a:p>
+            <a:pPr algn="ctr"/>
+          </a:p>
+        </p:txBody>
+      </p:sp>
+      <p:sp>
+        <p:nvSpPr>
+          <p:cNvPr id="9" name="Rectangle 8"/>
+          <p:cNvSpPr/>
+          <p:nvPr/>
+        </p:nvSpPr>
+        <p:spPr>
+          <a:xfrm>
+            <a:off x="700000" y="1450000"/>
+            <a:ext cx="90000" cy="833333"/>
+          </a:xfrm>
+          <a:prstGeom prst="rect">
+            <a:avLst/>
+          </a:prstGeom>
+          <a:solidFill>
+            <a:srgbClr val="CC0000"/>
+          </a:solidFill>
+          <a:ln>
+            <a:noFill/>
+          </a:ln>
+        </p:spPr>
+        <p:style>
+          <a:lnRef idx="1">
+            <a:schemeClr val="accent1"/>
+          </a:lnRef>
+          <a:fillRef idx="3">
+            <a:schemeClr val="accent1"/>
+          </a:fillRef>
+          <a:effectRef idx="2">
+            <a:schemeClr val="accent1"/>
+          </a:effectRef>
+          <a:fontRef idx="minor">
+            <a:schemeClr val="lt1"/>
+          </a:fontRef>
+        </p:style>
+        <p:txBody>
+          <a:bodyPr rtlCol="0" anchor="ctr"/>
+          <a:lstStyle/>
+          <a:p>
+            <a:pPr algn="ctr"/>
+          </a:p>
+        </p:txBody>
+      </p:sp>
+      <p:sp>
+        <p:nvSpPr>
+          <p:cNvPr id="10" name="TextBox 9"/>
+          <p:cNvSpPr txBox="1"/>
+          <p:nvPr/>
+        </p:nvSpPr>
+        <p:spPr>
+          <a:xfrm>
+            <a:off x="1000000" y="1530000"/>
+            <a:ext cx="10400000" cy="673333"/>
+          </a:xfrm>
+          <a:prstGeom prst="rect">
+            <a:avLst/>
+          </a:prstGeom>
+          <a:noFill/>
+        </p:spPr>
+        <p:txBody>
+          <a:bodyPr wrap="square" anchor="ctr">
+            <a:spAutoFit/>
+          </a:bodyPr>
+          <a:lstStyle/>
+          <a:p>
+            <a:pPr algn="l"/>
+            <a:r>
+              <a:rPr sz="1200" b="0">
+                <a:solidFill>
+                  <a:srgbClr val="333333"/>
+                </a:solidFill>
+                <a:latin typeface="Open Sans"/>
+                <a:ea typeface="Open Sans"/>
+                <a:cs typeface="Open Sans"/>
+              </a:rPr>
+              <a:t>До контакта с пострадавшим защитите себя</a:t>
+            </a:r>
+          </a:p>
+        </p:txBody>
+      </p:sp>
+      <p:sp>
+        <p:nvSpPr>
+          <p:cNvPr id="11" name="Rectangle 10"/>
+          <p:cNvSpPr/>
+          <p:nvPr/>
+        </p:nvSpPr>
+        <p:spPr>
+          <a:xfrm>
+            <a:off x="700000" y="2363333"/>
+            <a:ext cx="11000000" cy="833333"/>
+          </a:xfrm>
+          <a:prstGeom prst="rect">
+            <a:avLst/>
+          </a:prstGeom>
+          <a:solidFill>
+            <a:srgbClr val="FFFFFF"/>
+          </a:solidFill>
+          <a:ln w="12700">
+            <a:solidFill>
+              <a:srgbClr val="999999"/>
+            </a:solidFill>
+          </a:ln>
+        </p:spPr>
+        <p:style>
+          <a:lnRef idx="1">
+            <a:schemeClr val="accent1"/>
+          </a:lnRef>
+          <a:fillRef idx="3">
+            <a:schemeClr val="accent1"/>
+          </a:fillRef>
+          <a:effectRef idx="2">
+            <a:schemeClr val="accent1"/>
+          </a:effectRef>
+          <a:fontRef idx="minor">
+            <a:schemeClr val="lt1"/>
+          </a:fontRef>
+        </p:style>
+        <p:txBody>
+          <a:bodyPr rtlCol="0" anchor="ctr"/>
+          <a:lstStyle/>
+          <a:p>
+            <a:pPr algn="ctr"/>
+          </a:p>
+        </p:txBody>
+      </p:sp>
+      <p:sp>
+        <p:nvSpPr>
+          <p:cNvPr id="12" name="Rectangle 11"/>
+          <p:cNvSpPr/>
+          <p:nvPr/>
+        </p:nvSpPr>
+        <p:spPr>
+          <a:xfrm>
+            <a:off x="700000" y="2363333"/>
+            <a:ext cx="90000" cy="833333"/>
+          </a:xfrm>
+          <a:prstGeom prst="rect">
+            <a:avLst/>
+          </a:prstGeom>
+          <a:solidFill>
+            <a:srgbClr val="CC0000"/>
+          </a:solidFill>
+          <a:ln>
+            <a:noFill/>
+          </a:ln>
+        </p:spPr>
+        <p:style>
+          <a:lnRef idx="1">
+            <a:schemeClr val="accent1"/>
+          </a:lnRef>
+          <a:fillRef idx="3">
+            <a:schemeClr val="accent1"/>
+          </a:fillRef>
+          <a:effectRef idx="2">
+            <a:schemeClr val="accent1"/>
+          </a:effectRef>
+          <a:fontRef idx="minor">
+            <a:schemeClr val="lt1"/>
+          </a:fontRef>
+        </p:style>
+        <p:txBody>
+          <a:bodyPr rtlCol="0" anchor="ctr"/>
+          <a:lstStyle/>
+          <a:p>
+            <a:pPr algn="ctr"/>
+          </a:p>
+        </p:txBody>
+      </p:sp>
+      <p:sp>
+        <p:nvSpPr>
+          <p:cNvPr id="13" name="TextBox 12"/>
+          <p:cNvSpPr txBox="1"/>
+          <p:nvPr/>
+        </p:nvSpPr>
+        <p:spPr>
+          <a:xfrm>
+            <a:off x="1000000" y="2443333"/>
+            <a:ext cx="10400000" cy="673333"/>
+          </a:xfrm>
+          <a:prstGeom prst="rect">
+            <a:avLst/>
+          </a:prstGeom>
+          <a:noFill/>
+        </p:spPr>
+        <p:txBody>
+          <a:bodyPr wrap="square" anchor="ctr">
+            <a:spAutoFit/>
+          </a:bodyPr>
+          <a:lstStyle/>
+          <a:p>
+            <a:pPr algn="l"/>
+            <a:r>
+              <a:rPr sz="1200" b="0">
+                <a:solidFill>
+                  <a:srgbClr val="333333"/>
+                </a:solidFill>
+                <a:latin typeface="Open Sans"/>
+                <a:ea typeface="Open Sans"/>
+                <a:cs typeface="Open Sans"/>
+              </a:rPr>
+              <a:t>Химикат с кожи смывайте водой не менее 20 минут</a:t>
+            </a:r>
+          </a:p>
+        </p:txBody>
+      </p:sp>
+      <p:sp>
+        <p:nvSpPr>
+          <p:cNvPr id="14" name="Rectangle 13"/>
+          <p:cNvSpPr/>
+          <p:nvPr/>
+        </p:nvSpPr>
+        <p:spPr>
+          <a:xfrm>
+            <a:off x="700000" y="3276666"/>
+            <a:ext cx="11000000" cy="833333"/>
+          </a:xfrm>
+          <a:prstGeom prst="rect">
+            <a:avLst/>
+          </a:prstGeom>
+          <a:solidFill>
+            <a:srgbClr val="FFFFFF"/>
+          </a:solidFill>
+          <a:ln w="12700">
+            <a:solidFill>
+              <a:srgbClr val="999999"/>
+            </a:solidFill>
+          </a:ln>
+        </p:spPr>
+        <p:style>
+          <a:lnRef idx="1">
+            <a:schemeClr val="accent1"/>
+          </a:lnRef>
+          <a:fillRef idx="3">
+            <a:schemeClr val="accent1"/>
+          </a:fillRef>
+          <a:effectRef idx="2">
+            <a:schemeClr val="accent1"/>
+          </a:effectRef>
+          <a:fontRef idx="minor">
+            <a:schemeClr val="lt1"/>
+          </a:fontRef>
+        </p:style>
+        <p:txBody>
+          <a:bodyPr rtlCol="0" anchor="ctr"/>
+          <a:lstStyle/>
+          <a:p>
+            <a:pPr algn="ctr"/>
+          </a:p>
+        </p:txBody>
+      </p:sp>
+      <p:sp>
+        <p:nvSpPr>
+          <p:cNvPr id="15" name="Rectangle 14"/>
+          <p:cNvSpPr/>
+          <p:nvPr/>
+        </p:nvSpPr>
+        <p:spPr>
+          <a:xfrm>
+            <a:off x="700000" y="3276666"/>
+            <a:ext cx="90000" cy="833333"/>
+          </a:xfrm>
+          <a:prstGeom prst="rect">
+            <a:avLst/>
+          </a:prstGeom>
+          <a:solidFill>
+            <a:srgbClr val="CC0000"/>
+          </a:solidFill>
+          <a:ln>
+            <a:noFill/>
+          </a:ln>
+        </p:spPr>
+        <p:style>
+          <a:lnRef idx="1">
+            <a:schemeClr val="accent1"/>
+          </a:lnRef>
+          <a:fillRef idx="3">
+            <a:schemeClr val="accent1"/>
+          </a:fillRef>
+          <a:effectRef idx="2">
+            <a:schemeClr val="accent1"/>
+          </a:effectRef>
+          <a:fontRef idx="minor">
+            <a:schemeClr val="lt1"/>
+          </a:fontRef>
+        </p:style>
+        <p:txBody>
+          <a:bodyPr rtlCol="0" anchor="ctr"/>
+          <a:lstStyle/>
+          <a:p>
+            <a:pPr algn="ctr"/>
+          </a:p>
+        </p:txBody>
+      </p:sp>
+      <p:sp>
+        <p:nvSpPr>
+          <p:cNvPr id="16" name="TextBox 15"/>
+          <p:cNvSpPr txBox="1"/>
+          <p:nvPr/>
+        </p:nvSpPr>
+        <p:spPr>
+          <a:xfrm>
+            <a:off x="1000000" y="3356666"/>
+            <a:ext cx="10400000" cy="673333"/>
+          </a:xfrm>
+          <a:prstGeom prst="rect">
+            <a:avLst/>
+          </a:prstGeom>
+          <a:noFill/>
+        </p:spPr>
+        <p:txBody>
+          <a:bodyPr wrap="square" anchor="ctr">
+            <a:spAutoFit/>
+          </a:bodyPr>
+          <a:lstStyle/>
+          <a:p>
+            <a:pPr algn="l"/>
+            <a:r>
+              <a:rPr sz="1200" b="0">
+                <a:solidFill>
+                  <a:srgbClr val="333333"/>
+                </a:solidFill>
+                <a:latin typeface="Open Sans"/>
+                <a:ea typeface="Open Sans"/>
+                <a:cs typeface="Open Sans"/>
+              </a:rPr>
+              <a:t>При ожоге пищевода рвоту не вызывайте</a:t>
+            </a:r>
+          </a:p>
+        </p:txBody>
+      </p:sp>
+      <p:sp>
+        <p:nvSpPr>
+          <p:cNvPr id="17" name="Rectangle 16"/>
+          <p:cNvSpPr/>
+          <p:nvPr/>
+        </p:nvSpPr>
+        <p:spPr>
+          <a:xfrm>
+            <a:off x="700000" y="4189999"/>
+            <a:ext cx="11000000" cy="833333"/>
+          </a:xfrm>
+          <a:prstGeom prst="rect">
+            <a:avLst/>
+          </a:prstGeom>
+          <a:solidFill>
+            <a:srgbClr val="FFFFFF"/>
+          </a:solidFill>
+          <a:ln w="12700">
+            <a:solidFill>
+              <a:srgbClr val="999999"/>
+            </a:solidFill>
+          </a:ln>
+        </p:spPr>
+        <p:style>
+          <a:lnRef idx="1">
+            <a:schemeClr val="accent1"/>
+          </a:lnRef>
+          <a:fillRef idx="3">
+            <a:schemeClr val="accent1"/>
+          </a:fillRef>
+          <a:effectRef idx="2">
+            <a:schemeClr val="accent1"/>
+          </a:effectRef>
+          <a:fontRef idx="minor">
+            <a:schemeClr val="lt1"/>
+          </a:fontRef>
+        </p:style>
+        <p:txBody>
+          <a:bodyPr rtlCol="0" anchor="ctr"/>
+          <a:lstStyle/>
+          <a:p>
+            <a:pPr algn="ctr"/>
+          </a:p>
+        </p:txBody>
+      </p:sp>
+      <p:sp>
+        <p:nvSpPr>
+          <p:cNvPr id="18" name="Rectangle 17"/>
+          <p:cNvSpPr/>
+          <p:nvPr/>
+        </p:nvSpPr>
+        <p:spPr>
+          <a:xfrm>
+            <a:off x="700000" y="4189999"/>
+            <a:ext cx="90000" cy="833333"/>
+          </a:xfrm>
+          <a:prstGeom prst="rect">
+            <a:avLst/>
+          </a:prstGeom>
+          <a:solidFill>
+            <a:srgbClr val="CC0000"/>
+          </a:solidFill>
+          <a:ln>
+            <a:noFill/>
+          </a:ln>
+        </p:spPr>
+        <p:style>
+          <a:lnRef idx="1">
+            <a:schemeClr val="accent1"/>
+          </a:lnRef>
+          <a:fillRef idx="3">
+            <a:schemeClr val="accent1"/>
+          </a:fillRef>
+          <a:effectRef idx="2">
+            <a:schemeClr val="accent1"/>
+          </a:effectRef>
+          <a:fontRef idx="minor">
+            <a:schemeClr val="lt1"/>
+          </a:fontRef>
+        </p:style>
+        <p:txBody>
+          <a:bodyPr rtlCol="0" anchor="ctr"/>
+          <a:lstStyle/>
+          <a:p>
+            <a:pPr algn="ctr"/>
+          </a:p>
+        </p:txBody>
+      </p:sp>
+      <p:sp>
+        <p:nvSpPr>
+          <p:cNvPr id="19" name="TextBox 18"/>
+          <p:cNvSpPr txBox="1"/>
+          <p:nvPr/>
+        </p:nvSpPr>
+        <p:spPr>
+          <a:xfrm>
+            <a:off x="1000000" y="4269999"/>
+            <a:ext cx="10400000" cy="673333"/>
+          </a:xfrm>
+          <a:prstGeom prst="rect">
+            <a:avLst/>
+          </a:prstGeom>
+          <a:noFill/>
+        </p:spPr>
+        <p:txBody>
+          <a:bodyPr wrap="square" anchor="ctr">
+            <a:spAutoFit/>
+          </a:bodyPr>
+          <a:lstStyle/>
+          <a:p>
+            <a:pPr algn="l"/>
+            <a:r>
+              <a:rPr sz="1200" b="0">
+                <a:solidFill>
+                  <a:srgbClr val="333333"/>
+                </a:solidFill>
+                <a:latin typeface="Open Sans"/>
+                <a:ea typeface="Open Sans"/>
+                <a:cs typeface="Open Sans"/>
+              </a:rPr>
+              <a:t>К высоковольтным проводам не приближайтесь</a:t>
+            </a:r>
+          </a:p>
+        </p:txBody>
+      </p:sp>
+      <p:sp>
+        <p:nvSpPr>
+          <p:cNvPr id="20" name="Rectangle 19"/>
+          <p:cNvSpPr/>
+          <p:nvPr/>
+        </p:nvSpPr>
+        <p:spPr>
+          <a:xfrm>
+            <a:off x="700000" y="5103332"/>
+            <a:ext cx="11000000" cy="833333"/>
+          </a:xfrm>
+          <a:prstGeom prst="rect">
+            <a:avLst/>
+          </a:prstGeom>
+          <a:solidFill>
+            <a:srgbClr val="FFFFFF"/>
+          </a:solidFill>
+          <a:ln w="12700">
+            <a:solidFill>
+              <a:srgbClr val="999999"/>
+            </a:solidFill>
+          </a:ln>
+        </p:spPr>
+        <p:style>
+          <a:lnRef idx="1">
+            <a:schemeClr val="accent1"/>
+          </a:lnRef>
+          <a:fillRef idx="3">
+            <a:schemeClr val="accent1"/>
+          </a:fillRef>
+          <a:effectRef idx="2">
+            <a:schemeClr val="accent1"/>
+          </a:effectRef>
+          <a:fontRef idx="minor">
+            <a:schemeClr val="lt1"/>
+          </a:fontRef>
+        </p:style>
+        <p:txBody>
+          <a:bodyPr rtlCol="0" anchor="ctr"/>
+          <a:lstStyle/>
+          <a:p>
+            <a:pPr algn="ctr"/>
+          </a:p>
+        </p:txBody>
+      </p:sp>
+      <p:sp>
+        <p:nvSpPr>
+          <p:cNvPr id="21" name="Rectangle 20"/>
+          <p:cNvSpPr/>
+          <p:nvPr/>
+        </p:nvSpPr>
+        <p:spPr>
+          <a:xfrm>
+            <a:off x="700000" y="5103332"/>
+            <a:ext cx="90000" cy="833333"/>
+          </a:xfrm>
+          <a:prstGeom prst="rect">
+            <a:avLst/>
+          </a:prstGeom>
+          <a:solidFill>
+            <a:srgbClr val="CC0000"/>
+          </a:solidFill>
+          <a:ln>
+            <a:noFill/>
+          </a:ln>
+        </p:spPr>
+        <p:style>
+          <a:lnRef idx="1">
+            <a:schemeClr val="accent1"/>
+          </a:lnRef>
+          <a:fillRef idx="3">
+            <a:schemeClr val="accent1"/>
+          </a:fillRef>
+          <a:effectRef idx="2">
+            <a:schemeClr val="accent1"/>
+          </a:effectRef>
+          <a:fontRef idx="minor">
+            <a:schemeClr val="lt1"/>
+          </a:fontRef>
+        </p:style>
+        <p:txBody>
+          <a:bodyPr rtlCol="0" anchor="ctr"/>
+          <a:lstStyle/>
+          <a:p>
+            <a:pPr algn="ctr"/>
+          </a:p>
+        </p:txBody>
+      </p:sp>
+      <p:sp>
+        <p:nvSpPr>
+          <p:cNvPr id="22" name="TextBox 21"/>
+          <p:cNvSpPr txBox="1"/>
+          <p:nvPr/>
+        </p:nvSpPr>
+        <p:spPr>
+          <a:xfrm>
+            <a:off x="1000000" y="5183332"/>
+            <a:ext cx="10400000" cy="673333"/>
+          </a:xfrm>
+          <a:prstGeom prst="rect">
+            <a:avLst/>
+          </a:prstGeom>
+          <a:noFill/>
+        </p:spPr>
+        <p:txBody>
+          <a:bodyPr wrap="square" anchor="ctr">
+            <a:spAutoFit/>
+          </a:bodyPr>
+          <a:lstStyle/>
+          <a:p>
+            <a:pPr algn="l"/>
+            <a:r>
+              <a:rPr sz="1200" b="0">
+                <a:solidFill>
+                  <a:srgbClr val="333333"/>
+                </a:solidFill>
+                <a:latin typeface="Open Sans"/>
+                <a:ea typeface="Open Sans"/>
+                <a:cs typeface="Open Sans"/>
+              </a:rPr>
+              <a:t>После отключения тока сразу проверьте дыхание</a:t>
+            </a:r>
+          </a:p>
+        </p:txBody>
+      </p:sp>
+      <p:sp>
+        <p:nvSpPr>
+          <p:cNvPr id="23" name="Rectangle 22"/>
+          <p:cNvSpPr/>
+          <p:nvPr/>
+        </p:nvSpPr>
+        <p:spPr>
+          <a:xfrm>
+            <a:off x="700000" y="6016665"/>
+            <a:ext cx="11000000" cy="833333"/>
+          </a:xfrm>
+          <a:prstGeom prst="rect">
+            <a:avLst/>
+          </a:prstGeom>
+          <a:solidFill>
+            <a:srgbClr val="FFFFFF"/>
+          </a:solidFill>
+          <a:ln w="12700">
+            <a:solidFill>
+              <a:srgbClr val="999999"/>
+            </a:solidFill>
+          </a:ln>
+        </p:spPr>
+        <p:style>
+          <a:lnRef idx="1">
+            <a:schemeClr val="accent1"/>
+          </a:lnRef>
+          <a:fillRef idx="3">
+            <a:schemeClr val="accent1"/>
+          </a:fillRef>
+          <a:effectRef idx="2">
+            <a:schemeClr val="accent1"/>
+          </a:effectRef>
+          <a:fontRef idx="minor">
+            <a:schemeClr val="lt1"/>
+          </a:fontRef>
+        </p:style>
+        <p:txBody>
+          <a:bodyPr rtlCol="0" anchor="ctr"/>
+          <a:lstStyle/>
+          <a:p>
+            <a:pPr algn="ctr"/>
+          </a:p>
+        </p:txBody>
+      </p:sp>
+      <p:sp>
+        <p:nvSpPr>
+          <p:cNvPr id="24" name="Rectangle 23"/>
+          <p:cNvSpPr/>
+          <p:nvPr/>
+        </p:nvSpPr>
+        <p:spPr>
+          <a:xfrm>
+            <a:off x="700000" y="6016665"/>
+            <a:ext cx="90000" cy="833333"/>
+          </a:xfrm>
+          <a:prstGeom prst="rect">
+            <a:avLst/>
+          </a:prstGeom>
+          <a:solidFill>
+            <a:srgbClr val="CC0000"/>
+          </a:solidFill>
+          <a:ln>
+            <a:noFill/>
+          </a:ln>
+        </p:spPr>
+        <p:style>
+          <a:lnRef idx="1">
+            <a:schemeClr val="accent1"/>
+          </a:lnRef>
+          <a:fillRef idx="3">
+            <a:schemeClr val="accent1"/>
+          </a:fillRef>
+          <a:effectRef idx="2">
+            <a:schemeClr val="accent1"/>
+          </a:effectRef>
+          <a:fontRef idx="minor">
+            <a:schemeClr val="lt1"/>
+          </a:fontRef>
+        </p:style>
+        <p:txBody>
+          <a:bodyPr rtlCol="0" anchor="ctr"/>
+          <a:lstStyle/>
+          <a:p>
+            <a:pPr algn="ctr"/>
+          </a:p>
+        </p:txBody>
+      </p:sp>
+      <p:sp>
+        <p:nvSpPr>
+          <p:cNvPr id="25" name="TextBox 24"/>
+          <p:cNvSpPr txBox="1"/>
+          <p:nvPr/>
+        </p:nvSpPr>
+        <p:spPr>
+          <a:xfrm>
+            <a:off x="1000000" y="6096665"/>
+            <a:ext cx="10400000" cy="673333"/>
+          </a:xfrm>
+          <a:prstGeom prst="rect">
+            <a:avLst/>
+          </a:prstGeom>
+          <a:noFill/>
+        </p:spPr>
+        <p:txBody>
+          <a:bodyPr wrap="square" anchor="ctr">
+            <a:spAutoFit/>
+          </a:bodyPr>
+          <a:lstStyle/>
+          <a:p>
+            <a:pPr algn="l"/>
+            <a:r>
+              <a:rPr sz="1200" b="0">
+                <a:solidFill>
+                  <a:srgbClr val="333333"/>
+                </a:solidFill>
+                <a:latin typeface="Open Sans"/>
+                <a:ea typeface="Open Sans"/>
+                <a:cs typeface="Open Sans"/>
+              </a:rPr>
+              <a:t>При солнечном ударе переносите в тень и охлаждайте</a:t>
+            </a:r>
+          </a:p>
+        </p:txBody>
+      </p:sp>
+    </p:spTree>
+  </p:cSld>
+  <p:clrMapOvr>
+    <a:masterClrMapping/>
+  </p:clrMapOvr>
+</p:sld>
+</file>
+
+<file path=ppt/slides/slide13.xml><?xml version="1.0" encoding="utf-8"?>
+<p:sld xmlns:a="http://schemas.openxmlformats.org/drawingml/2006/main" xmlns:p="http://schemas.openxmlformats.org/presentationml/2006/main" xmlns:r="http://schemas.openxmlformats.org/officeDocument/2006/relationships">
+  <p:cSld>
+    <p:spTree>
+      <p:nvGrpSpPr>
+        <p:cNvPr id="1" name=""/>
+        <p:cNvGrpSpPr/>
+        <p:nvPr/>
+      </p:nvGrpSpPr>
+      <p:grpSpPr/>
+      <p:sp>
+        <p:nvSpPr>
+          <p:cNvPr id="2" name="Rectangle 1"/>
+          <p:cNvSpPr/>
+          <p:nvPr/>
+        </p:nvSpPr>
+        <p:spPr>
+          <a:xfrm>
+            <a:off x="0" y="0"/>
+            <a:ext cx="12191695" cy="6858000"/>
+          </a:xfrm>
+          <a:prstGeom prst="rect">
+            <a:avLst/>
+          </a:prstGeom>
+          <a:solidFill>
+            <a:srgbClr val="FFFFFF"/>
+          </a:solidFill>
+          <a:ln>
+            <a:noFill/>
+          </a:ln>
+        </p:spPr>
+        <p:style>
+          <a:lnRef idx="1">
+            <a:schemeClr val="accent1"/>
+          </a:lnRef>
+          <a:fillRef idx="3">
+            <a:schemeClr val="accent1"/>
+          </a:fillRef>
+          <a:effectRef idx="2">
+            <a:schemeClr val="accent1"/>
+          </a:effectRef>
+          <a:fontRef idx="minor">
+            <a:schemeClr val="lt1"/>
+          </a:fontRef>
+        </p:style>
+        <p:txBody>
+          <a:bodyPr rtlCol="0" anchor="ctr"/>
+          <a:lstStyle/>
+          <a:p>
+            <a:pPr algn="ctr"/>
+          </a:p>
+        </p:txBody>
+      </p:sp>
+      <p:sp>
+        <p:nvSpPr>
+          <p:cNvPr id="3" name="TextBox 2"/>
+          <p:cNvSpPr txBox="1"/>
+          <p:nvPr/>
+        </p:nvSpPr>
+        <p:spPr>
+          <a:xfrm>
+            <a:off x="700000" y="250000"/>
+            <a:ext cx="11200000" cy="550000"/>
+          </a:xfrm>
+          <a:prstGeom prst="rect">
+            <a:avLst/>
+          </a:prstGeom>
+          <a:noFill/>
+        </p:spPr>
+        <p:txBody>
+          <a:bodyPr wrap="square" anchor="t">
+            <a:spAutoFit/>
+          </a:bodyPr>
+          <a:lstStyle/>
+          <a:p>
+            <a:pPr algn="l"/>
+            <a:r>
+              <a:rPr sz="2200" b="1">
+                <a:solidFill>
+                  <a:srgbClr val="333333"/>
+                </a:solidFill>
+                <a:latin typeface="Open Sans"/>
+                <a:ea typeface="Open Sans"/>
+                <a:cs typeface="Open Sans"/>
+              </a:rPr>
+              <a:t>ПАМЯТКА</a:t>
+            </a:r>
+          </a:p>
+        </p:txBody>
+      </p:sp>
+      <p:sp>
+        <p:nvSpPr>
+          <p:cNvPr id="4" name="Rectangle 3"/>
+          <p:cNvSpPr/>
+          <p:nvPr/>
+        </p:nvSpPr>
+        <p:spPr>
+          <a:xfrm>
+            <a:off x="700000" y="850000"/>
+            <a:ext cx="9000000" cy="28000"/>
+          </a:xfrm>
+          <a:prstGeom prst="rect">
+            <a:avLst/>
+          </a:prstGeom>
+          <a:solidFill>
+            <a:srgbClr val="555555"/>
+          </a:solidFill>
+          <a:ln>
+            <a:noFill/>
+          </a:ln>
+        </p:spPr>
+        <p:style>
+          <a:lnRef idx="1">
+            <a:schemeClr val="accent1"/>
+          </a:lnRef>
+          <a:fillRef idx="3">
+            <a:schemeClr val="accent1"/>
+          </a:fillRef>
+          <a:effectRef idx="2">
+            <a:schemeClr val="accent1"/>
+          </a:effectRef>
+          <a:fontRef idx="minor">
+            <a:schemeClr val="lt1"/>
+          </a:fontRef>
+        </p:style>
+        <p:txBody>
+          <a:bodyPr rtlCol="0" anchor="ctr"/>
+          <a:lstStyle/>
+          <a:p>
+            <a:pPr algn="ctr"/>
+          </a:p>
+        </p:txBody>
+      </p:sp>
+      <p:sp>
+        <p:nvSpPr>
+          <p:cNvPr id="5" name="TextBox 4"/>
+          <p:cNvSpPr txBox="1"/>
+          <p:nvPr/>
+        </p:nvSpPr>
+        <p:spPr>
+          <a:xfrm>
+            <a:off x="700000" y="920000"/>
+            <a:ext cx="11000000" cy="350000"/>
+          </a:xfrm>
+          <a:prstGeom prst="rect">
+            <a:avLst/>
+          </a:prstGeom>
+          <a:noFill/>
+        </p:spPr>
+        <p:txBody>
+          <a:bodyPr wrap="square" anchor="t">
+            <a:spAutoFit/>
+          </a:bodyPr>
+          <a:lstStyle/>
+          <a:p>
+            <a:pPr algn="l"/>
+            <a:r>
+              <a:rPr sz="1200" b="0">
+                <a:solidFill>
+                  <a:srgbClr val="666666"/>
+                </a:solidFill>
+                <a:latin typeface="Open Sans"/>
+                <a:ea typeface="Open Sans"/>
+                <a:cs typeface="Open Sans"/>
+              </a:rPr>
+              <a:t>Оказание первой помощи при травмах, ранениях и поражениях, прочих состояниях</a:t>
+            </a:r>
+          </a:p>
+        </p:txBody>
+      </p:sp>
+      <p:sp>
+        <p:nvSpPr>
+          <p:cNvPr id="6" name="Rectangle 5"/>
+          <p:cNvSpPr/>
+          <p:nvPr/>
+        </p:nvSpPr>
+        <p:spPr>
+          <a:xfrm>
+            <a:off x="0" y="2800000"/>
+            <a:ext cx="420000" cy="420000"/>
+          </a:xfrm>
+          <a:prstGeom prst="rect">
+            <a:avLst/>
+          </a:prstGeom>
+          <a:solidFill>
+            <a:srgbClr val="555555"/>
+          </a:solidFill>
+          <a:ln>
+            <a:noFill/>
+          </a:ln>
+        </p:spPr>
+        <p:style>
+          <a:lnRef idx="1">
+            <a:schemeClr val="accent1"/>
+          </a:lnRef>
+          <a:fillRef idx="3">
+            <a:schemeClr val="accent1"/>
+          </a:fillRef>
+          <a:effectRef idx="2">
+            <a:schemeClr val="accent1"/>
+          </a:effectRef>
+          <a:fontRef idx="minor">
+            <a:schemeClr val="lt1"/>
+          </a:fontRef>
+        </p:style>
+        <p:txBody>
+          <a:bodyPr rtlCol="0" anchor="ctr"/>
+          <a:lstStyle/>
+          <a:p>
+            <a:pPr algn="ctr"/>
+          </a:p>
+        </p:txBody>
+      </p:sp>
+      <p:sp>
+        <p:nvSpPr>
+          <p:cNvPr id="7" name="TextBox 6"/>
+          <p:cNvSpPr txBox="1"/>
+          <p:nvPr/>
+        </p:nvSpPr>
+        <p:spPr>
+          <a:xfrm>
+            <a:off x="0" y="2800000"/>
+            <a:ext cx="420000" cy="420000"/>
+          </a:xfrm>
+          <a:prstGeom prst="rect">
+            <a:avLst/>
+          </a:prstGeom>
+          <a:noFill/>
+        </p:spPr>
+        <p:txBody>
+          <a:bodyPr wrap="square" anchor="ctr">
+            <a:spAutoFit/>
+          </a:bodyPr>
+          <a:lstStyle/>
+          <a:p>
+            <a:pPr algn="ctr"/>
+            <a:r>
+              <a:rPr sz="1400" b="1">
+                <a:solidFill>
+                  <a:srgbClr val="FFFFFF"/>
+                </a:solidFill>
+                <a:latin typeface="Open Sans"/>
+                <a:ea typeface="Open Sans"/>
+                <a:cs typeface="Open Sans"/>
+              </a:rPr>
+              <a:t>13</a:t>
+            </a:r>
+          </a:p>
+        </p:txBody>
+      </p:sp>
+      <p:pic>
+        <p:nvPicPr>
+          <p:cNvPr id="8" name="Picture 7" descr="pamyatka-tema4-khim-elektro-izluchenie-16x9.png"/>
+          <p:cNvPicPr>
+            <a:picLocks noChangeAspect="1"/>
+          </p:cNvPicPr>
+          <p:nvPr/>
+        </p:nvPicPr>
+        <p:blipFill>
+          <a:blip r:embed="rId2"/>
+          <a:stretch>
+            <a:fillRect/>
+          </a:stretch>
+        </p:blipFill>
+        <p:spPr>
+          <a:xfrm>
+            <a:off x="2300000" y="1400000"/>
+            <a:ext cx="7800000" cy="5200000"/>
+          </a:xfrm>
+          <a:prstGeom prst="rect">
+            <a:avLst/>
+          </a:prstGeom>
+        </p:spPr>
+      </p:pic>
+    </p:spTree>
+  </p:cSld>
+  <p:clrMapOvr>
+    <a:masterClrMapping/>
+  </p:clrMapOvr>
+</p:sld>
+</file>
+
+<file path=ppt/slides/slide14.xml><?xml version="1.0" encoding="utf-8"?>
+<p:sld xmlns:a="http://schemas.openxmlformats.org/drawingml/2006/main" xmlns:p="http://schemas.openxmlformats.org/presentationml/2006/main" xmlns:r="http://schemas.openxmlformats.org/officeDocument/2006/relationships">
+  <p:cSld>
+    <p:spTree>
+      <p:nvGrpSpPr>
+        <p:cNvPr id="1" name=""/>
+        <p:cNvGrpSpPr/>
+        <p:nvPr/>
+      </p:nvGrpSpPr>
+      <p:grpSpPr/>
+      <p:sp>
+        <p:nvSpPr>
+          <p:cNvPr id="2" name="Rectangle 1"/>
+          <p:cNvSpPr/>
+          <p:nvPr/>
+        </p:nvSpPr>
+        <p:spPr>
+          <a:xfrm>
+            <a:off x="0" y="0"/>
             <a:ext cx="3400000" cy="6858000"/>
           </a:xfrm>
           <a:prstGeom prst="rect">
@@ -4267,7 +6481,7 @@
                 <a:ea typeface="Open Sans"/>
                 <a:cs typeface="Open Sans"/>
               </a:rPr>
-              <a:t>Электротравма</a:t>
+              <a:t>Электробезопасность</a:t>
             </a:r>
           </a:p>
         </p:txBody>
@@ -4429,7 +6643,7 @@
                 <a:ea typeface="Open Sans"/>
                 <a:cs typeface="Open Sans"/>
               </a:rPr>
-              <a:t>Солнечный ожог</a:t>
+              <a:t>Последствия электротравмы</a:t>
             </a:r>
           </a:p>
         </p:txBody>
@@ -4591,7 +6805,7 @@
                 <a:ea typeface="Open Sans"/>
                 <a:cs typeface="Open Sans"/>
               </a:rPr>
-              <a:t>Солнечный удар</a:t>
+              <a:t>Солнечное поражение</a:t>
             </a:r>
           </a:p>
         </p:txBody>
@@ -4689,7 +6903,7 @@
                 <a:ea typeface="Open Sans"/>
                 <a:cs typeface="Open Sans"/>
               </a:rPr>
-              <a:t>ХИМИЧЕСКИЙ ОЖОГ КОЖИ</a:t>
+              <a:t>РАЗНЫЕ ФАКТОРЫ — ЕДИНЫЙ ПЕРВЫЙ ШАГ</a:t>
             </a:r>
           </a:p>
         </p:txBody>
@@ -4856,57 +7070,14 @@
       </p:sp>
       <p:sp>
         <p:nvSpPr>
-          <p:cNvPr id="8" name="Oval 7"/>
-          <p:cNvSpPr/>
-          <p:nvPr/>
-        </p:nvSpPr>
-        <p:spPr>
-          <a:xfrm>
-            <a:off x="700000" y="1450000"/>
-            <a:ext cx="550000" cy="550000"/>
-          </a:xfrm>
-          <a:prstGeom prst="ellipse">
-            <a:avLst/>
-          </a:prstGeom>
-          <a:solidFill>
-            <a:srgbClr val="CC0000"/>
-          </a:solidFill>
-          <a:ln>
-            <a:noFill/>
-          </a:ln>
-        </p:spPr>
-        <p:style>
-          <a:lnRef idx="1">
-            <a:schemeClr val="accent1"/>
-          </a:lnRef>
-          <a:fillRef idx="3">
-            <a:schemeClr val="accent1"/>
-          </a:fillRef>
-          <a:effectRef idx="2">
-            <a:schemeClr val="accent1"/>
-          </a:effectRef>
-          <a:fontRef idx="minor">
-            <a:schemeClr val="lt1"/>
-          </a:fontRef>
-        </p:style>
-        <p:txBody>
-          <a:bodyPr rtlCol="0" anchor="ctr"/>
-          <a:lstStyle/>
-          <a:p>
-            <a:pPr algn="ctr"/>
-          </a:p>
-        </p:txBody>
-      </p:sp>
-      <p:sp>
-        <p:nvSpPr>
-          <p:cNvPr id="9" name="TextBox 8"/>
+          <p:cNvPr id="8" name="TextBox 7"/>
           <p:cNvSpPr txBox="1"/>
           <p:nvPr/>
         </p:nvSpPr>
         <p:spPr>
           <a:xfrm>
-            <a:off x="700000" y="1450000"/>
-            <a:ext cx="550000" cy="550000"/>
+            <a:off x="700000" y="1500000"/>
+            <a:ext cx="11000000" cy="4900000"/>
           </a:xfrm>
           <a:prstGeom prst="rect">
             <a:avLst/>
@@ -4914,96 +7085,14 @@
           <a:noFill/>
         </p:spPr>
         <p:txBody>
-          <a:bodyPr wrap="square" anchor="ctr">
+          <a:bodyPr wrap="square" anchor="t">
             <a:spAutoFit/>
           </a:bodyPr>
           <a:lstStyle/>
           <a:p>
-            <a:pPr algn="ctr"/>
-            <a:r>
-              <a:rPr sz="1400" b="1">
-                <a:solidFill>
-                  <a:srgbClr val="FFFFFF"/>
-                </a:solidFill>
-                <a:latin typeface="Open Sans"/>
-                <a:ea typeface="Open Sans"/>
-                <a:cs typeface="Open Sans"/>
-              </a:rPr>
-              <a:t>1</a:t>
-            </a:r>
-          </a:p>
-        </p:txBody>
-      </p:sp>
-      <p:sp>
-        <p:nvSpPr>
-          <p:cNvPr id="10" name="Rectangle 9"/>
-          <p:cNvSpPr/>
-          <p:nvPr/>
-        </p:nvSpPr>
-        <p:spPr>
-          <a:xfrm>
-            <a:off x="1450000" y="1450000"/>
-            <a:ext cx="10500000" cy="550000"/>
-          </a:xfrm>
-          <a:prstGeom prst="rect">
-            <a:avLst/>
-          </a:prstGeom>
-          <a:solidFill>
-            <a:srgbClr val="FFFFFF"/>
-          </a:solidFill>
-          <a:ln w="12700">
-            <a:solidFill>
-              <a:srgbClr val="999999"/>
-            </a:solidFill>
-          </a:ln>
-        </p:spPr>
-        <p:style>
-          <a:lnRef idx="1">
-            <a:schemeClr val="accent1"/>
-          </a:lnRef>
-          <a:fillRef idx="3">
-            <a:schemeClr val="accent1"/>
-          </a:fillRef>
-          <a:effectRef idx="2">
-            <a:schemeClr val="accent1"/>
-          </a:effectRef>
-          <a:fontRef idx="minor">
-            <a:schemeClr val="lt1"/>
-          </a:fontRef>
-        </p:style>
-        <p:txBody>
-          <a:bodyPr rtlCol="0" anchor="ctr"/>
-          <a:lstStyle/>
-          <a:p>
-            <a:pPr algn="ctr"/>
-          </a:p>
-        </p:txBody>
-      </p:sp>
-      <p:sp>
-        <p:nvSpPr>
-          <p:cNvPr id="11" name="TextBox 10"/>
-          <p:cNvSpPr txBox="1"/>
-          <p:nvPr/>
-        </p:nvSpPr>
-        <p:spPr>
-          <a:xfrm>
-            <a:off x="1650000" y="1450000"/>
-            <a:ext cx="10100000" cy="550000"/>
-          </a:xfrm>
-          <a:prstGeom prst="rect">
-            <a:avLst/>
-          </a:prstGeom>
-          <a:noFill/>
-        </p:spPr>
-        <p:txBody>
-          <a:bodyPr wrap="square" anchor="ctr">
-            <a:spAutoFit/>
-          </a:bodyPr>
-          <a:lstStyle/>
-          <a:p>
             <a:pPr algn="l"/>
             <a:r>
-              <a:rPr sz="1300" b="0">
+              <a:rPr sz="1500" b="0">
                 <a:solidFill>
                   <a:srgbClr val="333333"/>
                 </a:solidFill>
@@ -5011,817 +7100,7 @@
                 <a:ea typeface="Open Sans"/>
                 <a:cs typeface="Open Sans"/>
               </a:rPr>
-              <a:t>Защитите себя от контакта с веществом.</a:t>
-            </a:r>
-          </a:p>
-        </p:txBody>
-      </p:sp>
-      <p:sp>
-        <p:nvSpPr>
-          <p:cNvPr id="12" name="Oval 11"/>
-          <p:cNvSpPr/>
-          <p:nvPr/>
-        </p:nvSpPr>
-        <p:spPr>
-          <a:xfrm>
-            <a:off x="700000" y="2320000"/>
-            <a:ext cx="550000" cy="550000"/>
-          </a:xfrm>
-          <a:prstGeom prst="ellipse">
-            <a:avLst/>
-          </a:prstGeom>
-          <a:solidFill>
-            <a:srgbClr val="555555"/>
-          </a:solidFill>
-          <a:ln>
-            <a:noFill/>
-          </a:ln>
-        </p:spPr>
-        <p:style>
-          <a:lnRef idx="1">
-            <a:schemeClr val="accent1"/>
-          </a:lnRef>
-          <a:fillRef idx="3">
-            <a:schemeClr val="accent1"/>
-          </a:fillRef>
-          <a:effectRef idx="2">
-            <a:schemeClr val="accent1"/>
-          </a:effectRef>
-          <a:fontRef idx="minor">
-            <a:schemeClr val="lt1"/>
-          </a:fontRef>
-        </p:style>
-        <p:txBody>
-          <a:bodyPr rtlCol="0" anchor="ctr"/>
-          <a:lstStyle/>
-          <a:p>
-            <a:pPr algn="ctr"/>
-          </a:p>
-        </p:txBody>
-      </p:sp>
-      <p:sp>
-        <p:nvSpPr>
-          <p:cNvPr id="13" name="TextBox 12"/>
-          <p:cNvSpPr txBox="1"/>
-          <p:nvPr/>
-        </p:nvSpPr>
-        <p:spPr>
-          <a:xfrm>
-            <a:off x="700000" y="2320000"/>
-            <a:ext cx="550000" cy="550000"/>
-          </a:xfrm>
-          <a:prstGeom prst="rect">
-            <a:avLst/>
-          </a:prstGeom>
-          <a:noFill/>
-        </p:spPr>
-        <p:txBody>
-          <a:bodyPr wrap="square" anchor="ctr">
-            <a:spAutoFit/>
-          </a:bodyPr>
-          <a:lstStyle/>
-          <a:p>
-            <a:pPr algn="ctr"/>
-            <a:r>
-              <a:rPr sz="1400" b="1">
-                <a:solidFill>
-                  <a:srgbClr val="FFFFFF"/>
-                </a:solidFill>
-                <a:latin typeface="Open Sans"/>
-                <a:ea typeface="Open Sans"/>
-                <a:cs typeface="Open Sans"/>
-              </a:rPr>
-              <a:t>2</a:t>
-            </a:r>
-          </a:p>
-        </p:txBody>
-      </p:sp>
-      <p:sp>
-        <p:nvSpPr>
-          <p:cNvPr id="14" name="Rectangle 13"/>
-          <p:cNvSpPr/>
-          <p:nvPr/>
-        </p:nvSpPr>
-        <p:spPr>
-          <a:xfrm>
-            <a:off x="1450000" y="2320000"/>
-            <a:ext cx="10500000" cy="550000"/>
-          </a:xfrm>
-          <a:prstGeom prst="rect">
-            <a:avLst/>
-          </a:prstGeom>
-          <a:solidFill>
-            <a:srgbClr val="FFFFFF"/>
-          </a:solidFill>
-          <a:ln w="12700">
-            <a:solidFill>
-              <a:srgbClr val="999999"/>
-            </a:solidFill>
-          </a:ln>
-        </p:spPr>
-        <p:style>
-          <a:lnRef idx="1">
-            <a:schemeClr val="accent1"/>
-          </a:lnRef>
-          <a:fillRef idx="3">
-            <a:schemeClr val="accent1"/>
-          </a:fillRef>
-          <a:effectRef idx="2">
-            <a:schemeClr val="accent1"/>
-          </a:effectRef>
-          <a:fontRef idx="minor">
-            <a:schemeClr val="lt1"/>
-          </a:fontRef>
-        </p:style>
-        <p:txBody>
-          <a:bodyPr rtlCol="0" anchor="ctr"/>
-          <a:lstStyle/>
-          <a:p>
-            <a:pPr algn="ctr"/>
-          </a:p>
-        </p:txBody>
-      </p:sp>
-      <p:sp>
-        <p:nvSpPr>
-          <p:cNvPr id="15" name="TextBox 14"/>
-          <p:cNvSpPr txBox="1"/>
-          <p:nvPr/>
-        </p:nvSpPr>
-        <p:spPr>
-          <a:xfrm>
-            <a:off x="1650000" y="2320000"/>
-            <a:ext cx="10100000" cy="550000"/>
-          </a:xfrm>
-          <a:prstGeom prst="rect">
-            <a:avLst/>
-          </a:prstGeom>
-          <a:noFill/>
-        </p:spPr>
-        <p:txBody>
-          <a:bodyPr wrap="square" anchor="ctr">
-            <a:spAutoFit/>
-          </a:bodyPr>
-          <a:lstStyle/>
-          <a:p>
-            <a:pPr algn="l"/>
-            <a:r>
-              <a:rPr sz="1300" b="0">
-                <a:solidFill>
-                  <a:srgbClr val="333333"/>
-                </a:solidFill>
-                <a:latin typeface="Open Sans"/>
-                <a:ea typeface="Open Sans"/>
-                <a:cs typeface="Open Sans"/>
-              </a:rPr>
-              <a:t>Удалите загрязненную одежду.</a:t>
-            </a:r>
-          </a:p>
-        </p:txBody>
-      </p:sp>
-      <p:sp>
-        <p:nvSpPr>
-          <p:cNvPr id="16" name="Oval 15"/>
-          <p:cNvSpPr/>
-          <p:nvPr/>
-        </p:nvSpPr>
-        <p:spPr>
-          <a:xfrm>
-            <a:off x="700000" y="3190000"/>
-            <a:ext cx="550000" cy="550000"/>
-          </a:xfrm>
-          <a:prstGeom prst="ellipse">
-            <a:avLst/>
-          </a:prstGeom>
-          <a:solidFill>
-            <a:srgbClr val="555555"/>
-          </a:solidFill>
-          <a:ln>
-            <a:noFill/>
-          </a:ln>
-        </p:spPr>
-        <p:style>
-          <a:lnRef idx="1">
-            <a:schemeClr val="accent1"/>
-          </a:lnRef>
-          <a:fillRef idx="3">
-            <a:schemeClr val="accent1"/>
-          </a:fillRef>
-          <a:effectRef idx="2">
-            <a:schemeClr val="accent1"/>
-          </a:effectRef>
-          <a:fontRef idx="minor">
-            <a:schemeClr val="lt1"/>
-          </a:fontRef>
-        </p:style>
-        <p:txBody>
-          <a:bodyPr rtlCol="0" anchor="ctr"/>
-          <a:lstStyle/>
-          <a:p>
-            <a:pPr algn="ctr"/>
-          </a:p>
-        </p:txBody>
-      </p:sp>
-      <p:sp>
-        <p:nvSpPr>
-          <p:cNvPr id="17" name="TextBox 16"/>
-          <p:cNvSpPr txBox="1"/>
-          <p:nvPr/>
-        </p:nvSpPr>
-        <p:spPr>
-          <a:xfrm>
-            <a:off x="700000" y="3190000"/>
-            <a:ext cx="550000" cy="550000"/>
-          </a:xfrm>
-          <a:prstGeom prst="rect">
-            <a:avLst/>
-          </a:prstGeom>
-          <a:noFill/>
-        </p:spPr>
-        <p:txBody>
-          <a:bodyPr wrap="square" anchor="ctr">
-            <a:spAutoFit/>
-          </a:bodyPr>
-          <a:lstStyle/>
-          <a:p>
-            <a:pPr algn="ctr"/>
-            <a:r>
-              <a:rPr sz="1400" b="1">
-                <a:solidFill>
-                  <a:srgbClr val="FFFFFF"/>
-                </a:solidFill>
-                <a:latin typeface="Open Sans"/>
-                <a:ea typeface="Open Sans"/>
-                <a:cs typeface="Open Sans"/>
-              </a:rPr>
-              <a:t>3</a:t>
-            </a:r>
-          </a:p>
-        </p:txBody>
-      </p:sp>
-      <p:sp>
-        <p:nvSpPr>
-          <p:cNvPr id="18" name="Rectangle 17"/>
-          <p:cNvSpPr/>
-          <p:nvPr/>
-        </p:nvSpPr>
-        <p:spPr>
-          <a:xfrm>
-            <a:off x="1450000" y="3190000"/>
-            <a:ext cx="10500000" cy="550000"/>
-          </a:xfrm>
-          <a:prstGeom prst="rect">
-            <a:avLst/>
-          </a:prstGeom>
-          <a:solidFill>
-            <a:srgbClr val="FFFFFF"/>
-          </a:solidFill>
-          <a:ln w="12700">
-            <a:solidFill>
-              <a:srgbClr val="999999"/>
-            </a:solidFill>
-          </a:ln>
-        </p:spPr>
-        <p:style>
-          <a:lnRef idx="1">
-            <a:schemeClr val="accent1"/>
-          </a:lnRef>
-          <a:fillRef idx="3">
-            <a:schemeClr val="accent1"/>
-          </a:fillRef>
-          <a:effectRef idx="2">
-            <a:schemeClr val="accent1"/>
-          </a:effectRef>
-          <a:fontRef idx="minor">
-            <a:schemeClr val="lt1"/>
-          </a:fontRef>
-        </p:style>
-        <p:txBody>
-          <a:bodyPr rtlCol="0" anchor="ctr"/>
-          <a:lstStyle/>
-          <a:p>
-            <a:pPr algn="ctr"/>
-          </a:p>
-        </p:txBody>
-      </p:sp>
-      <p:sp>
-        <p:nvSpPr>
-          <p:cNvPr id="19" name="TextBox 18"/>
-          <p:cNvSpPr txBox="1"/>
-          <p:nvPr/>
-        </p:nvSpPr>
-        <p:spPr>
-          <a:xfrm>
-            <a:off x="1650000" y="3190000"/>
-            <a:ext cx="10100000" cy="550000"/>
-          </a:xfrm>
-          <a:prstGeom prst="rect">
-            <a:avLst/>
-          </a:prstGeom>
-          <a:noFill/>
-        </p:spPr>
-        <p:txBody>
-          <a:bodyPr wrap="square" anchor="ctr">
-            <a:spAutoFit/>
-          </a:bodyPr>
-          <a:lstStyle/>
-          <a:p>
-            <a:pPr algn="l"/>
-            <a:r>
-              <a:rPr sz="1300" b="0">
-                <a:solidFill>
-                  <a:srgbClr val="333333"/>
-                </a:solidFill>
-                <a:latin typeface="Open Sans"/>
-                <a:ea typeface="Open Sans"/>
-                <a:cs typeface="Open Sans"/>
-              </a:rPr>
-              <a:t>Промывайте пораженное место водой не менее 20 минут.</a:t>
-            </a:r>
-          </a:p>
-        </p:txBody>
-      </p:sp>
-      <p:sp>
-        <p:nvSpPr>
-          <p:cNvPr id="20" name="Oval 19"/>
-          <p:cNvSpPr/>
-          <p:nvPr/>
-        </p:nvSpPr>
-        <p:spPr>
-          <a:xfrm>
-            <a:off x="700000" y="4060000"/>
-            <a:ext cx="550000" cy="550000"/>
-          </a:xfrm>
-          <a:prstGeom prst="ellipse">
-            <a:avLst/>
-          </a:prstGeom>
-          <a:solidFill>
-            <a:srgbClr val="555555"/>
-          </a:solidFill>
-          <a:ln>
-            <a:noFill/>
-          </a:ln>
-        </p:spPr>
-        <p:style>
-          <a:lnRef idx="1">
-            <a:schemeClr val="accent1"/>
-          </a:lnRef>
-          <a:fillRef idx="3">
-            <a:schemeClr val="accent1"/>
-          </a:fillRef>
-          <a:effectRef idx="2">
-            <a:schemeClr val="accent1"/>
-          </a:effectRef>
-          <a:fontRef idx="minor">
-            <a:schemeClr val="lt1"/>
-          </a:fontRef>
-        </p:style>
-        <p:txBody>
-          <a:bodyPr rtlCol="0" anchor="ctr"/>
-          <a:lstStyle/>
-          <a:p>
-            <a:pPr algn="ctr"/>
-          </a:p>
-        </p:txBody>
-      </p:sp>
-      <p:sp>
-        <p:nvSpPr>
-          <p:cNvPr id="21" name="TextBox 20"/>
-          <p:cNvSpPr txBox="1"/>
-          <p:nvPr/>
-        </p:nvSpPr>
-        <p:spPr>
-          <a:xfrm>
-            <a:off x="700000" y="4060000"/>
-            <a:ext cx="550000" cy="550000"/>
-          </a:xfrm>
-          <a:prstGeom prst="rect">
-            <a:avLst/>
-          </a:prstGeom>
-          <a:noFill/>
-        </p:spPr>
-        <p:txBody>
-          <a:bodyPr wrap="square" anchor="ctr">
-            <a:spAutoFit/>
-          </a:bodyPr>
-          <a:lstStyle/>
-          <a:p>
-            <a:pPr algn="ctr"/>
-            <a:r>
-              <a:rPr sz="1400" b="1">
-                <a:solidFill>
-                  <a:srgbClr val="FFFFFF"/>
-                </a:solidFill>
-                <a:latin typeface="Open Sans"/>
-                <a:ea typeface="Open Sans"/>
-                <a:cs typeface="Open Sans"/>
-              </a:rPr>
-              <a:t>4</a:t>
-            </a:r>
-          </a:p>
-        </p:txBody>
-      </p:sp>
-      <p:sp>
-        <p:nvSpPr>
-          <p:cNvPr id="22" name="Rectangle 21"/>
-          <p:cNvSpPr/>
-          <p:nvPr/>
-        </p:nvSpPr>
-        <p:spPr>
-          <a:xfrm>
-            <a:off x="1450000" y="4060000"/>
-            <a:ext cx="10500000" cy="550000"/>
-          </a:xfrm>
-          <a:prstGeom prst="rect">
-            <a:avLst/>
-          </a:prstGeom>
-          <a:solidFill>
-            <a:srgbClr val="FFFFFF"/>
-          </a:solidFill>
-          <a:ln w="12700">
-            <a:solidFill>
-              <a:srgbClr val="999999"/>
-            </a:solidFill>
-          </a:ln>
-        </p:spPr>
-        <p:style>
-          <a:lnRef idx="1">
-            <a:schemeClr val="accent1"/>
-          </a:lnRef>
-          <a:fillRef idx="3">
-            <a:schemeClr val="accent1"/>
-          </a:fillRef>
-          <a:effectRef idx="2">
-            <a:schemeClr val="accent1"/>
-          </a:effectRef>
-          <a:fontRef idx="minor">
-            <a:schemeClr val="lt1"/>
-          </a:fontRef>
-        </p:style>
-        <p:txBody>
-          <a:bodyPr rtlCol="0" anchor="ctr"/>
-          <a:lstStyle/>
-          <a:p>
-            <a:pPr algn="ctr"/>
-          </a:p>
-        </p:txBody>
-      </p:sp>
-      <p:sp>
-        <p:nvSpPr>
-          <p:cNvPr id="23" name="TextBox 22"/>
-          <p:cNvSpPr txBox="1"/>
-          <p:nvPr/>
-        </p:nvSpPr>
-        <p:spPr>
-          <a:xfrm>
-            <a:off x="1650000" y="4060000"/>
-            <a:ext cx="10100000" cy="550000"/>
-          </a:xfrm>
-          <a:prstGeom prst="rect">
-            <a:avLst/>
-          </a:prstGeom>
-          <a:noFill/>
-        </p:spPr>
-        <p:txBody>
-          <a:bodyPr wrap="square" anchor="ctr">
-            <a:spAutoFit/>
-          </a:bodyPr>
-          <a:lstStyle/>
-          <a:p>
-            <a:pPr algn="l"/>
-            <a:r>
-              <a:rPr sz="1300" b="0">
-                <a:solidFill>
-                  <a:srgbClr val="333333"/>
-                </a:solidFill>
-                <a:latin typeface="Open Sans"/>
-                <a:ea typeface="Open Sans"/>
-                <a:cs typeface="Open Sans"/>
-              </a:rPr>
-              <a:t>Наложите свободную сухую повязку.</a:t>
-            </a:r>
-          </a:p>
-        </p:txBody>
-      </p:sp>
-      <p:sp>
-        <p:nvSpPr>
-          <p:cNvPr id="24" name="Oval 23"/>
-          <p:cNvSpPr/>
-          <p:nvPr/>
-        </p:nvSpPr>
-        <p:spPr>
-          <a:xfrm>
-            <a:off x="700000" y="4930000"/>
-            <a:ext cx="550000" cy="550000"/>
-          </a:xfrm>
-          <a:prstGeom prst="ellipse">
-            <a:avLst/>
-          </a:prstGeom>
-          <a:solidFill>
-            <a:srgbClr val="555555"/>
-          </a:solidFill>
-          <a:ln>
-            <a:noFill/>
-          </a:ln>
-        </p:spPr>
-        <p:style>
-          <a:lnRef idx="1">
-            <a:schemeClr val="accent1"/>
-          </a:lnRef>
-          <a:fillRef idx="3">
-            <a:schemeClr val="accent1"/>
-          </a:fillRef>
-          <a:effectRef idx="2">
-            <a:schemeClr val="accent1"/>
-          </a:effectRef>
-          <a:fontRef idx="minor">
-            <a:schemeClr val="lt1"/>
-          </a:fontRef>
-        </p:style>
-        <p:txBody>
-          <a:bodyPr rtlCol="0" anchor="ctr"/>
-          <a:lstStyle/>
-          <a:p>
-            <a:pPr algn="ctr"/>
-          </a:p>
-        </p:txBody>
-      </p:sp>
-      <p:sp>
-        <p:nvSpPr>
-          <p:cNvPr id="25" name="TextBox 24"/>
-          <p:cNvSpPr txBox="1"/>
-          <p:nvPr/>
-        </p:nvSpPr>
-        <p:spPr>
-          <a:xfrm>
-            <a:off x="700000" y="4930000"/>
-            <a:ext cx="550000" cy="550000"/>
-          </a:xfrm>
-          <a:prstGeom prst="rect">
-            <a:avLst/>
-          </a:prstGeom>
-          <a:noFill/>
-        </p:spPr>
-        <p:txBody>
-          <a:bodyPr wrap="square" anchor="ctr">
-            <a:spAutoFit/>
-          </a:bodyPr>
-          <a:lstStyle/>
-          <a:p>
-            <a:pPr algn="ctr"/>
-            <a:r>
-              <a:rPr sz="1400" b="1">
-                <a:solidFill>
-                  <a:srgbClr val="FFFFFF"/>
-                </a:solidFill>
-                <a:latin typeface="Open Sans"/>
-                <a:ea typeface="Open Sans"/>
-                <a:cs typeface="Open Sans"/>
-              </a:rPr>
-              <a:t>5</a:t>
-            </a:r>
-          </a:p>
-        </p:txBody>
-      </p:sp>
-      <p:sp>
-        <p:nvSpPr>
-          <p:cNvPr id="26" name="Rectangle 25"/>
-          <p:cNvSpPr/>
-          <p:nvPr/>
-        </p:nvSpPr>
-        <p:spPr>
-          <a:xfrm>
-            <a:off x="1450000" y="4930000"/>
-            <a:ext cx="10500000" cy="550000"/>
-          </a:xfrm>
-          <a:prstGeom prst="rect">
-            <a:avLst/>
-          </a:prstGeom>
-          <a:solidFill>
-            <a:srgbClr val="FFFFFF"/>
-          </a:solidFill>
-          <a:ln w="12700">
-            <a:solidFill>
-              <a:srgbClr val="999999"/>
-            </a:solidFill>
-          </a:ln>
-        </p:spPr>
-        <p:style>
-          <a:lnRef idx="1">
-            <a:schemeClr val="accent1"/>
-          </a:lnRef>
-          <a:fillRef idx="3">
-            <a:schemeClr val="accent1"/>
-          </a:fillRef>
-          <a:effectRef idx="2">
-            <a:schemeClr val="accent1"/>
-          </a:effectRef>
-          <a:fontRef idx="minor">
-            <a:schemeClr val="lt1"/>
-          </a:fontRef>
-        </p:style>
-        <p:txBody>
-          <a:bodyPr rtlCol="0" anchor="ctr"/>
-          <a:lstStyle/>
-          <a:p>
-            <a:pPr algn="ctr"/>
-          </a:p>
-        </p:txBody>
-      </p:sp>
-      <p:sp>
-        <p:nvSpPr>
-          <p:cNvPr id="27" name="TextBox 26"/>
-          <p:cNvSpPr txBox="1"/>
-          <p:nvPr/>
-        </p:nvSpPr>
-        <p:spPr>
-          <a:xfrm>
-            <a:off x="1650000" y="4930000"/>
-            <a:ext cx="10100000" cy="550000"/>
-          </a:xfrm>
-          <a:prstGeom prst="rect">
-            <a:avLst/>
-          </a:prstGeom>
-          <a:noFill/>
-        </p:spPr>
-        <p:txBody>
-          <a:bodyPr wrap="square" anchor="ctr">
-            <a:spAutoFit/>
-          </a:bodyPr>
-          <a:lstStyle/>
-          <a:p>
-            <a:pPr algn="l"/>
-            <a:r>
-              <a:rPr sz="1300" b="0">
-                <a:solidFill>
-                  <a:srgbClr val="333333"/>
-                </a:solidFill>
-                <a:latin typeface="Open Sans"/>
-                <a:ea typeface="Open Sans"/>
-                <a:cs typeface="Open Sans"/>
-              </a:rPr>
-              <a:t>При ясном сознании предложите теплое питье.</a:t>
-            </a:r>
-          </a:p>
-        </p:txBody>
-      </p:sp>
-      <p:sp>
-        <p:nvSpPr>
-          <p:cNvPr id="28" name="Oval 27"/>
-          <p:cNvSpPr/>
-          <p:nvPr/>
-        </p:nvSpPr>
-        <p:spPr>
-          <a:xfrm>
-            <a:off x="700000" y="5800000"/>
-            <a:ext cx="550000" cy="550000"/>
-          </a:xfrm>
-          <a:prstGeom prst="ellipse">
-            <a:avLst/>
-          </a:prstGeom>
-          <a:solidFill>
-            <a:srgbClr val="555555"/>
-          </a:solidFill>
-          <a:ln>
-            <a:noFill/>
-          </a:ln>
-        </p:spPr>
-        <p:style>
-          <a:lnRef idx="1">
-            <a:schemeClr val="accent1"/>
-          </a:lnRef>
-          <a:fillRef idx="3">
-            <a:schemeClr val="accent1"/>
-          </a:fillRef>
-          <a:effectRef idx="2">
-            <a:schemeClr val="accent1"/>
-          </a:effectRef>
-          <a:fontRef idx="minor">
-            <a:schemeClr val="lt1"/>
-          </a:fontRef>
-        </p:style>
-        <p:txBody>
-          <a:bodyPr rtlCol="0" anchor="ctr"/>
-          <a:lstStyle/>
-          <a:p>
-            <a:pPr algn="ctr"/>
-          </a:p>
-        </p:txBody>
-      </p:sp>
-      <p:sp>
-        <p:nvSpPr>
-          <p:cNvPr id="29" name="TextBox 28"/>
-          <p:cNvSpPr txBox="1"/>
-          <p:nvPr/>
-        </p:nvSpPr>
-        <p:spPr>
-          <a:xfrm>
-            <a:off x="700000" y="5800000"/>
-            <a:ext cx="550000" cy="550000"/>
-          </a:xfrm>
-          <a:prstGeom prst="rect">
-            <a:avLst/>
-          </a:prstGeom>
-          <a:noFill/>
-        </p:spPr>
-        <p:txBody>
-          <a:bodyPr wrap="square" anchor="ctr">
-            <a:spAutoFit/>
-          </a:bodyPr>
-          <a:lstStyle/>
-          <a:p>
-            <a:pPr algn="ctr"/>
-            <a:r>
-              <a:rPr sz="1400" b="1">
-                <a:solidFill>
-                  <a:srgbClr val="FFFFFF"/>
-                </a:solidFill>
-                <a:latin typeface="Open Sans"/>
-                <a:ea typeface="Open Sans"/>
-                <a:cs typeface="Open Sans"/>
-              </a:rPr>
-              <a:t>6</a:t>
-            </a:r>
-          </a:p>
-        </p:txBody>
-      </p:sp>
-      <p:sp>
-        <p:nvSpPr>
-          <p:cNvPr id="30" name="Rectangle 29"/>
-          <p:cNvSpPr/>
-          <p:nvPr/>
-        </p:nvSpPr>
-        <p:spPr>
-          <a:xfrm>
-            <a:off x="1450000" y="5800000"/>
-            <a:ext cx="10500000" cy="550000"/>
-          </a:xfrm>
-          <a:prstGeom prst="rect">
-            <a:avLst/>
-          </a:prstGeom>
-          <a:solidFill>
-            <a:srgbClr val="FFFFFF"/>
-          </a:solidFill>
-          <a:ln w="12700">
-            <a:solidFill>
-              <a:srgbClr val="999999"/>
-            </a:solidFill>
-          </a:ln>
-        </p:spPr>
-        <p:style>
-          <a:lnRef idx="1">
-            <a:schemeClr val="accent1"/>
-          </a:lnRef>
-          <a:fillRef idx="3">
-            <a:schemeClr val="accent1"/>
-          </a:fillRef>
-          <a:effectRef idx="2">
-            <a:schemeClr val="accent1"/>
-          </a:effectRef>
-          <a:fontRef idx="minor">
-            <a:schemeClr val="lt1"/>
-          </a:fontRef>
-        </p:style>
-        <p:txBody>
-          <a:bodyPr rtlCol="0" anchor="ctr"/>
-          <a:lstStyle/>
-          <a:p>
-            <a:pPr algn="ctr"/>
-          </a:p>
-        </p:txBody>
-      </p:sp>
-      <p:sp>
-        <p:nvSpPr>
-          <p:cNvPr id="31" name="TextBox 30"/>
-          <p:cNvSpPr txBox="1"/>
-          <p:nvPr/>
-        </p:nvSpPr>
-        <p:spPr>
-          <a:xfrm>
-            <a:off x="1650000" y="5800000"/>
-            <a:ext cx="10100000" cy="550000"/>
-          </a:xfrm>
-          <a:prstGeom prst="rect">
-            <a:avLst/>
-          </a:prstGeom>
-          <a:noFill/>
-        </p:spPr>
-        <p:txBody>
-          <a:bodyPr wrap="square" anchor="ctr">
-            <a:spAutoFit/>
-          </a:bodyPr>
-          <a:lstStyle/>
-          <a:p>
-            <a:pPr algn="l"/>
-            <a:r>
-              <a:rPr sz="1300" b="0">
-                <a:solidFill>
-                  <a:srgbClr val="333333"/>
-                </a:solidFill>
-                <a:latin typeface="Open Sans"/>
-                <a:ea typeface="Open Sans"/>
-                <a:cs typeface="Open Sans"/>
-              </a:rPr>
-              <a:t>Вызовите скорую медицинскую помощь.</a:t>
+              <a:t>Химическое вещество, электрический ток и солнечное излучение продолжают причинять вред, пока действует источник. Сначала обеспечивают безопасность и прекращают воздействие, затем оценивают сознание и дыхание, вызывают скорую помощь и оказывают помощь по характеру поражения.</a:t>
             </a:r>
           </a:p>
         </p:txBody>
@@ -5919,7 +7198,7 @@
                 <a:ea typeface="Open Sans"/>
                 <a:cs typeface="Open Sans"/>
               </a:rPr>
-              <a:t>ХИМИЧЕСКИЙ ОЖОГ ПИЩЕВОДА</a:t>
+              <a:t>ХИМИЧЕСКИЙ ОЖОГ КОЖИ</a:t>
             </a:r>
           </a:p>
         </p:txBody>
@@ -6086,14 +7365,57 @@
       </p:sp>
       <p:sp>
         <p:nvSpPr>
-          <p:cNvPr id="8" name="TextBox 7"/>
+          <p:cNvPr id="8" name="Oval 7"/>
+          <p:cNvSpPr/>
+          <p:nvPr/>
+        </p:nvSpPr>
+        <p:spPr>
+          <a:xfrm>
+            <a:off x="700000" y="1400000"/>
+            <a:ext cx="500000" cy="500000"/>
+          </a:xfrm>
+          <a:prstGeom prst="ellipse">
+            <a:avLst/>
+          </a:prstGeom>
+          <a:solidFill>
+            <a:srgbClr val="CC0000"/>
+          </a:solidFill>
+          <a:ln>
+            <a:noFill/>
+          </a:ln>
+        </p:spPr>
+        <p:style>
+          <a:lnRef idx="1">
+            <a:schemeClr val="accent1"/>
+          </a:lnRef>
+          <a:fillRef idx="3">
+            <a:schemeClr val="accent1"/>
+          </a:fillRef>
+          <a:effectRef idx="2">
+            <a:schemeClr val="accent1"/>
+          </a:effectRef>
+          <a:fontRef idx="minor">
+            <a:schemeClr val="lt1"/>
+          </a:fontRef>
+        </p:style>
+        <p:txBody>
+          <a:bodyPr rtlCol="0" anchor="ctr"/>
+          <a:lstStyle/>
+          <a:p>
+            <a:pPr algn="ctr"/>
+          </a:p>
+        </p:txBody>
+      </p:sp>
+      <p:sp>
+        <p:nvSpPr>
+          <p:cNvPr id="9" name="TextBox 8"/>
           <p:cNvSpPr txBox="1"/>
           <p:nvPr/>
         </p:nvSpPr>
         <p:spPr>
           <a:xfrm>
-            <a:off x="700000" y="1500000"/>
-            <a:ext cx="11000000" cy="4200000"/>
+            <a:off x="700000" y="1400000"/>
+            <a:ext cx="500000" cy="500000"/>
           </a:xfrm>
           <a:prstGeom prst="rect">
             <a:avLst/>
@@ -6101,18 +7423,96 @@
           <a:noFill/>
         </p:spPr>
         <p:txBody>
-          <a:bodyPr wrap="square">
+          <a:bodyPr wrap="square" anchor="ctr">
             <a:spAutoFit/>
           </a:bodyPr>
           <a:lstStyle/>
           <a:p>
-            <a:pPr algn="l">
-              <a:spcAft>
-                <a:spcPts val="800"/>
-              </a:spcAft>
-            </a:pPr>
-            <a:r>
-              <a:rPr sz="1400" b="0">
+            <a:pPr algn="ctr"/>
+            <a:r>
+              <a:rPr sz="1300" b="1">
+                <a:solidFill>
+                  <a:srgbClr val="FFFFFF"/>
+                </a:solidFill>
+                <a:latin typeface="Open Sans"/>
+                <a:ea typeface="Open Sans"/>
+                <a:cs typeface="Open Sans"/>
+              </a:rPr>
+              <a:t>1</a:t>
+            </a:r>
+          </a:p>
+        </p:txBody>
+      </p:sp>
+      <p:sp>
+        <p:nvSpPr>
+          <p:cNvPr id="10" name="Rectangle 9"/>
+          <p:cNvSpPr/>
+          <p:nvPr/>
+        </p:nvSpPr>
+        <p:spPr>
+          <a:xfrm>
+            <a:off x="1400000" y="1400000"/>
+            <a:ext cx="10550000" cy="620000"/>
+          </a:xfrm>
+          <a:prstGeom prst="rect">
+            <a:avLst/>
+          </a:prstGeom>
+          <a:solidFill>
+            <a:srgbClr val="FFFFFF"/>
+          </a:solidFill>
+          <a:ln w="12700">
+            <a:solidFill>
+              <a:srgbClr val="999999"/>
+            </a:solidFill>
+          </a:ln>
+        </p:spPr>
+        <p:style>
+          <a:lnRef idx="1">
+            <a:schemeClr val="accent1"/>
+          </a:lnRef>
+          <a:fillRef idx="3">
+            <a:schemeClr val="accent1"/>
+          </a:fillRef>
+          <a:effectRef idx="2">
+            <a:schemeClr val="accent1"/>
+          </a:effectRef>
+          <a:fontRef idx="minor">
+            <a:schemeClr val="lt1"/>
+          </a:fontRef>
+        </p:style>
+        <p:txBody>
+          <a:bodyPr rtlCol="0" anchor="ctr"/>
+          <a:lstStyle/>
+          <a:p>
+            <a:pPr algn="ctr"/>
+          </a:p>
+        </p:txBody>
+      </p:sp>
+      <p:sp>
+        <p:nvSpPr>
+          <p:cNvPr id="11" name="TextBox 10"/>
+          <p:cNvSpPr txBox="1"/>
+          <p:nvPr/>
+        </p:nvSpPr>
+        <p:spPr>
+          <a:xfrm>
+            <a:off x="1600000" y="1400000"/>
+            <a:ext cx="10150000" cy="620000"/>
+          </a:xfrm>
+          <a:prstGeom prst="rect">
+            <a:avLst/>
+          </a:prstGeom>
+          <a:noFill/>
+        </p:spPr>
+        <p:txBody>
+          <a:bodyPr wrap="square" anchor="ctr">
+            <a:spAutoFit/>
+          </a:bodyPr>
+          <a:lstStyle/>
+          <a:p>
+            <a:pPr algn="l"/>
+            <a:r>
+              <a:rPr sz="1300" b="0">
                 <a:solidFill>
                   <a:srgbClr val="333333"/>
                 </a:solidFill>
@@ -6120,17 +7520,161 @@
                 <a:ea typeface="Open Sans"/>
                 <a:cs typeface="Open Sans"/>
               </a:rPr>
-              <a:t>•  Боль и жжение во рту, за грудиной или в животе</a:t>
-            </a:r>
-          </a:p>
-          <a:p>
-            <a:pPr algn="l">
-              <a:spcAft>
-                <a:spcPts val="800"/>
-              </a:spcAft>
-            </a:pPr>
-            <a:r>
-              <a:rPr sz="1400" b="0">
+              <a:t>Определите возможное вещество и защитите руки, глаза и одежду.</a:t>
+            </a:r>
+          </a:p>
+        </p:txBody>
+      </p:sp>
+      <p:sp>
+        <p:nvSpPr>
+          <p:cNvPr id="12" name="Oval 11"/>
+          <p:cNvSpPr/>
+          <p:nvPr/>
+        </p:nvSpPr>
+        <p:spPr>
+          <a:xfrm>
+            <a:off x="700000" y="2100000"/>
+            <a:ext cx="500000" cy="500000"/>
+          </a:xfrm>
+          <a:prstGeom prst="ellipse">
+            <a:avLst/>
+          </a:prstGeom>
+          <a:solidFill>
+            <a:srgbClr val="555555"/>
+          </a:solidFill>
+          <a:ln>
+            <a:noFill/>
+          </a:ln>
+        </p:spPr>
+        <p:style>
+          <a:lnRef idx="1">
+            <a:schemeClr val="accent1"/>
+          </a:lnRef>
+          <a:fillRef idx="3">
+            <a:schemeClr val="accent1"/>
+          </a:fillRef>
+          <a:effectRef idx="2">
+            <a:schemeClr val="accent1"/>
+          </a:effectRef>
+          <a:fontRef idx="minor">
+            <a:schemeClr val="lt1"/>
+          </a:fontRef>
+        </p:style>
+        <p:txBody>
+          <a:bodyPr rtlCol="0" anchor="ctr"/>
+          <a:lstStyle/>
+          <a:p>
+            <a:pPr algn="ctr"/>
+          </a:p>
+        </p:txBody>
+      </p:sp>
+      <p:sp>
+        <p:nvSpPr>
+          <p:cNvPr id="13" name="TextBox 12"/>
+          <p:cNvSpPr txBox="1"/>
+          <p:nvPr/>
+        </p:nvSpPr>
+        <p:spPr>
+          <a:xfrm>
+            <a:off x="700000" y="2100000"/>
+            <a:ext cx="500000" cy="500000"/>
+          </a:xfrm>
+          <a:prstGeom prst="rect">
+            <a:avLst/>
+          </a:prstGeom>
+          <a:noFill/>
+        </p:spPr>
+        <p:txBody>
+          <a:bodyPr wrap="square" anchor="ctr">
+            <a:spAutoFit/>
+          </a:bodyPr>
+          <a:lstStyle/>
+          <a:p>
+            <a:pPr algn="ctr"/>
+            <a:r>
+              <a:rPr sz="1300" b="1">
+                <a:solidFill>
+                  <a:srgbClr val="FFFFFF"/>
+                </a:solidFill>
+                <a:latin typeface="Open Sans"/>
+                <a:ea typeface="Open Sans"/>
+                <a:cs typeface="Open Sans"/>
+              </a:rPr>
+              <a:t>2</a:t>
+            </a:r>
+          </a:p>
+        </p:txBody>
+      </p:sp>
+      <p:sp>
+        <p:nvSpPr>
+          <p:cNvPr id="14" name="Rectangle 13"/>
+          <p:cNvSpPr/>
+          <p:nvPr/>
+        </p:nvSpPr>
+        <p:spPr>
+          <a:xfrm>
+            <a:off x="1400000" y="2100000"/>
+            <a:ext cx="10550000" cy="620000"/>
+          </a:xfrm>
+          <a:prstGeom prst="rect">
+            <a:avLst/>
+          </a:prstGeom>
+          <a:solidFill>
+            <a:srgbClr val="FFFFFF"/>
+          </a:solidFill>
+          <a:ln w="12700">
+            <a:solidFill>
+              <a:srgbClr val="999999"/>
+            </a:solidFill>
+          </a:ln>
+        </p:spPr>
+        <p:style>
+          <a:lnRef idx="1">
+            <a:schemeClr val="accent1"/>
+          </a:lnRef>
+          <a:fillRef idx="3">
+            <a:schemeClr val="accent1"/>
+          </a:fillRef>
+          <a:effectRef idx="2">
+            <a:schemeClr val="accent1"/>
+          </a:effectRef>
+          <a:fontRef idx="minor">
+            <a:schemeClr val="lt1"/>
+          </a:fontRef>
+        </p:style>
+        <p:txBody>
+          <a:bodyPr rtlCol="0" anchor="ctr"/>
+          <a:lstStyle/>
+          <a:p>
+            <a:pPr algn="ctr"/>
+          </a:p>
+        </p:txBody>
+      </p:sp>
+      <p:sp>
+        <p:nvSpPr>
+          <p:cNvPr id="15" name="TextBox 14"/>
+          <p:cNvSpPr txBox="1"/>
+          <p:nvPr/>
+        </p:nvSpPr>
+        <p:spPr>
+          <a:xfrm>
+            <a:off x="1600000" y="2100000"/>
+            <a:ext cx="10150000" cy="620000"/>
+          </a:xfrm>
+          <a:prstGeom prst="rect">
+            <a:avLst/>
+          </a:prstGeom>
+          <a:noFill/>
+        </p:spPr>
+        <p:txBody>
+          <a:bodyPr wrap="square" anchor="ctr">
+            <a:spAutoFit/>
+          </a:bodyPr>
+          <a:lstStyle/>
+          <a:p>
+            <a:pPr algn="l"/>
+            <a:r>
+              <a:rPr sz="1300" b="0">
                 <a:solidFill>
                   <a:srgbClr val="333333"/>
                 </a:solidFill>
@@ -6138,17 +7682,161 @@
                 <a:ea typeface="Open Sans"/>
                 <a:cs typeface="Open Sans"/>
               </a:rPr>
-              <a:t>•  Следы ожога на губах и слизистой</a:t>
-            </a:r>
-          </a:p>
-          <a:p>
-            <a:pPr algn="l">
-              <a:spcAft>
-                <a:spcPts val="800"/>
-              </a:spcAft>
-            </a:pPr>
-            <a:r>
-              <a:rPr sz="1400" b="0">
+              <a:t>Удалите пострадавшего от источника, избегая контакта с загрязнением.</a:t>
+            </a:r>
+          </a:p>
+        </p:txBody>
+      </p:sp>
+      <p:sp>
+        <p:nvSpPr>
+          <p:cNvPr id="16" name="Oval 15"/>
+          <p:cNvSpPr/>
+          <p:nvPr/>
+        </p:nvSpPr>
+        <p:spPr>
+          <a:xfrm>
+            <a:off x="700000" y="2800000"/>
+            <a:ext cx="500000" cy="500000"/>
+          </a:xfrm>
+          <a:prstGeom prst="ellipse">
+            <a:avLst/>
+          </a:prstGeom>
+          <a:solidFill>
+            <a:srgbClr val="555555"/>
+          </a:solidFill>
+          <a:ln>
+            <a:noFill/>
+          </a:ln>
+        </p:spPr>
+        <p:style>
+          <a:lnRef idx="1">
+            <a:schemeClr val="accent1"/>
+          </a:lnRef>
+          <a:fillRef idx="3">
+            <a:schemeClr val="accent1"/>
+          </a:fillRef>
+          <a:effectRef idx="2">
+            <a:schemeClr val="accent1"/>
+          </a:effectRef>
+          <a:fontRef idx="minor">
+            <a:schemeClr val="lt1"/>
+          </a:fontRef>
+        </p:style>
+        <p:txBody>
+          <a:bodyPr rtlCol="0" anchor="ctr"/>
+          <a:lstStyle/>
+          <a:p>
+            <a:pPr algn="ctr"/>
+          </a:p>
+        </p:txBody>
+      </p:sp>
+      <p:sp>
+        <p:nvSpPr>
+          <p:cNvPr id="17" name="TextBox 16"/>
+          <p:cNvSpPr txBox="1"/>
+          <p:nvPr/>
+        </p:nvSpPr>
+        <p:spPr>
+          <a:xfrm>
+            <a:off x="700000" y="2800000"/>
+            <a:ext cx="500000" cy="500000"/>
+          </a:xfrm>
+          <a:prstGeom prst="rect">
+            <a:avLst/>
+          </a:prstGeom>
+          <a:noFill/>
+        </p:spPr>
+        <p:txBody>
+          <a:bodyPr wrap="square" anchor="ctr">
+            <a:spAutoFit/>
+          </a:bodyPr>
+          <a:lstStyle/>
+          <a:p>
+            <a:pPr algn="ctr"/>
+            <a:r>
+              <a:rPr sz="1300" b="1">
+                <a:solidFill>
+                  <a:srgbClr val="FFFFFF"/>
+                </a:solidFill>
+                <a:latin typeface="Open Sans"/>
+                <a:ea typeface="Open Sans"/>
+                <a:cs typeface="Open Sans"/>
+              </a:rPr>
+              <a:t>3</a:t>
+            </a:r>
+          </a:p>
+        </p:txBody>
+      </p:sp>
+      <p:sp>
+        <p:nvSpPr>
+          <p:cNvPr id="18" name="Rectangle 17"/>
+          <p:cNvSpPr/>
+          <p:nvPr/>
+        </p:nvSpPr>
+        <p:spPr>
+          <a:xfrm>
+            <a:off x="1400000" y="2800000"/>
+            <a:ext cx="10550000" cy="620000"/>
+          </a:xfrm>
+          <a:prstGeom prst="rect">
+            <a:avLst/>
+          </a:prstGeom>
+          <a:solidFill>
+            <a:srgbClr val="FFFFFF"/>
+          </a:solidFill>
+          <a:ln w="12700">
+            <a:solidFill>
+              <a:srgbClr val="999999"/>
+            </a:solidFill>
+          </a:ln>
+        </p:spPr>
+        <p:style>
+          <a:lnRef idx="1">
+            <a:schemeClr val="accent1"/>
+          </a:lnRef>
+          <a:fillRef idx="3">
+            <a:schemeClr val="accent1"/>
+          </a:fillRef>
+          <a:effectRef idx="2">
+            <a:schemeClr val="accent1"/>
+          </a:effectRef>
+          <a:fontRef idx="minor">
+            <a:schemeClr val="lt1"/>
+          </a:fontRef>
+        </p:style>
+        <p:txBody>
+          <a:bodyPr rtlCol="0" anchor="ctr"/>
+          <a:lstStyle/>
+          <a:p>
+            <a:pPr algn="ctr"/>
+          </a:p>
+        </p:txBody>
+      </p:sp>
+      <p:sp>
+        <p:nvSpPr>
+          <p:cNvPr id="19" name="TextBox 18"/>
+          <p:cNvSpPr txBox="1"/>
+          <p:nvPr/>
+        </p:nvSpPr>
+        <p:spPr>
+          <a:xfrm>
+            <a:off x="1600000" y="2800000"/>
+            <a:ext cx="10150000" cy="620000"/>
+          </a:xfrm>
+          <a:prstGeom prst="rect">
+            <a:avLst/>
+          </a:prstGeom>
+          <a:noFill/>
+        </p:spPr>
+        <p:txBody>
+          <a:bodyPr wrap="square" anchor="ctr">
+            <a:spAutoFit/>
+          </a:bodyPr>
+          <a:lstStyle/>
+          <a:p>
+            <a:pPr algn="l"/>
+            <a:r>
+              <a:rPr sz="1300" b="0">
                 <a:solidFill>
                   <a:srgbClr val="333333"/>
                 </a:solidFill>
@@ -6156,43 +7844,573 @@
                 <a:ea typeface="Open Sans"/>
                 <a:cs typeface="Open Sans"/>
               </a:rPr>
-              <a:t>•  Затрудненное глотание, слюнотечение, рвота</a:t>
-            </a:r>
-          </a:p>
-          <a:p>
-            <a:pPr algn="l">
-              <a:spcAft>
-                <a:spcPts val="800"/>
-              </a:spcAft>
-            </a:pPr>
-            <a:r>
-              <a:rPr sz="1400" b="1">
-                <a:solidFill>
-                  <a:srgbClr val="CC0000"/>
-                </a:solidFill>
-                <a:latin typeface="Open Sans"/>
-                <a:ea typeface="Open Sans"/>
-                <a:cs typeface="Open Sans"/>
-              </a:rPr>
-              <a:t>•  Не вызывайте рвоту</a:t>
-            </a:r>
-          </a:p>
-          <a:p>
-            <a:pPr algn="l">
-              <a:spcAft>
-                <a:spcPts val="800"/>
-              </a:spcAft>
-            </a:pPr>
-            <a:r>
-              <a:rPr sz="1400" b="1">
-                <a:solidFill>
-                  <a:srgbClr val="CC0000"/>
-                </a:solidFill>
-                <a:latin typeface="Open Sans"/>
-                <a:ea typeface="Open Sans"/>
-                <a:cs typeface="Open Sans"/>
-              </a:rPr>
-              <a:t>•  Срочно вызовите скорую медицинскую помощь</a:t>
+              <a:t>Осторожно снимите загрязненную одежду, обувь и украшения.</a:t>
+            </a:r>
+          </a:p>
+        </p:txBody>
+      </p:sp>
+      <p:sp>
+        <p:nvSpPr>
+          <p:cNvPr id="20" name="Oval 19"/>
+          <p:cNvSpPr/>
+          <p:nvPr/>
+        </p:nvSpPr>
+        <p:spPr>
+          <a:xfrm>
+            <a:off x="700000" y="3500000"/>
+            <a:ext cx="500000" cy="500000"/>
+          </a:xfrm>
+          <a:prstGeom prst="ellipse">
+            <a:avLst/>
+          </a:prstGeom>
+          <a:solidFill>
+            <a:srgbClr val="555555"/>
+          </a:solidFill>
+          <a:ln>
+            <a:noFill/>
+          </a:ln>
+        </p:spPr>
+        <p:style>
+          <a:lnRef idx="1">
+            <a:schemeClr val="accent1"/>
+          </a:lnRef>
+          <a:fillRef idx="3">
+            <a:schemeClr val="accent1"/>
+          </a:fillRef>
+          <a:effectRef idx="2">
+            <a:schemeClr val="accent1"/>
+          </a:effectRef>
+          <a:fontRef idx="minor">
+            <a:schemeClr val="lt1"/>
+          </a:fontRef>
+        </p:style>
+        <p:txBody>
+          <a:bodyPr rtlCol="0" anchor="ctr"/>
+          <a:lstStyle/>
+          <a:p>
+            <a:pPr algn="ctr"/>
+          </a:p>
+        </p:txBody>
+      </p:sp>
+      <p:sp>
+        <p:nvSpPr>
+          <p:cNvPr id="21" name="TextBox 20"/>
+          <p:cNvSpPr txBox="1"/>
+          <p:nvPr/>
+        </p:nvSpPr>
+        <p:spPr>
+          <a:xfrm>
+            <a:off x="700000" y="3500000"/>
+            <a:ext cx="500000" cy="500000"/>
+          </a:xfrm>
+          <a:prstGeom prst="rect">
+            <a:avLst/>
+          </a:prstGeom>
+          <a:noFill/>
+        </p:spPr>
+        <p:txBody>
+          <a:bodyPr wrap="square" anchor="ctr">
+            <a:spAutoFit/>
+          </a:bodyPr>
+          <a:lstStyle/>
+          <a:p>
+            <a:pPr algn="ctr"/>
+            <a:r>
+              <a:rPr sz="1300" b="1">
+                <a:solidFill>
+                  <a:srgbClr val="FFFFFF"/>
+                </a:solidFill>
+                <a:latin typeface="Open Sans"/>
+                <a:ea typeface="Open Sans"/>
+                <a:cs typeface="Open Sans"/>
+              </a:rPr>
+              <a:t>4</a:t>
+            </a:r>
+          </a:p>
+        </p:txBody>
+      </p:sp>
+      <p:sp>
+        <p:nvSpPr>
+          <p:cNvPr id="22" name="Rectangle 21"/>
+          <p:cNvSpPr/>
+          <p:nvPr/>
+        </p:nvSpPr>
+        <p:spPr>
+          <a:xfrm>
+            <a:off x="1400000" y="3500000"/>
+            <a:ext cx="10550000" cy="620000"/>
+          </a:xfrm>
+          <a:prstGeom prst="rect">
+            <a:avLst/>
+          </a:prstGeom>
+          <a:solidFill>
+            <a:srgbClr val="FFFFFF"/>
+          </a:solidFill>
+          <a:ln w="12700">
+            <a:solidFill>
+              <a:srgbClr val="999999"/>
+            </a:solidFill>
+          </a:ln>
+        </p:spPr>
+        <p:style>
+          <a:lnRef idx="1">
+            <a:schemeClr val="accent1"/>
+          </a:lnRef>
+          <a:fillRef idx="3">
+            <a:schemeClr val="accent1"/>
+          </a:fillRef>
+          <a:effectRef idx="2">
+            <a:schemeClr val="accent1"/>
+          </a:effectRef>
+          <a:fontRef idx="minor">
+            <a:schemeClr val="lt1"/>
+          </a:fontRef>
+        </p:style>
+        <p:txBody>
+          <a:bodyPr rtlCol="0" anchor="ctr"/>
+          <a:lstStyle/>
+          <a:p>
+            <a:pPr algn="ctr"/>
+          </a:p>
+        </p:txBody>
+      </p:sp>
+      <p:sp>
+        <p:nvSpPr>
+          <p:cNvPr id="23" name="TextBox 22"/>
+          <p:cNvSpPr txBox="1"/>
+          <p:nvPr/>
+        </p:nvSpPr>
+        <p:spPr>
+          <a:xfrm>
+            <a:off x="1600000" y="3500000"/>
+            <a:ext cx="10150000" cy="620000"/>
+          </a:xfrm>
+          <a:prstGeom prst="rect">
+            <a:avLst/>
+          </a:prstGeom>
+          <a:noFill/>
+        </p:spPr>
+        <p:txBody>
+          <a:bodyPr wrap="square" anchor="ctr">
+            <a:spAutoFit/>
+          </a:bodyPr>
+          <a:lstStyle/>
+          <a:p>
+            <a:pPr algn="l"/>
+            <a:r>
+              <a:rPr sz="1300" b="0">
+                <a:solidFill>
+                  <a:srgbClr val="333333"/>
+                </a:solidFill>
+                <a:latin typeface="Open Sans"/>
+                <a:ea typeface="Open Sans"/>
+                <a:cs typeface="Open Sans"/>
+              </a:rPr>
+              <a:t>Сухое порошкообразное вещество сначала аккуратно стряхните.</a:t>
+            </a:r>
+          </a:p>
+        </p:txBody>
+      </p:sp>
+      <p:sp>
+        <p:nvSpPr>
+          <p:cNvPr id="24" name="Oval 23"/>
+          <p:cNvSpPr/>
+          <p:nvPr/>
+        </p:nvSpPr>
+        <p:spPr>
+          <a:xfrm>
+            <a:off x="700000" y="4200000"/>
+            <a:ext cx="500000" cy="500000"/>
+          </a:xfrm>
+          <a:prstGeom prst="ellipse">
+            <a:avLst/>
+          </a:prstGeom>
+          <a:solidFill>
+            <a:srgbClr val="555555"/>
+          </a:solidFill>
+          <a:ln>
+            <a:noFill/>
+          </a:ln>
+        </p:spPr>
+        <p:style>
+          <a:lnRef idx="1">
+            <a:schemeClr val="accent1"/>
+          </a:lnRef>
+          <a:fillRef idx="3">
+            <a:schemeClr val="accent1"/>
+          </a:fillRef>
+          <a:effectRef idx="2">
+            <a:schemeClr val="accent1"/>
+          </a:effectRef>
+          <a:fontRef idx="minor">
+            <a:schemeClr val="lt1"/>
+          </a:fontRef>
+        </p:style>
+        <p:txBody>
+          <a:bodyPr rtlCol="0" anchor="ctr"/>
+          <a:lstStyle/>
+          <a:p>
+            <a:pPr algn="ctr"/>
+          </a:p>
+        </p:txBody>
+      </p:sp>
+      <p:sp>
+        <p:nvSpPr>
+          <p:cNvPr id="25" name="TextBox 24"/>
+          <p:cNvSpPr txBox="1"/>
+          <p:nvPr/>
+        </p:nvSpPr>
+        <p:spPr>
+          <a:xfrm>
+            <a:off x="700000" y="4200000"/>
+            <a:ext cx="500000" cy="500000"/>
+          </a:xfrm>
+          <a:prstGeom prst="rect">
+            <a:avLst/>
+          </a:prstGeom>
+          <a:noFill/>
+        </p:spPr>
+        <p:txBody>
+          <a:bodyPr wrap="square" anchor="ctr">
+            <a:spAutoFit/>
+          </a:bodyPr>
+          <a:lstStyle/>
+          <a:p>
+            <a:pPr algn="ctr"/>
+            <a:r>
+              <a:rPr sz="1300" b="1">
+                <a:solidFill>
+                  <a:srgbClr val="FFFFFF"/>
+                </a:solidFill>
+                <a:latin typeface="Open Sans"/>
+                <a:ea typeface="Open Sans"/>
+                <a:cs typeface="Open Sans"/>
+              </a:rPr>
+              <a:t>5</a:t>
+            </a:r>
+          </a:p>
+        </p:txBody>
+      </p:sp>
+      <p:sp>
+        <p:nvSpPr>
+          <p:cNvPr id="26" name="Rectangle 25"/>
+          <p:cNvSpPr/>
+          <p:nvPr/>
+        </p:nvSpPr>
+        <p:spPr>
+          <a:xfrm>
+            <a:off x="1400000" y="4200000"/>
+            <a:ext cx="10550000" cy="620000"/>
+          </a:xfrm>
+          <a:prstGeom prst="rect">
+            <a:avLst/>
+          </a:prstGeom>
+          <a:solidFill>
+            <a:srgbClr val="FFFFFF"/>
+          </a:solidFill>
+          <a:ln w="12700">
+            <a:solidFill>
+              <a:srgbClr val="999999"/>
+            </a:solidFill>
+          </a:ln>
+        </p:spPr>
+        <p:style>
+          <a:lnRef idx="1">
+            <a:schemeClr val="accent1"/>
+          </a:lnRef>
+          <a:fillRef idx="3">
+            <a:schemeClr val="accent1"/>
+          </a:fillRef>
+          <a:effectRef idx="2">
+            <a:schemeClr val="accent1"/>
+          </a:effectRef>
+          <a:fontRef idx="minor">
+            <a:schemeClr val="lt1"/>
+          </a:fontRef>
+        </p:style>
+        <p:txBody>
+          <a:bodyPr rtlCol="0" anchor="ctr"/>
+          <a:lstStyle/>
+          <a:p>
+            <a:pPr algn="ctr"/>
+          </a:p>
+        </p:txBody>
+      </p:sp>
+      <p:sp>
+        <p:nvSpPr>
+          <p:cNvPr id="27" name="TextBox 26"/>
+          <p:cNvSpPr txBox="1"/>
+          <p:nvPr/>
+        </p:nvSpPr>
+        <p:spPr>
+          <a:xfrm>
+            <a:off x="1600000" y="4200000"/>
+            <a:ext cx="10150000" cy="620000"/>
+          </a:xfrm>
+          <a:prstGeom prst="rect">
+            <a:avLst/>
+          </a:prstGeom>
+          <a:noFill/>
+        </p:spPr>
+        <p:txBody>
+          <a:bodyPr wrap="square" anchor="ctr">
+            <a:spAutoFit/>
+          </a:bodyPr>
+          <a:lstStyle/>
+          <a:p>
+            <a:pPr algn="l"/>
+            <a:r>
+              <a:rPr sz="1300" b="0">
+                <a:solidFill>
+                  <a:srgbClr val="333333"/>
+                </a:solidFill>
+                <a:latin typeface="Open Sans"/>
+                <a:ea typeface="Open Sans"/>
+                <a:cs typeface="Open Sans"/>
+              </a:rPr>
+              <a:t>Промывайте кожу большим количеством проточной воды не менее 20 минут.</a:t>
+            </a:r>
+          </a:p>
+        </p:txBody>
+      </p:sp>
+      <p:sp>
+        <p:nvSpPr>
+          <p:cNvPr id="28" name="Oval 27"/>
+          <p:cNvSpPr/>
+          <p:nvPr/>
+        </p:nvSpPr>
+        <p:spPr>
+          <a:xfrm>
+            <a:off x="700000" y="4900000"/>
+            <a:ext cx="500000" cy="500000"/>
+          </a:xfrm>
+          <a:prstGeom prst="ellipse">
+            <a:avLst/>
+          </a:prstGeom>
+          <a:solidFill>
+            <a:srgbClr val="555555"/>
+          </a:solidFill>
+          <a:ln>
+            <a:noFill/>
+          </a:ln>
+        </p:spPr>
+        <p:style>
+          <a:lnRef idx="1">
+            <a:schemeClr val="accent1"/>
+          </a:lnRef>
+          <a:fillRef idx="3">
+            <a:schemeClr val="accent1"/>
+          </a:fillRef>
+          <a:effectRef idx="2">
+            <a:schemeClr val="accent1"/>
+          </a:effectRef>
+          <a:fontRef idx="minor">
+            <a:schemeClr val="lt1"/>
+          </a:fontRef>
+        </p:style>
+        <p:txBody>
+          <a:bodyPr rtlCol="0" anchor="ctr"/>
+          <a:lstStyle/>
+          <a:p>
+            <a:pPr algn="ctr"/>
+          </a:p>
+        </p:txBody>
+      </p:sp>
+      <p:sp>
+        <p:nvSpPr>
+          <p:cNvPr id="29" name="TextBox 28"/>
+          <p:cNvSpPr txBox="1"/>
+          <p:nvPr/>
+        </p:nvSpPr>
+        <p:spPr>
+          <a:xfrm>
+            <a:off x="700000" y="4900000"/>
+            <a:ext cx="500000" cy="500000"/>
+          </a:xfrm>
+          <a:prstGeom prst="rect">
+            <a:avLst/>
+          </a:prstGeom>
+          <a:noFill/>
+        </p:spPr>
+        <p:txBody>
+          <a:bodyPr wrap="square" anchor="ctr">
+            <a:spAutoFit/>
+          </a:bodyPr>
+          <a:lstStyle/>
+          <a:p>
+            <a:pPr algn="ctr"/>
+            <a:r>
+              <a:rPr sz="1300" b="1">
+                <a:solidFill>
+                  <a:srgbClr val="FFFFFF"/>
+                </a:solidFill>
+                <a:latin typeface="Open Sans"/>
+                <a:ea typeface="Open Sans"/>
+                <a:cs typeface="Open Sans"/>
+              </a:rPr>
+              <a:t>6</a:t>
+            </a:r>
+          </a:p>
+        </p:txBody>
+      </p:sp>
+      <p:sp>
+        <p:nvSpPr>
+          <p:cNvPr id="30" name="Rectangle 29"/>
+          <p:cNvSpPr/>
+          <p:nvPr/>
+        </p:nvSpPr>
+        <p:spPr>
+          <a:xfrm>
+            <a:off x="1400000" y="4900000"/>
+            <a:ext cx="10550000" cy="620000"/>
+          </a:xfrm>
+          <a:prstGeom prst="rect">
+            <a:avLst/>
+          </a:prstGeom>
+          <a:solidFill>
+            <a:srgbClr val="FFFFFF"/>
+          </a:solidFill>
+          <a:ln w="12700">
+            <a:solidFill>
+              <a:srgbClr val="999999"/>
+            </a:solidFill>
+          </a:ln>
+        </p:spPr>
+        <p:style>
+          <a:lnRef idx="1">
+            <a:schemeClr val="accent1"/>
+          </a:lnRef>
+          <a:fillRef idx="3">
+            <a:schemeClr val="accent1"/>
+          </a:fillRef>
+          <a:effectRef idx="2">
+            <a:schemeClr val="accent1"/>
+          </a:effectRef>
+          <a:fontRef idx="minor">
+            <a:schemeClr val="lt1"/>
+          </a:fontRef>
+        </p:style>
+        <p:txBody>
+          <a:bodyPr rtlCol="0" anchor="ctr"/>
+          <a:lstStyle/>
+          <a:p>
+            <a:pPr algn="ctr"/>
+          </a:p>
+        </p:txBody>
+      </p:sp>
+      <p:sp>
+        <p:nvSpPr>
+          <p:cNvPr id="31" name="TextBox 30"/>
+          <p:cNvSpPr txBox="1"/>
+          <p:nvPr/>
+        </p:nvSpPr>
+        <p:spPr>
+          <a:xfrm>
+            <a:off x="1600000" y="4900000"/>
+            <a:ext cx="10150000" cy="620000"/>
+          </a:xfrm>
+          <a:prstGeom prst="rect">
+            <a:avLst/>
+          </a:prstGeom>
+          <a:noFill/>
+        </p:spPr>
+        <p:txBody>
+          <a:bodyPr wrap="square" anchor="ctr">
+            <a:spAutoFit/>
+          </a:bodyPr>
+          <a:lstStyle/>
+          <a:p>
+            <a:pPr algn="l"/>
+            <a:r>
+              <a:rPr sz="1300" b="0">
+                <a:solidFill>
+                  <a:srgbClr val="333333"/>
+                </a:solidFill>
+                <a:latin typeface="Open Sans"/>
+                <a:ea typeface="Open Sans"/>
+                <a:cs typeface="Open Sans"/>
+              </a:rPr>
+              <a:t>После промывания наложите свободную сухую повязку и вызовите скорую помощь.</a:t>
+            </a:r>
+          </a:p>
+        </p:txBody>
+      </p:sp>
+      <p:sp>
+        <p:nvSpPr>
+          <p:cNvPr id="32" name="Rounded Rectangle 31"/>
+          <p:cNvSpPr/>
+          <p:nvPr/>
+        </p:nvSpPr>
+        <p:spPr>
+          <a:xfrm>
+            <a:off x="700000" y="5800000"/>
+            <a:ext cx="11000000" cy="900000"/>
+          </a:xfrm>
+          <a:prstGeom prst="roundRect">
+            <a:avLst/>
+          </a:prstGeom>
+          <a:solidFill>
+            <a:srgbClr val="F5F0E1"/>
+          </a:solidFill>
+          <a:ln>
+            <a:noFill/>
+          </a:ln>
+        </p:spPr>
+        <p:style>
+          <a:lnRef idx="1">
+            <a:schemeClr val="accent1"/>
+          </a:lnRef>
+          <a:fillRef idx="3">
+            <a:schemeClr val="accent1"/>
+          </a:fillRef>
+          <a:effectRef idx="2">
+            <a:schemeClr val="accent1"/>
+          </a:effectRef>
+          <a:fontRef idx="minor">
+            <a:schemeClr val="lt1"/>
+          </a:fontRef>
+        </p:style>
+        <p:txBody>
+          <a:bodyPr rtlCol="0" anchor="ctr"/>
+          <a:lstStyle/>
+          <a:p>
+            <a:pPr algn="ctr"/>
+          </a:p>
+        </p:txBody>
+      </p:sp>
+      <p:sp>
+        <p:nvSpPr>
+          <p:cNvPr id="33" name="TextBox 32"/>
+          <p:cNvSpPr txBox="1"/>
+          <p:nvPr/>
+        </p:nvSpPr>
+        <p:spPr>
+          <a:xfrm>
+            <a:off x="950000" y="6000000"/>
+            <a:ext cx="10500000" cy="500000"/>
+          </a:xfrm>
+          <a:prstGeom prst="rect">
+            <a:avLst/>
+          </a:prstGeom>
+          <a:noFill/>
+        </p:spPr>
+        <p:txBody>
+          <a:bodyPr wrap="square" anchor="ctr">
+            <a:spAutoFit/>
+          </a:bodyPr>
+          <a:lstStyle/>
+          <a:p>
+            <a:pPr algn="l"/>
+            <a:r>
+              <a:rPr sz="1200" b="0">
+                <a:solidFill>
+                  <a:srgbClr val="333333"/>
+                </a:solidFill>
+                <a:latin typeface="Open Sans"/>
+                <a:ea typeface="Open Sans"/>
+                <a:cs typeface="Open Sans"/>
+              </a:rPr>
+              <a:t>Если инструкция к веществу требует другого способа удаления, следуйте ей и указаниям диспетчера.</a:t>
             </a:r>
           </a:p>
         </p:txBody>
@@ -6290,7 +8508,7 @@
                 <a:ea typeface="Open Sans"/>
                 <a:cs typeface="Open Sans"/>
               </a:rPr>
-              <a:t>БЕЗОПАСНОСТЬ ПРИ ЭЛЕКТРОТРАВМЕ</a:t>
+              <a:t>ДЛИТЕЛЬНОЕ ПРОМЫВАНИЕ</a:t>
             </a:r>
           </a:p>
         </p:txBody>
@@ -6464,81 +8682,7 @@
         <p:spPr>
           <a:xfrm>
             <a:off x="700000" y="1450000"/>
-            <a:ext cx="5400000" cy="400000"/>
-          </a:xfrm>
-          <a:prstGeom prst="rect">
-            <a:avLst/>
-          </a:prstGeom>
-          <a:noFill/>
-        </p:spPr>
-        <p:txBody>
-          <a:bodyPr wrap="square" anchor="t">
-            <a:spAutoFit/>
-          </a:bodyPr>
-          <a:lstStyle/>
-          <a:p>
-            <a:pPr algn="l"/>
-            <a:r>
-              <a:rPr sz="1400" b="1">
-                <a:solidFill>
-                  <a:srgbClr val="333333"/>
-                </a:solidFill>
-                <a:latin typeface="Open Sans"/>
-                <a:ea typeface="Open Sans"/>
-                <a:cs typeface="Open Sans"/>
-              </a:rPr>
-              <a:t>Бытовая сеть</a:t>
-            </a:r>
-          </a:p>
-        </p:txBody>
-      </p:sp>
-      <p:sp>
-        <p:nvSpPr>
-          <p:cNvPr id="9" name="TextBox 8"/>
-          <p:cNvSpPr txBox="1"/>
-          <p:nvPr/>
-        </p:nvSpPr>
-        <p:spPr>
-          <a:xfrm>
-            <a:off x="6600000" y="1450000"/>
-            <a:ext cx="5400000" cy="400000"/>
-          </a:xfrm>
-          <a:prstGeom prst="rect">
-            <a:avLst/>
-          </a:prstGeom>
-          <a:noFill/>
-        </p:spPr>
-        <p:txBody>
-          <a:bodyPr wrap="square" anchor="t">
-            <a:spAutoFit/>
-          </a:bodyPr>
-          <a:lstStyle/>
-          <a:p>
-            <a:pPr algn="l"/>
-            <a:r>
-              <a:rPr sz="1400" b="1">
-                <a:solidFill>
-                  <a:srgbClr val="333333"/>
-                </a:solidFill>
-                <a:latin typeface="Open Sans"/>
-                <a:ea typeface="Open Sans"/>
-                <a:cs typeface="Open Sans"/>
-              </a:rPr>
-              <a:t>Высокое напряжение</a:t>
-            </a:r>
-          </a:p>
-        </p:txBody>
-      </p:sp>
-      <p:sp>
-        <p:nvSpPr>
-          <p:cNvPr id="10" name="TextBox 9"/>
-          <p:cNvSpPr txBox="1"/>
-          <p:nvPr/>
-        </p:nvSpPr>
-        <p:spPr>
-          <a:xfrm>
-            <a:off x="700000" y="1950000"/>
-            <a:ext cx="5400000" cy="4000000"/>
+            <a:ext cx="11000000" cy="4000000"/>
           </a:xfrm>
           <a:prstGeom prst="rect">
             <a:avLst/>
@@ -6557,7 +8701,7 @@
               </a:spcAft>
             </a:pPr>
             <a:r>
-              <a:rPr sz="1300" b="0">
+              <a:rPr sz="1400" b="0">
                 <a:solidFill>
                   <a:srgbClr val="333333"/>
                 </a:solidFill>
@@ -6565,7 +8709,7 @@
                 <a:ea typeface="Open Sans"/>
                 <a:cs typeface="Open Sans"/>
               </a:rPr>
-              <a:t>•  не касайтесь пострадавшего до отключения тока</a:t>
+              <a:t>•  Начинайте промывать как можно раньше: время контакта определяет глубину поражения.</a:t>
             </a:r>
           </a:p>
           <a:p>
@@ -6575,7 +8719,7 @@
               </a:spcAft>
             </a:pPr>
             <a:r>
-              <a:rPr sz="1300" b="0">
+              <a:rPr sz="1400" b="0">
                 <a:solidFill>
                   <a:srgbClr val="333333"/>
                 </a:solidFill>
@@ -6583,7 +8727,7 @@
                 <a:ea typeface="Open Sans"/>
                 <a:cs typeface="Open Sans"/>
               </a:rPr>
-              <a:t>•  выключите автомат или рубильник</a:t>
+              <a:t>•  Вода должна стекать от здоровой кожи, не разнося химикат на другие участки.</a:t>
             </a:r>
           </a:p>
           <a:p>
@@ -6593,7 +8737,7 @@
               </a:spcAft>
             </a:pPr>
             <a:r>
-              <a:rPr sz="1300" b="0">
+              <a:rPr sz="1400" b="0">
                 <a:solidFill>
                   <a:srgbClr val="333333"/>
                 </a:solidFill>
@@ -6601,7 +8745,7 @@
                 <a:ea typeface="Open Sans"/>
                 <a:cs typeface="Open Sans"/>
               </a:rPr>
-              <a:t>•  уберите провод только безопасным способом</a:t>
+              <a:t>•  Не трите кожу и не пытайтесь нейтрализовать кислоту щелочью или наоборот.</a:t>
             </a:r>
           </a:p>
           <a:p>
@@ -6611,7 +8755,7 @@
               </a:spcAft>
             </a:pPr>
             <a:r>
-              <a:rPr sz="1300" b="0">
+              <a:rPr sz="1400" b="0">
                 <a:solidFill>
                   <a:srgbClr val="333333"/>
                 </a:solidFill>
@@ -6619,32 +8763,9 @@
                 <a:ea typeface="Open Sans"/>
                 <a:cs typeface="Open Sans"/>
               </a:rPr>
-              <a:t>•  после отключения оцените сознание и дыхание</a:t>
-            </a:r>
-          </a:p>
-        </p:txBody>
-      </p:sp>
-      <p:sp>
-        <p:nvSpPr>
-          <p:cNvPr id="11" name="TextBox 10"/>
-          <p:cNvSpPr txBox="1"/>
-          <p:nvPr/>
-        </p:nvSpPr>
-        <p:spPr>
-          <a:xfrm>
-            <a:off x="6600000" y="1950000"/>
-            <a:ext cx="5400000" cy="4000000"/>
-          </a:xfrm>
-          <a:prstGeom prst="rect">
-            <a:avLst/>
-          </a:prstGeom>
-          <a:noFill/>
-        </p:spPr>
-        <p:txBody>
-          <a:bodyPr wrap="square">
-            <a:spAutoFit/>
-          </a:bodyPr>
-          <a:lstStyle/>
+              <a:t>•  Загрязненную одежду поместите отдельно, не касаясь ее голыми руками.</a:t>
+            </a:r>
+          </a:p>
           <a:p>
             <a:pPr algn="l">
               <a:spcAft>
@@ -6652,7 +8773,7 @@
               </a:spcAft>
             </a:pPr>
             <a:r>
-              <a:rPr sz="1300" b="0">
+              <a:rPr sz="1400" b="0">
                 <a:solidFill>
                   <a:srgbClr val="333333"/>
                 </a:solidFill>
@@ -6660,7 +8781,7 @@
                 <a:ea typeface="Open Sans"/>
                 <a:cs typeface="Open Sans"/>
               </a:rPr>
-              <a:t>•  не приближайтесь к проводам</a:t>
+              <a:t>•  При попадании в глаз промывайте непрерывно, направляя воду от внутреннего угла наружу.</a:t>
             </a:r>
           </a:p>
           <a:p>
@@ -6670,7 +8791,7 @@
               </a:spcAft>
             </a:pPr>
             <a:r>
-              <a:rPr sz="1300" b="0">
+              <a:rPr sz="1400" b="0">
                 <a:solidFill>
                   <a:srgbClr val="333333"/>
                 </a:solidFill>
@@ -6678,17 +8799,79 @@
                 <a:ea typeface="Open Sans"/>
                 <a:cs typeface="Open Sans"/>
               </a:rPr>
-              <a:t>•  учитывайте опасность шагового напряжения</a:t>
-            </a:r>
-          </a:p>
-          <a:p>
-            <a:pPr algn="l">
-              <a:spcAft>
-                <a:spcPts val="800"/>
-              </a:spcAft>
-            </a:pPr>
-            <a:r>
-              <a:rPr sz="1300" b="0">
+              <a:t>•  Сохраните этикетку, упаковку или точное название вещества.</a:t>
+            </a:r>
+          </a:p>
+        </p:txBody>
+      </p:sp>
+      <p:sp>
+        <p:nvSpPr>
+          <p:cNvPr id="9" name="Rounded Rectangle 8"/>
+          <p:cNvSpPr/>
+          <p:nvPr/>
+        </p:nvSpPr>
+        <p:spPr>
+          <a:xfrm>
+            <a:off x="700000" y="5600000"/>
+            <a:ext cx="11000000" cy="1000000"/>
+          </a:xfrm>
+          <a:prstGeom prst="roundRect">
+            <a:avLst/>
+          </a:prstGeom>
+          <a:solidFill>
+            <a:srgbClr val="F5F0E1"/>
+          </a:solidFill>
+          <a:ln>
+            <a:noFill/>
+          </a:ln>
+        </p:spPr>
+        <p:style>
+          <a:lnRef idx="1">
+            <a:schemeClr val="accent1"/>
+          </a:lnRef>
+          <a:fillRef idx="3">
+            <a:schemeClr val="accent1"/>
+          </a:fillRef>
+          <a:effectRef idx="2">
+            <a:schemeClr val="accent1"/>
+          </a:effectRef>
+          <a:fontRef idx="minor">
+            <a:schemeClr val="lt1"/>
+          </a:fontRef>
+        </p:style>
+        <p:txBody>
+          <a:bodyPr rtlCol="0" anchor="ctr"/>
+          <a:lstStyle/>
+          <a:p>
+            <a:pPr algn="ctr"/>
+          </a:p>
+        </p:txBody>
+      </p:sp>
+      <p:sp>
+        <p:nvSpPr>
+          <p:cNvPr id="10" name="TextBox 9"/>
+          <p:cNvSpPr txBox="1"/>
+          <p:nvPr/>
+        </p:nvSpPr>
+        <p:spPr>
+          <a:xfrm>
+            <a:off x="950000" y="5800000"/>
+            <a:ext cx="10500000" cy="600000"/>
+          </a:xfrm>
+          <a:prstGeom prst="rect">
+            <a:avLst/>
+          </a:prstGeom>
+          <a:noFill/>
+        </p:spPr>
+        <p:txBody>
+          <a:bodyPr wrap="square" anchor="ctr">
+            <a:spAutoFit/>
+          </a:bodyPr>
+          <a:lstStyle/>
+          <a:p>
+            <a:pPr algn="l"/>
+            <a:r>
+              <a:rPr sz="1200" b="0">
                 <a:solidFill>
                   <a:srgbClr val="333333"/>
                 </a:solidFill>
@@ -6696,25 +8879,7 @@
                 <a:ea typeface="Open Sans"/>
                 <a:cs typeface="Open Sans"/>
               </a:rPr>
-              <a:t>•  не пытайтесь отключать источник сами</a:t>
-            </a:r>
-          </a:p>
-          <a:p>
-            <a:pPr algn="l">
-              <a:spcAft>
-                <a:spcPts val="800"/>
-              </a:spcAft>
-            </a:pPr>
-            <a:r>
-              <a:rPr sz="1300" b="0">
-                <a:solidFill>
-                  <a:srgbClr val="333333"/>
-                </a:solidFill>
-                <a:latin typeface="Open Sans"/>
-                <a:ea typeface="Open Sans"/>
-                <a:cs typeface="Open Sans"/>
-              </a:rPr>
-              <a:t>•  ждите аварийные службы и специалистов</a:t>
+              <a:t>Минимальная продолжительность промывания — 20 минут.</a:t>
             </a:r>
           </a:p>
         </p:txBody>
@@ -6812,7 +8977,7 @@
                 <a:ea typeface="Open Sans"/>
                 <a:cs typeface="Open Sans"/>
               </a:rPr>
-              <a:t>ЧЕМ ОПАСЕН ЭЛЕКТРИЧЕСКИЙ ТОК</a:t>
+              <a:t>ХИМИЧЕСКИЙ ОЖОГ ПИЩЕВОДА</a:t>
             </a:r>
           </a:p>
         </p:txBody>
@@ -6979,25 +9144,136 @@
       </p:sp>
       <p:sp>
         <p:nvSpPr>
-          <p:cNvPr id="8" name="Rectangle 7"/>
+          <p:cNvPr id="8" name="TextBox 7"/>
+          <p:cNvSpPr txBox="1"/>
+          <p:nvPr/>
+        </p:nvSpPr>
+        <p:spPr>
+          <a:xfrm>
+            <a:off x="700000" y="1450000"/>
+            <a:ext cx="11000000" cy="4000000"/>
+          </a:xfrm>
+          <a:prstGeom prst="rect">
+            <a:avLst/>
+          </a:prstGeom>
+          <a:noFill/>
+        </p:spPr>
+        <p:txBody>
+          <a:bodyPr wrap="square">
+            <a:spAutoFit/>
+          </a:bodyPr>
+          <a:lstStyle/>
+          <a:p>
+            <a:pPr algn="l">
+              <a:spcAft>
+                <a:spcPts val="800"/>
+              </a:spcAft>
+            </a:pPr>
+            <a:r>
+              <a:rPr sz="1400" b="1">
+                <a:solidFill>
+                  <a:srgbClr val="CC0000"/>
+                </a:solidFill>
+                <a:latin typeface="Open Sans"/>
+                <a:ea typeface="Open Sans"/>
+                <a:cs typeface="Open Sans"/>
+              </a:rPr>
+              <a:t>•  Жжение и боль во рту, глотке, за грудиной или в верхней части живота</a:t>
+            </a:r>
+          </a:p>
+          <a:p>
+            <a:pPr algn="l">
+              <a:spcAft>
+                <a:spcPts val="800"/>
+              </a:spcAft>
+            </a:pPr>
+            <a:r>
+              <a:rPr sz="1400" b="0">
+                <a:solidFill>
+                  <a:srgbClr val="333333"/>
+                </a:solidFill>
+                <a:latin typeface="Open Sans"/>
+                <a:ea typeface="Open Sans"/>
+                <a:cs typeface="Open Sans"/>
+              </a:rPr>
+              <a:t>•  Следы ожога на губах и слизистой, обильное слюнотечение</a:t>
+            </a:r>
+          </a:p>
+          <a:p>
+            <a:pPr algn="l">
+              <a:spcAft>
+                <a:spcPts val="800"/>
+              </a:spcAft>
+            </a:pPr>
+            <a:r>
+              <a:rPr sz="1400" b="1">
+                <a:solidFill>
+                  <a:srgbClr val="CC0000"/>
+                </a:solidFill>
+                <a:latin typeface="Open Sans"/>
+                <a:ea typeface="Open Sans"/>
+                <a:cs typeface="Open Sans"/>
+              </a:rPr>
+              <a:t>•  Затрудненное или болезненное глотание, осиплость и кашель</a:t>
+            </a:r>
+          </a:p>
+          <a:p>
+            <a:pPr algn="l">
+              <a:spcAft>
+                <a:spcPts val="800"/>
+              </a:spcAft>
+            </a:pPr>
+            <a:r>
+              <a:rPr sz="1400" b="0">
+                <a:solidFill>
+                  <a:srgbClr val="333333"/>
+                </a:solidFill>
+                <a:latin typeface="Open Sans"/>
+                <a:ea typeface="Open Sans"/>
+                <a:cs typeface="Open Sans"/>
+              </a:rPr>
+              <a:t>•  Тошнота и рвота, иногда с примесью крови</a:t>
+            </a:r>
+          </a:p>
+          <a:p>
+            <a:pPr algn="l">
+              <a:spcAft>
+                <a:spcPts val="800"/>
+              </a:spcAft>
+            </a:pPr>
+            <a:r>
+              <a:rPr sz="1400" b="1">
+                <a:solidFill>
+                  <a:srgbClr val="CC0000"/>
+                </a:solidFill>
+                <a:latin typeface="Open Sans"/>
+                <a:ea typeface="Open Sans"/>
+                <a:cs typeface="Open Sans"/>
+              </a:rPr>
+              <a:t>•  Нарушение дыхания, слабость или потеря сознания</a:t>
+            </a:r>
+          </a:p>
+        </p:txBody>
+      </p:sp>
+      <p:sp>
+        <p:nvSpPr>
+          <p:cNvPr id="9" name="Rounded Rectangle 8"/>
           <p:cNvSpPr/>
           <p:nvPr/>
         </p:nvSpPr>
         <p:spPr>
           <a:xfrm>
-            <a:off x="700000" y="1450000"/>
-            <a:ext cx="3500000" cy="4800000"/>
-          </a:xfrm>
-          <a:prstGeom prst="rect">
+            <a:off x="700000" y="5600000"/>
+            <a:ext cx="11000000" cy="1000000"/>
+          </a:xfrm>
+          <a:prstGeom prst="roundRect">
             <a:avLst/>
           </a:prstGeom>
           <a:solidFill>
-            <a:srgbClr val="FFFFFF"/>
+            <a:srgbClr val="F5F0E1"/>
           </a:solidFill>
-          <a:ln w="12700">
-            <a:solidFill>
-              <a:srgbClr val="999999"/>
-            </a:solidFill>
+          <a:ln>
+            <a:noFill/>
           </a:ln>
         </p:spPr>
         <p:style>
@@ -7024,57 +9300,14 @@
       </p:sp>
       <p:sp>
         <p:nvSpPr>
-          <p:cNvPr id="9" name="Oval 8"/>
-          <p:cNvSpPr/>
-          <p:nvPr/>
-        </p:nvSpPr>
-        <p:spPr>
-          <a:xfrm>
-            <a:off x="850000" y="1650000"/>
-            <a:ext cx="500000" cy="500000"/>
-          </a:xfrm>
-          <a:prstGeom prst="ellipse">
-            <a:avLst/>
-          </a:prstGeom>
-          <a:solidFill>
-            <a:srgbClr val="555555"/>
-          </a:solidFill>
-          <a:ln>
-            <a:noFill/>
-          </a:ln>
-        </p:spPr>
-        <p:style>
-          <a:lnRef idx="1">
-            <a:schemeClr val="accent1"/>
-          </a:lnRef>
-          <a:fillRef idx="3">
-            <a:schemeClr val="accent1"/>
-          </a:fillRef>
-          <a:effectRef idx="2">
-            <a:schemeClr val="accent1"/>
-          </a:effectRef>
-          <a:fontRef idx="minor">
-            <a:schemeClr val="lt1"/>
-          </a:fontRef>
-        </p:style>
-        <p:txBody>
-          <a:bodyPr rtlCol="0" anchor="ctr"/>
-          <a:lstStyle/>
-          <a:p>
-            <a:pPr algn="ctr"/>
-          </a:p>
-        </p:txBody>
-      </p:sp>
-      <p:sp>
-        <p:nvSpPr>
           <p:cNvPr id="10" name="TextBox 9"/>
           <p:cNvSpPr txBox="1"/>
           <p:nvPr/>
         </p:nvSpPr>
         <p:spPr>
           <a:xfrm>
-            <a:off x="850000" y="1650000"/>
-            <a:ext cx="500000" cy="500000"/>
+            <a:off x="950000" y="5800000"/>
+            <a:ext cx="10500000" cy="600000"/>
           </a:xfrm>
           <a:prstGeom prst="rect">
             <a:avLst/>
@@ -7087,46 +9320,9 @@
           </a:bodyPr>
           <a:lstStyle/>
           <a:p>
-            <a:pPr algn="ctr"/>
-            <a:r>
-              <a:rPr sz="1400" b="1">
-                <a:solidFill>
-                  <a:srgbClr val="FFFFFF"/>
-                </a:solidFill>
-                <a:latin typeface="Open Sans"/>
-                <a:ea typeface="Open Sans"/>
-                <a:cs typeface="Open Sans"/>
-              </a:rPr>
-              <a:t>1</a:t>
-            </a:r>
-          </a:p>
-        </p:txBody>
-      </p:sp>
-      <p:sp>
-        <p:nvSpPr>
-          <p:cNvPr id="11" name="TextBox 10"/>
-          <p:cNvSpPr txBox="1"/>
-          <p:nvPr/>
-        </p:nvSpPr>
-        <p:spPr>
-          <a:xfrm>
-            <a:off x="1450000" y="1700000"/>
-            <a:ext cx="2600000" cy="450000"/>
-          </a:xfrm>
-          <a:prstGeom prst="rect">
-            <a:avLst/>
-          </a:prstGeom>
-          <a:noFill/>
-        </p:spPr>
-        <p:txBody>
-          <a:bodyPr wrap="square" anchor="t">
-            <a:spAutoFit/>
-          </a:bodyPr>
-          <a:lstStyle/>
-          <a:p>
             <a:pPr algn="l"/>
             <a:r>
-              <a:rPr sz="1300" b="1">
+              <a:rPr sz="1200" b="0">
                 <a:solidFill>
                   <a:srgbClr val="333333"/>
                 </a:solidFill>
@@ -7134,442 +9330,7 @@
                 <a:ea typeface="Open Sans"/>
                 <a:cs typeface="Open Sans"/>
               </a:rPr>
-              <a:t>Остановка сердца</a:t>
-            </a:r>
-          </a:p>
-        </p:txBody>
-      </p:sp>
-      <p:sp>
-        <p:nvSpPr>
-          <p:cNvPr id="12" name="TextBox 11"/>
-          <p:cNvSpPr txBox="1"/>
-          <p:nvPr/>
-        </p:nvSpPr>
-        <p:spPr>
-          <a:xfrm>
-            <a:off x="850000" y="2300000"/>
-            <a:ext cx="3200000" cy="3800000"/>
-          </a:xfrm>
-          <a:prstGeom prst="rect">
-            <a:avLst/>
-          </a:prstGeom>
-          <a:noFill/>
-        </p:spPr>
-        <p:txBody>
-          <a:bodyPr wrap="square" anchor="t">
-            <a:spAutoFit/>
-          </a:bodyPr>
-          <a:lstStyle/>
-          <a:p>
-            <a:pPr algn="l"/>
-            <a:r>
-              <a:rPr sz="1200" b="0">
-                <a:solidFill>
-                  <a:srgbClr val="666666"/>
-                </a:solidFill>
-                <a:latin typeface="Open Sans"/>
-                <a:ea typeface="Open Sans"/>
-                <a:cs typeface="Open Sans"/>
-              </a:rPr>
-              <a:t>Будьте готовы начать сердечно-легочную реанимацию.</a:t>
-            </a:r>
-          </a:p>
-        </p:txBody>
-      </p:sp>
-      <p:sp>
-        <p:nvSpPr>
-          <p:cNvPr id="13" name="Rectangle 12"/>
-          <p:cNvSpPr/>
-          <p:nvPr/>
-        </p:nvSpPr>
-        <p:spPr>
-          <a:xfrm>
-            <a:off x="4450000" y="1450000"/>
-            <a:ext cx="3500000" cy="4800000"/>
-          </a:xfrm>
-          <a:prstGeom prst="rect">
-            <a:avLst/>
-          </a:prstGeom>
-          <a:solidFill>
-            <a:srgbClr val="FFFFFF"/>
-          </a:solidFill>
-          <a:ln w="12700">
-            <a:solidFill>
-              <a:srgbClr val="999999"/>
-            </a:solidFill>
-          </a:ln>
-        </p:spPr>
-        <p:style>
-          <a:lnRef idx="1">
-            <a:schemeClr val="accent1"/>
-          </a:lnRef>
-          <a:fillRef idx="3">
-            <a:schemeClr val="accent1"/>
-          </a:fillRef>
-          <a:effectRef idx="2">
-            <a:schemeClr val="accent1"/>
-          </a:effectRef>
-          <a:fontRef idx="minor">
-            <a:schemeClr val="lt1"/>
-          </a:fontRef>
-        </p:style>
-        <p:txBody>
-          <a:bodyPr rtlCol="0" anchor="ctr"/>
-          <a:lstStyle/>
-          <a:p>
-            <a:pPr algn="ctr"/>
-          </a:p>
-        </p:txBody>
-      </p:sp>
-      <p:sp>
-        <p:nvSpPr>
-          <p:cNvPr id="14" name="Oval 13"/>
-          <p:cNvSpPr/>
-          <p:nvPr/>
-        </p:nvSpPr>
-        <p:spPr>
-          <a:xfrm>
-            <a:off x="4600000" y="1650000"/>
-            <a:ext cx="500000" cy="500000"/>
-          </a:xfrm>
-          <a:prstGeom prst="ellipse">
-            <a:avLst/>
-          </a:prstGeom>
-          <a:solidFill>
-            <a:srgbClr val="555555"/>
-          </a:solidFill>
-          <a:ln>
-            <a:noFill/>
-          </a:ln>
-        </p:spPr>
-        <p:style>
-          <a:lnRef idx="1">
-            <a:schemeClr val="accent1"/>
-          </a:lnRef>
-          <a:fillRef idx="3">
-            <a:schemeClr val="accent1"/>
-          </a:fillRef>
-          <a:effectRef idx="2">
-            <a:schemeClr val="accent1"/>
-          </a:effectRef>
-          <a:fontRef idx="minor">
-            <a:schemeClr val="lt1"/>
-          </a:fontRef>
-        </p:style>
-        <p:txBody>
-          <a:bodyPr rtlCol="0" anchor="ctr"/>
-          <a:lstStyle/>
-          <a:p>
-            <a:pPr algn="ctr"/>
-          </a:p>
-        </p:txBody>
-      </p:sp>
-      <p:sp>
-        <p:nvSpPr>
-          <p:cNvPr id="15" name="TextBox 14"/>
-          <p:cNvSpPr txBox="1"/>
-          <p:nvPr/>
-        </p:nvSpPr>
-        <p:spPr>
-          <a:xfrm>
-            <a:off x="4600000" y="1650000"/>
-            <a:ext cx="500000" cy="500000"/>
-          </a:xfrm>
-          <a:prstGeom prst="rect">
-            <a:avLst/>
-          </a:prstGeom>
-          <a:noFill/>
-        </p:spPr>
-        <p:txBody>
-          <a:bodyPr wrap="square" anchor="ctr">
-            <a:spAutoFit/>
-          </a:bodyPr>
-          <a:lstStyle/>
-          <a:p>
-            <a:pPr algn="ctr"/>
-            <a:r>
-              <a:rPr sz="1400" b="1">
-                <a:solidFill>
-                  <a:srgbClr val="FFFFFF"/>
-                </a:solidFill>
-                <a:latin typeface="Open Sans"/>
-                <a:ea typeface="Open Sans"/>
-                <a:cs typeface="Open Sans"/>
-              </a:rPr>
-              <a:t>2</a:t>
-            </a:r>
-          </a:p>
-        </p:txBody>
-      </p:sp>
-      <p:sp>
-        <p:nvSpPr>
-          <p:cNvPr id="16" name="TextBox 15"/>
-          <p:cNvSpPr txBox="1"/>
-          <p:nvPr/>
-        </p:nvSpPr>
-        <p:spPr>
-          <a:xfrm>
-            <a:off x="5200000" y="1700000"/>
-            <a:ext cx="2600000" cy="450000"/>
-          </a:xfrm>
-          <a:prstGeom prst="rect">
-            <a:avLst/>
-          </a:prstGeom>
-          <a:noFill/>
-        </p:spPr>
-        <p:txBody>
-          <a:bodyPr wrap="square" anchor="t">
-            <a:spAutoFit/>
-          </a:bodyPr>
-          <a:lstStyle/>
-          <a:p>
-            <a:pPr algn="l"/>
-            <a:r>
-              <a:rPr sz="1300" b="1">
-                <a:solidFill>
-                  <a:srgbClr val="333333"/>
-                </a:solidFill>
-                <a:latin typeface="Open Sans"/>
-                <a:ea typeface="Open Sans"/>
-                <a:cs typeface="Open Sans"/>
-              </a:rPr>
-              <a:t>Остановка дыхания</a:t>
-            </a:r>
-          </a:p>
-        </p:txBody>
-      </p:sp>
-      <p:sp>
-        <p:nvSpPr>
-          <p:cNvPr id="17" name="TextBox 16"/>
-          <p:cNvSpPr txBox="1"/>
-          <p:nvPr/>
-        </p:nvSpPr>
-        <p:spPr>
-          <a:xfrm>
-            <a:off x="4600000" y="2300000"/>
-            <a:ext cx="3200000" cy="3800000"/>
-          </a:xfrm>
-          <a:prstGeom prst="rect">
-            <a:avLst/>
-          </a:prstGeom>
-          <a:noFill/>
-        </p:spPr>
-        <p:txBody>
-          <a:bodyPr wrap="square" anchor="t">
-            <a:spAutoFit/>
-          </a:bodyPr>
-          <a:lstStyle/>
-          <a:p>
-            <a:pPr algn="l"/>
-            <a:r>
-              <a:rPr sz="1200" b="0">
-                <a:solidFill>
-                  <a:srgbClr val="666666"/>
-                </a:solidFill>
-                <a:latin typeface="Open Sans"/>
-                <a:ea typeface="Open Sans"/>
-                <a:cs typeface="Open Sans"/>
-              </a:rPr>
-              <a:t>Сразу после отключения тока проверьте дыхание.</a:t>
-            </a:r>
-          </a:p>
-        </p:txBody>
-      </p:sp>
-      <p:sp>
-        <p:nvSpPr>
-          <p:cNvPr id="18" name="Rectangle 17"/>
-          <p:cNvSpPr/>
-          <p:nvPr/>
-        </p:nvSpPr>
-        <p:spPr>
-          <a:xfrm>
-            <a:off x="8200000" y="1450000"/>
-            <a:ext cx="3500000" cy="4800000"/>
-          </a:xfrm>
-          <a:prstGeom prst="rect">
-            <a:avLst/>
-          </a:prstGeom>
-          <a:solidFill>
-            <a:srgbClr val="FFFFFF"/>
-          </a:solidFill>
-          <a:ln w="12700">
-            <a:solidFill>
-              <a:srgbClr val="999999"/>
-            </a:solidFill>
-          </a:ln>
-        </p:spPr>
-        <p:style>
-          <a:lnRef idx="1">
-            <a:schemeClr val="accent1"/>
-          </a:lnRef>
-          <a:fillRef idx="3">
-            <a:schemeClr val="accent1"/>
-          </a:fillRef>
-          <a:effectRef idx="2">
-            <a:schemeClr val="accent1"/>
-          </a:effectRef>
-          <a:fontRef idx="minor">
-            <a:schemeClr val="lt1"/>
-          </a:fontRef>
-        </p:style>
-        <p:txBody>
-          <a:bodyPr rtlCol="0" anchor="ctr"/>
-          <a:lstStyle/>
-          <a:p>
-            <a:pPr algn="ctr"/>
-          </a:p>
-        </p:txBody>
-      </p:sp>
-      <p:sp>
-        <p:nvSpPr>
-          <p:cNvPr id="19" name="Oval 18"/>
-          <p:cNvSpPr/>
-          <p:nvPr/>
-        </p:nvSpPr>
-        <p:spPr>
-          <a:xfrm>
-            <a:off x="8350000" y="1650000"/>
-            <a:ext cx="500000" cy="500000"/>
-          </a:xfrm>
-          <a:prstGeom prst="ellipse">
-            <a:avLst/>
-          </a:prstGeom>
-          <a:solidFill>
-            <a:srgbClr val="555555"/>
-          </a:solidFill>
-          <a:ln>
-            <a:noFill/>
-          </a:ln>
-        </p:spPr>
-        <p:style>
-          <a:lnRef idx="1">
-            <a:schemeClr val="accent1"/>
-          </a:lnRef>
-          <a:fillRef idx="3">
-            <a:schemeClr val="accent1"/>
-          </a:fillRef>
-          <a:effectRef idx="2">
-            <a:schemeClr val="accent1"/>
-          </a:effectRef>
-          <a:fontRef idx="minor">
-            <a:schemeClr val="lt1"/>
-          </a:fontRef>
-        </p:style>
-        <p:txBody>
-          <a:bodyPr rtlCol="0" anchor="ctr"/>
-          <a:lstStyle/>
-          <a:p>
-            <a:pPr algn="ctr"/>
-          </a:p>
-        </p:txBody>
-      </p:sp>
-      <p:sp>
-        <p:nvSpPr>
-          <p:cNvPr id="20" name="TextBox 19"/>
-          <p:cNvSpPr txBox="1"/>
-          <p:nvPr/>
-        </p:nvSpPr>
-        <p:spPr>
-          <a:xfrm>
-            <a:off x="8350000" y="1650000"/>
-            <a:ext cx="500000" cy="500000"/>
-          </a:xfrm>
-          <a:prstGeom prst="rect">
-            <a:avLst/>
-          </a:prstGeom>
-          <a:noFill/>
-        </p:spPr>
-        <p:txBody>
-          <a:bodyPr wrap="square" anchor="ctr">
-            <a:spAutoFit/>
-          </a:bodyPr>
-          <a:lstStyle/>
-          <a:p>
-            <a:pPr algn="ctr"/>
-            <a:r>
-              <a:rPr sz="1400" b="1">
-                <a:solidFill>
-                  <a:srgbClr val="FFFFFF"/>
-                </a:solidFill>
-                <a:latin typeface="Open Sans"/>
-                <a:ea typeface="Open Sans"/>
-                <a:cs typeface="Open Sans"/>
-              </a:rPr>
-              <a:t>3</a:t>
-            </a:r>
-          </a:p>
-        </p:txBody>
-      </p:sp>
-      <p:sp>
-        <p:nvSpPr>
-          <p:cNvPr id="21" name="TextBox 20"/>
-          <p:cNvSpPr txBox="1"/>
-          <p:nvPr/>
-        </p:nvSpPr>
-        <p:spPr>
-          <a:xfrm>
-            <a:off x="8950000" y="1700000"/>
-            <a:ext cx="2600000" cy="450000"/>
-          </a:xfrm>
-          <a:prstGeom prst="rect">
-            <a:avLst/>
-          </a:prstGeom>
-          <a:noFill/>
-        </p:spPr>
-        <p:txBody>
-          <a:bodyPr wrap="square" anchor="t">
-            <a:spAutoFit/>
-          </a:bodyPr>
-          <a:lstStyle/>
-          <a:p>
-            <a:pPr algn="l"/>
-            <a:r>
-              <a:rPr sz="1300" b="1">
-                <a:solidFill>
-                  <a:srgbClr val="333333"/>
-                </a:solidFill>
-                <a:latin typeface="Open Sans"/>
-                <a:ea typeface="Open Sans"/>
-                <a:cs typeface="Open Sans"/>
-              </a:rPr>
-              <a:t>Ожоги</a:t>
-            </a:r>
-          </a:p>
-        </p:txBody>
-      </p:sp>
-      <p:sp>
-        <p:nvSpPr>
-          <p:cNvPr id="22" name="TextBox 21"/>
-          <p:cNvSpPr txBox="1"/>
-          <p:nvPr/>
-        </p:nvSpPr>
-        <p:spPr>
-          <a:xfrm>
-            <a:off x="8350000" y="2300000"/>
-            <a:ext cx="3200000" cy="3800000"/>
-          </a:xfrm>
-          <a:prstGeom prst="rect">
-            <a:avLst/>
-          </a:prstGeom>
-          <a:noFill/>
-        </p:spPr>
-        <p:txBody>
-          <a:bodyPr wrap="square" anchor="t">
-            <a:spAutoFit/>
-          </a:bodyPr>
-          <a:lstStyle/>
-          <a:p>
-            <a:pPr algn="l"/>
-            <a:r>
-              <a:rPr sz="1200" b="0">
-                <a:solidFill>
-                  <a:srgbClr val="666666"/>
-                </a:solidFill>
-                <a:latin typeface="Open Sans"/>
-                <a:ea typeface="Open Sans"/>
-                <a:cs typeface="Open Sans"/>
-              </a:rPr>
-              <a:t>Оказывайте помощь по тем же принципам, что при термическом ожоге.</a:t>
+              <a:t>Не вызывайте рвоту: повторное прохождение вещества усиливает ожог и создает угрозу попадания его в дыхательные пути.</a:t>
             </a:r>
           </a:p>
         </p:txBody>
@@ -7667,7 +9428,7 @@
                 <a:ea typeface="Open Sans"/>
                 <a:cs typeface="Open Sans"/>
               </a:rPr>
-              <a:t>ПОРАЖЕНИЕ СОЛНЕЧНЫМ ИЗЛУЧЕНИЕМ</a:t>
+              <a:t>ДЕЙСТВИЯ ПРИ ПРОГЛАТЫВАНИИ ЕДКОГО ВЕЩЕСТВА</a:t>
             </a:r>
           </a:p>
         </p:txBody>
@@ -7834,14 +9595,57 @@
       </p:sp>
       <p:sp>
         <p:nvSpPr>
-          <p:cNvPr id="8" name="TextBox 7"/>
+          <p:cNvPr id="8" name="Oval 7"/>
+          <p:cNvSpPr/>
+          <p:nvPr/>
+        </p:nvSpPr>
+        <p:spPr>
+          <a:xfrm>
+            <a:off x="700000" y="1400000"/>
+            <a:ext cx="500000" cy="500000"/>
+          </a:xfrm>
+          <a:prstGeom prst="ellipse">
+            <a:avLst/>
+          </a:prstGeom>
+          <a:solidFill>
+            <a:srgbClr val="CC0000"/>
+          </a:solidFill>
+          <a:ln>
+            <a:noFill/>
+          </a:ln>
+        </p:spPr>
+        <p:style>
+          <a:lnRef idx="1">
+            <a:schemeClr val="accent1"/>
+          </a:lnRef>
+          <a:fillRef idx="3">
+            <a:schemeClr val="accent1"/>
+          </a:fillRef>
+          <a:effectRef idx="2">
+            <a:schemeClr val="accent1"/>
+          </a:effectRef>
+          <a:fontRef idx="minor">
+            <a:schemeClr val="lt1"/>
+          </a:fontRef>
+        </p:style>
+        <p:txBody>
+          <a:bodyPr rtlCol="0" anchor="ctr"/>
+          <a:lstStyle/>
+          <a:p>
+            <a:pPr algn="ctr"/>
+          </a:p>
+        </p:txBody>
+      </p:sp>
+      <p:sp>
+        <p:nvSpPr>
+          <p:cNvPr id="9" name="TextBox 8"/>
           <p:cNvSpPr txBox="1"/>
           <p:nvPr/>
         </p:nvSpPr>
         <p:spPr>
           <a:xfrm>
-            <a:off x="700000" y="1450000"/>
-            <a:ext cx="5400000" cy="400000"/>
+            <a:off x="700000" y="1400000"/>
+            <a:ext cx="500000" cy="500000"/>
           </a:xfrm>
           <a:prstGeom prst="rect">
             <a:avLst/>
@@ -7849,36 +9653,81 @@
           <a:noFill/>
         </p:spPr>
         <p:txBody>
-          <a:bodyPr wrap="square" anchor="t">
+          <a:bodyPr wrap="square" anchor="ctr">
             <a:spAutoFit/>
           </a:bodyPr>
           <a:lstStyle/>
           <a:p>
-            <a:pPr algn="l"/>
-            <a:r>
-              <a:rPr sz="1400" b="1">
-                <a:solidFill>
-                  <a:srgbClr val="333333"/>
-                </a:solidFill>
-                <a:latin typeface="Open Sans"/>
-                <a:ea typeface="Open Sans"/>
-                <a:cs typeface="Open Sans"/>
-              </a:rPr>
-              <a:t>Солнечный ожог</a:t>
-            </a:r>
-          </a:p>
-        </p:txBody>
-      </p:sp>
-      <p:sp>
-        <p:nvSpPr>
-          <p:cNvPr id="9" name="TextBox 8"/>
+            <a:pPr algn="ctr"/>
+            <a:r>
+              <a:rPr sz="1300" b="1">
+                <a:solidFill>
+                  <a:srgbClr val="FFFFFF"/>
+                </a:solidFill>
+                <a:latin typeface="Open Sans"/>
+                <a:ea typeface="Open Sans"/>
+                <a:cs typeface="Open Sans"/>
+              </a:rPr>
+              <a:t>1</a:t>
+            </a:r>
+          </a:p>
+        </p:txBody>
+      </p:sp>
+      <p:sp>
+        <p:nvSpPr>
+          <p:cNvPr id="10" name="Rectangle 9"/>
+          <p:cNvSpPr/>
+          <p:nvPr/>
+        </p:nvSpPr>
+        <p:spPr>
+          <a:xfrm>
+            <a:off x="1400000" y="1400000"/>
+            <a:ext cx="10550000" cy="620000"/>
+          </a:xfrm>
+          <a:prstGeom prst="rect">
+            <a:avLst/>
+          </a:prstGeom>
+          <a:solidFill>
+            <a:srgbClr val="FFFFFF"/>
+          </a:solidFill>
+          <a:ln w="12700">
+            <a:solidFill>
+              <a:srgbClr val="999999"/>
+            </a:solidFill>
+          </a:ln>
+        </p:spPr>
+        <p:style>
+          <a:lnRef idx="1">
+            <a:schemeClr val="accent1"/>
+          </a:lnRef>
+          <a:fillRef idx="3">
+            <a:schemeClr val="accent1"/>
+          </a:fillRef>
+          <a:effectRef idx="2">
+            <a:schemeClr val="accent1"/>
+          </a:effectRef>
+          <a:fontRef idx="minor">
+            <a:schemeClr val="lt1"/>
+          </a:fontRef>
+        </p:style>
+        <p:txBody>
+          <a:bodyPr rtlCol="0" anchor="ctr"/>
+          <a:lstStyle/>
+          <a:p>
+            <a:pPr algn="ctr"/>
+          </a:p>
+        </p:txBody>
+      </p:sp>
+      <p:sp>
+        <p:nvSpPr>
+          <p:cNvPr id="11" name="TextBox 10"/>
           <p:cNvSpPr txBox="1"/>
           <p:nvPr/>
         </p:nvSpPr>
         <p:spPr>
           <a:xfrm>
-            <a:off x="6600000" y="1450000"/>
-            <a:ext cx="5400000" cy="400000"/>
+            <a:off x="1600000" y="1400000"/>
+            <a:ext cx="10150000" cy="620000"/>
           </a:xfrm>
           <a:prstGeom prst="rect">
             <a:avLst/>
@@ -7886,14 +9735,14 @@
           <a:noFill/>
         </p:spPr>
         <p:txBody>
-          <a:bodyPr wrap="square" anchor="t">
+          <a:bodyPr wrap="square" anchor="ctr">
             <a:spAutoFit/>
           </a:bodyPr>
           <a:lstStyle/>
           <a:p>
             <a:pPr algn="l"/>
             <a:r>
-              <a:rPr sz="1400" b="1">
+              <a:rPr sz="1300" b="0">
                 <a:solidFill>
                   <a:srgbClr val="333333"/>
                 </a:solidFill>
@@ -7901,21 +9750,64 @@
                 <a:ea typeface="Open Sans"/>
                 <a:cs typeface="Open Sans"/>
               </a:rPr>
-              <a:t>Солнечный удар</a:t>
-            </a:r>
-          </a:p>
-        </p:txBody>
-      </p:sp>
-      <p:sp>
-        <p:nvSpPr>
-          <p:cNvPr id="10" name="TextBox 9"/>
+              <a:t>Защитите себя и прекратите дальнейший контакт с веществом.</a:t>
+            </a:r>
+          </a:p>
+        </p:txBody>
+      </p:sp>
+      <p:sp>
+        <p:nvSpPr>
+          <p:cNvPr id="12" name="Oval 11"/>
+          <p:cNvSpPr/>
+          <p:nvPr/>
+        </p:nvSpPr>
+        <p:spPr>
+          <a:xfrm>
+            <a:off x="700000" y="2100000"/>
+            <a:ext cx="500000" cy="500000"/>
+          </a:xfrm>
+          <a:prstGeom prst="ellipse">
+            <a:avLst/>
+          </a:prstGeom>
+          <a:solidFill>
+            <a:srgbClr val="555555"/>
+          </a:solidFill>
+          <a:ln>
+            <a:noFill/>
+          </a:ln>
+        </p:spPr>
+        <p:style>
+          <a:lnRef idx="1">
+            <a:schemeClr val="accent1"/>
+          </a:lnRef>
+          <a:fillRef idx="3">
+            <a:schemeClr val="accent1"/>
+          </a:fillRef>
+          <a:effectRef idx="2">
+            <a:schemeClr val="accent1"/>
+          </a:effectRef>
+          <a:fontRef idx="minor">
+            <a:schemeClr val="lt1"/>
+          </a:fontRef>
+        </p:style>
+        <p:txBody>
+          <a:bodyPr rtlCol="0" anchor="ctr"/>
+          <a:lstStyle/>
+          <a:p>
+            <a:pPr algn="ctr"/>
+          </a:p>
+        </p:txBody>
+      </p:sp>
+      <p:sp>
+        <p:nvSpPr>
+          <p:cNvPr id="13" name="TextBox 12"/>
           <p:cNvSpPr txBox="1"/>
           <p:nvPr/>
         </p:nvSpPr>
         <p:spPr>
           <a:xfrm>
-            <a:off x="700000" y="1950000"/>
-            <a:ext cx="5400000" cy="4000000"/>
+            <a:off x="700000" y="2100000"/>
+            <a:ext cx="500000" cy="500000"/>
           </a:xfrm>
           <a:prstGeom prst="rect">
             <a:avLst/>
@@ -7923,94 +9815,81 @@
           <a:noFill/>
         </p:spPr>
         <p:txBody>
-          <a:bodyPr wrap="square">
+          <a:bodyPr wrap="square" anchor="ctr">
             <a:spAutoFit/>
           </a:bodyPr>
           <a:lstStyle/>
           <a:p>
-            <a:pPr algn="l">
-              <a:spcAft>
-                <a:spcPts val="800"/>
-              </a:spcAft>
-            </a:pPr>
-            <a:r>
-              <a:rPr sz="1300" b="0">
-                <a:solidFill>
-                  <a:srgbClr val="333333"/>
-                </a:solidFill>
-                <a:latin typeface="Open Sans"/>
-                <a:ea typeface="Open Sans"/>
-                <a:cs typeface="Open Sans"/>
-              </a:rPr>
-              <a:t>•  уйдите из-под прямого солнца</a:t>
-            </a:r>
-          </a:p>
-          <a:p>
-            <a:pPr algn="l">
-              <a:spcAft>
-                <a:spcPts val="800"/>
-              </a:spcAft>
-            </a:pPr>
-            <a:r>
-              <a:rPr sz="1300" b="0">
-                <a:solidFill>
-                  <a:srgbClr val="333333"/>
-                </a:solidFill>
-                <a:latin typeface="Open Sans"/>
-                <a:ea typeface="Open Sans"/>
-                <a:cs typeface="Open Sans"/>
-              </a:rPr>
-              <a:t>•  охлаждайте кожу</a:t>
-            </a:r>
-          </a:p>
-          <a:p>
-            <a:pPr algn="l">
-              <a:spcAft>
-                <a:spcPts val="800"/>
-              </a:spcAft>
-            </a:pPr>
-            <a:r>
-              <a:rPr sz="1300" b="0">
-                <a:solidFill>
-                  <a:srgbClr val="333333"/>
-                </a:solidFill>
-                <a:latin typeface="Open Sans"/>
-                <a:ea typeface="Open Sans"/>
-                <a:cs typeface="Open Sans"/>
-              </a:rPr>
-              <a:t>•  закройте свободной сухой повязкой</a:t>
-            </a:r>
-          </a:p>
-          <a:p>
-            <a:pPr algn="l">
-              <a:spcAft>
-                <a:spcPts val="800"/>
-              </a:spcAft>
-            </a:pPr>
-            <a:r>
-              <a:rPr sz="1300" b="0">
-                <a:solidFill>
-                  <a:srgbClr val="333333"/>
-                </a:solidFill>
-                <a:latin typeface="Open Sans"/>
-                <a:ea typeface="Open Sans"/>
-                <a:cs typeface="Open Sans"/>
-              </a:rPr>
-              <a:t>•  не вскрывайте пузыри</a:t>
-            </a:r>
-          </a:p>
-        </p:txBody>
-      </p:sp>
-      <p:sp>
-        <p:nvSpPr>
-          <p:cNvPr id="11" name="TextBox 10"/>
+            <a:pPr algn="ctr"/>
+            <a:r>
+              <a:rPr sz="1300" b="1">
+                <a:solidFill>
+                  <a:srgbClr val="FFFFFF"/>
+                </a:solidFill>
+                <a:latin typeface="Open Sans"/>
+                <a:ea typeface="Open Sans"/>
+                <a:cs typeface="Open Sans"/>
+              </a:rPr>
+              <a:t>2</a:t>
+            </a:r>
+          </a:p>
+        </p:txBody>
+      </p:sp>
+      <p:sp>
+        <p:nvSpPr>
+          <p:cNvPr id="14" name="Rectangle 13"/>
+          <p:cNvSpPr/>
+          <p:nvPr/>
+        </p:nvSpPr>
+        <p:spPr>
+          <a:xfrm>
+            <a:off x="1400000" y="2100000"/>
+            <a:ext cx="10550000" cy="620000"/>
+          </a:xfrm>
+          <a:prstGeom prst="rect">
+            <a:avLst/>
+          </a:prstGeom>
+          <a:solidFill>
+            <a:srgbClr val="FFFFFF"/>
+          </a:solidFill>
+          <a:ln w="12700">
+            <a:solidFill>
+              <a:srgbClr val="999999"/>
+            </a:solidFill>
+          </a:ln>
+        </p:spPr>
+        <p:style>
+          <a:lnRef idx="1">
+            <a:schemeClr val="accent1"/>
+          </a:lnRef>
+          <a:fillRef idx="3">
+            <a:schemeClr val="accent1"/>
+          </a:fillRef>
+          <a:effectRef idx="2">
+            <a:schemeClr val="accent1"/>
+          </a:effectRef>
+          <a:fontRef idx="minor">
+            <a:schemeClr val="lt1"/>
+          </a:fontRef>
+        </p:style>
+        <p:txBody>
+          <a:bodyPr rtlCol="0" anchor="ctr"/>
+          <a:lstStyle/>
+          <a:p>
+            <a:pPr algn="ctr"/>
+          </a:p>
+        </p:txBody>
+      </p:sp>
+      <p:sp>
+        <p:nvSpPr>
+          <p:cNvPr id="15" name="TextBox 14"/>
           <p:cNvSpPr txBox="1"/>
           <p:nvPr/>
         </p:nvSpPr>
         <p:spPr>
           <a:xfrm>
-            <a:off x="6600000" y="1950000"/>
-            <a:ext cx="5400000" cy="4000000"/>
+            <a:off x="1600000" y="2100000"/>
+            <a:ext cx="10150000" cy="620000"/>
           </a:xfrm>
           <a:prstGeom prst="rect">
             <a:avLst/>
@@ -8018,16 +9897,12 @@
           <a:noFill/>
         </p:spPr>
         <p:txBody>
-          <a:bodyPr wrap="square">
+          <a:bodyPr wrap="square" anchor="ctr">
             <a:spAutoFit/>
           </a:bodyPr>
           <a:lstStyle/>
           <a:p>
-            <a:pPr algn="l">
-              <a:spcAft>
-                <a:spcPts val="800"/>
-              </a:spcAft>
-            </a:pPr>
+            <a:pPr algn="l"/>
             <a:r>
               <a:rPr sz="1300" b="0">
                 <a:solidFill>
@@ -8037,15 +9912,159 @@
                 <a:ea typeface="Open Sans"/>
                 <a:cs typeface="Open Sans"/>
               </a:rPr>
-              <a:t>•  переместите в тень или прохладу</a:t>
-            </a:r>
-          </a:p>
-          <a:p>
-            <a:pPr algn="l">
-              <a:spcAft>
-                <a:spcPts val="800"/>
-              </a:spcAft>
-            </a:pPr>
+              <a:t>Прополощите пострадавшему рот водой, не допуская проглатывания.</a:t>
+            </a:r>
+          </a:p>
+        </p:txBody>
+      </p:sp>
+      <p:sp>
+        <p:nvSpPr>
+          <p:cNvPr id="16" name="Oval 15"/>
+          <p:cNvSpPr/>
+          <p:nvPr/>
+        </p:nvSpPr>
+        <p:spPr>
+          <a:xfrm>
+            <a:off x="700000" y="2800000"/>
+            <a:ext cx="500000" cy="500000"/>
+          </a:xfrm>
+          <a:prstGeom prst="ellipse">
+            <a:avLst/>
+          </a:prstGeom>
+          <a:solidFill>
+            <a:srgbClr val="555555"/>
+          </a:solidFill>
+          <a:ln>
+            <a:noFill/>
+          </a:ln>
+        </p:spPr>
+        <p:style>
+          <a:lnRef idx="1">
+            <a:schemeClr val="accent1"/>
+          </a:lnRef>
+          <a:fillRef idx="3">
+            <a:schemeClr val="accent1"/>
+          </a:fillRef>
+          <a:effectRef idx="2">
+            <a:schemeClr val="accent1"/>
+          </a:effectRef>
+          <a:fontRef idx="minor">
+            <a:schemeClr val="lt1"/>
+          </a:fontRef>
+        </p:style>
+        <p:txBody>
+          <a:bodyPr rtlCol="0" anchor="ctr"/>
+          <a:lstStyle/>
+          <a:p>
+            <a:pPr algn="ctr"/>
+          </a:p>
+        </p:txBody>
+      </p:sp>
+      <p:sp>
+        <p:nvSpPr>
+          <p:cNvPr id="17" name="TextBox 16"/>
+          <p:cNvSpPr txBox="1"/>
+          <p:nvPr/>
+        </p:nvSpPr>
+        <p:spPr>
+          <a:xfrm>
+            <a:off x="700000" y="2800000"/>
+            <a:ext cx="500000" cy="500000"/>
+          </a:xfrm>
+          <a:prstGeom prst="rect">
+            <a:avLst/>
+          </a:prstGeom>
+          <a:noFill/>
+        </p:spPr>
+        <p:txBody>
+          <a:bodyPr wrap="square" anchor="ctr">
+            <a:spAutoFit/>
+          </a:bodyPr>
+          <a:lstStyle/>
+          <a:p>
+            <a:pPr algn="ctr"/>
+            <a:r>
+              <a:rPr sz="1300" b="1">
+                <a:solidFill>
+                  <a:srgbClr val="FFFFFF"/>
+                </a:solidFill>
+                <a:latin typeface="Open Sans"/>
+                <a:ea typeface="Open Sans"/>
+                <a:cs typeface="Open Sans"/>
+              </a:rPr>
+              <a:t>3</a:t>
+            </a:r>
+          </a:p>
+        </p:txBody>
+      </p:sp>
+      <p:sp>
+        <p:nvSpPr>
+          <p:cNvPr id="18" name="Rectangle 17"/>
+          <p:cNvSpPr/>
+          <p:nvPr/>
+        </p:nvSpPr>
+        <p:spPr>
+          <a:xfrm>
+            <a:off x="1400000" y="2800000"/>
+            <a:ext cx="10550000" cy="620000"/>
+          </a:xfrm>
+          <a:prstGeom prst="rect">
+            <a:avLst/>
+          </a:prstGeom>
+          <a:solidFill>
+            <a:srgbClr val="FFFFFF"/>
+          </a:solidFill>
+          <a:ln w="12700">
+            <a:solidFill>
+              <a:srgbClr val="999999"/>
+            </a:solidFill>
+          </a:ln>
+        </p:spPr>
+        <p:style>
+          <a:lnRef idx="1">
+            <a:schemeClr val="accent1"/>
+          </a:lnRef>
+          <a:fillRef idx="3">
+            <a:schemeClr val="accent1"/>
+          </a:fillRef>
+          <a:effectRef idx="2">
+            <a:schemeClr val="accent1"/>
+          </a:effectRef>
+          <a:fontRef idx="minor">
+            <a:schemeClr val="lt1"/>
+          </a:fontRef>
+        </p:style>
+        <p:txBody>
+          <a:bodyPr rtlCol="0" anchor="ctr"/>
+          <a:lstStyle/>
+          <a:p>
+            <a:pPr algn="ctr"/>
+          </a:p>
+        </p:txBody>
+      </p:sp>
+      <p:sp>
+        <p:nvSpPr>
+          <p:cNvPr id="19" name="TextBox 18"/>
+          <p:cNvSpPr txBox="1"/>
+          <p:nvPr/>
+        </p:nvSpPr>
+        <p:spPr>
+          <a:xfrm>
+            <a:off x="1600000" y="2800000"/>
+            <a:ext cx="10150000" cy="620000"/>
+          </a:xfrm>
+          <a:prstGeom prst="rect">
+            <a:avLst/>
+          </a:prstGeom>
+          <a:noFill/>
+        </p:spPr>
+        <p:txBody>
+          <a:bodyPr wrap="square" anchor="ctr">
+            <a:spAutoFit/>
+          </a:bodyPr>
+          <a:lstStyle/>
+          <a:p>
+            <a:pPr algn="l"/>
             <a:r>
               <a:rPr sz="1300" b="0">
                 <a:solidFill>
@@ -8055,15 +10074,159 @@
                 <a:ea typeface="Open Sans"/>
                 <a:cs typeface="Open Sans"/>
               </a:rPr>
-              <a:t>•  охлаждайте голову и тело</a:t>
-            </a:r>
-          </a:p>
-          <a:p>
-            <a:pPr algn="l">
-              <a:spcAft>
-                <a:spcPts val="800"/>
-              </a:spcAft>
-            </a:pPr>
+              <a:t>Не вызывайте рвоту и не пытайтесь нейтрализовать вещество.</a:t>
+            </a:r>
+          </a:p>
+        </p:txBody>
+      </p:sp>
+      <p:sp>
+        <p:nvSpPr>
+          <p:cNvPr id="20" name="Oval 19"/>
+          <p:cNvSpPr/>
+          <p:nvPr/>
+        </p:nvSpPr>
+        <p:spPr>
+          <a:xfrm>
+            <a:off x="700000" y="3500000"/>
+            <a:ext cx="500000" cy="500000"/>
+          </a:xfrm>
+          <a:prstGeom prst="ellipse">
+            <a:avLst/>
+          </a:prstGeom>
+          <a:solidFill>
+            <a:srgbClr val="555555"/>
+          </a:solidFill>
+          <a:ln>
+            <a:noFill/>
+          </a:ln>
+        </p:spPr>
+        <p:style>
+          <a:lnRef idx="1">
+            <a:schemeClr val="accent1"/>
+          </a:lnRef>
+          <a:fillRef idx="3">
+            <a:schemeClr val="accent1"/>
+          </a:fillRef>
+          <a:effectRef idx="2">
+            <a:schemeClr val="accent1"/>
+          </a:effectRef>
+          <a:fontRef idx="minor">
+            <a:schemeClr val="lt1"/>
+          </a:fontRef>
+        </p:style>
+        <p:txBody>
+          <a:bodyPr rtlCol="0" anchor="ctr"/>
+          <a:lstStyle/>
+          <a:p>
+            <a:pPr algn="ctr"/>
+          </a:p>
+        </p:txBody>
+      </p:sp>
+      <p:sp>
+        <p:nvSpPr>
+          <p:cNvPr id="21" name="TextBox 20"/>
+          <p:cNvSpPr txBox="1"/>
+          <p:nvPr/>
+        </p:nvSpPr>
+        <p:spPr>
+          <a:xfrm>
+            <a:off x="700000" y="3500000"/>
+            <a:ext cx="500000" cy="500000"/>
+          </a:xfrm>
+          <a:prstGeom prst="rect">
+            <a:avLst/>
+          </a:prstGeom>
+          <a:noFill/>
+        </p:spPr>
+        <p:txBody>
+          <a:bodyPr wrap="square" anchor="ctr">
+            <a:spAutoFit/>
+          </a:bodyPr>
+          <a:lstStyle/>
+          <a:p>
+            <a:pPr algn="ctr"/>
+            <a:r>
+              <a:rPr sz="1300" b="1">
+                <a:solidFill>
+                  <a:srgbClr val="FFFFFF"/>
+                </a:solidFill>
+                <a:latin typeface="Open Sans"/>
+                <a:ea typeface="Open Sans"/>
+                <a:cs typeface="Open Sans"/>
+              </a:rPr>
+              <a:t>4</a:t>
+            </a:r>
+          </a:p>
+        </p:txBody>
+      </p:sp>
+      <p:sp>
+        <p:nvSpPr>
+          <p:cNvPr id="22" name="Rectangle 21"/>
+          <p:cNvSpPr/>
+          <p:nvPr/>
+        </p:nvSpPr>
+        <p:spPr>
+          <a:xfrm>
+            <a:off x="1400000" y="3500000"/>
+            <a:ext cx="10550000" cy="620000"/>
+          </a:xfrm>
+          <a:prstGeom prst="rect">
+            <a:avLst/>
+          </a:prstGeom>
+          <a:solidFill>
+            <a:srgbClr val="FFFFFF"/>
+          </a:solidFill>
+          <a:ln w="12700">
+            <a:solidFill>
+              <a:srgbClr val="999999"/>
+            </a:solidFill>
+          </a:ln>
+        </p:spPr>
+        <p:style>
+          <a:lnRef idx="1">
+            <a:schemeClr val="accent1"/>
+          </a:lnRef>
+          <a:fillRef idx="3">
+            <a:schemeClr val="accent1"/>
+          </a:fillRef>
+          <a:effectRef idx="2">
+            <a:schemeClr val="accent1"/>
+          </a:effectRef>
+          <a:fontRef idx="minor">
+            <a:schemeClr val="lt1"/>
+          </a:fontRef>
+        </p:style>
+        <p:txBody>
+          <a:bodyPr rtlCol="0" anchor="ctr"/>
+          <a:lstStyle/>
+          <a:p>
+            <a:pPr algn="ctr"/>
+          </a:p>
+        </p:txBody>
+      </p:sp>
+      <p:sp>
+        <p:nvSpPr>
+          <p:cNvPr id="23" name="TextBox 22"/>
+          <p:cNvSpPr txBox="1"/>
+          <p:nvPr/>
+        </p:nvSpPr>
+        <p:spPr>
+          <a:xfrm>
+            <a:off x="1600000" y="3500000"/>
+            <a:ext cx="10150000" cy="620000"/>
+          </a:xfrm>
+          <a:prstGeom prst="rect">
+            <a:avLst/>
+          </a:prstGeom>
+          <a:noFill/>
+        </p:spPr>
+        <p:txBody>
+          <a:bodyPr wrap="square" anchor="ctr">
+            <a:spAutoFit/>
+          </a:bodyPr>
+          <a:lstStyle/>
+          <a:p>
+            <a:pPr algn="l"/>
             <a:r>
               <a:rPr sz="1300" b="0">
                 <a:solidFill>
@@ -8073,15 +10236,159 @@
                 <a:ea typeface="Open Sans"/>
                 <a:cs typeface="Open Sans"/>
               </a:rPr>
-              <a:t>•  при ясном сознании давайте пить</a:t>
-            </a:r>
-          </a:p>
-          <a:p>
-            <a:pPr algn="l">
-              <a:spcAft>
-                <a:spcPts val="800"/>
-              </a:spcAft>
-            </a:pPr>
+              <a:t>Не давайте пищу, лекарства или питье без указания диспетчера.</a:t>
+            </a:r>
+          </a:p>
+        </p:txBody>
+      </p:sp>
+      <p:sp>
+        <p:nvSpPr>
+          <p:cNvPr id="24" name="Oval 23"/>
+          <p:cNvSpPr/>
+          <p:nvPr/>
+        </p:nvSpPr>
+        <p:spPr>
+          <a:xfrm>
+            <a:off x="700000" y="4200000"/>
+            <a:ext cx="500000" cy="500000"/>
+          </a:xfrm>
+          <a:prstGeom prst="ellipse">
+            <a:avLst/>
+          </a:prstGeom>
+          <a:solidFill>
+            <a:srgbClr val="555555"/>
+          </a:solidFill>
+          <a:ln>
+            <a:noFill/>
+          </a:ln>
+        </p:spPr>
+        <p:style>
+          <a:lnRef idx="1">
+            <a:schemeClr val="accent1"/>
+          </a:lnRef>
+          <a:fillRef idx="3">
+            <a:schemeClr val="accent1"/>
+          </a:fillRef>
+          <a:effectRef idx="2">
+            <a:schemeClr val="accent1"/>
+          </a:effectRef>
+          <a:fontRef idx="minor">
+            <a:schemeClr val="lt1"/>
+          </a:fontRef>
+        </p:style>
+        <p:txBody>
+          <a:bodyPr rtlCol="0" anchor="ctr"/>
+          <a:lstStyle/>
+          <a:p>
+            <a:pPr algn="ctr"/>
+          </a:p>
+        </p:txBody>
+      </p:sp>
+      <p:sp>
+        <p:nvSpPr>
+          <p:cNvPr id="25" name="TextBox 24"/>
+          <p:cNvSpPr txBox="1"/>
+          <p:nvPr/>
+        </p:nvSpPr>
+        <p:spPr>
+          <a:xfrm>
+            <a:off x="700000" y="4200000"/>
+            <a:ext cx="500000" cy="500000"/>
+          </a:xfrm>
+          <a:prstGeom prst="rect">
+            <a:avLst/>
+          </a:prstGeom>
+          <a:noFill/>
+        </p:spPr>
+        <p:txBody>
+          <a:bodyPr wrap="square" anchor="ctr">
+            <a:spAutoFit/>
+          </a:bodyPr>
+          <a:lstStyle/>
+          <a:p>
+            <a:pPr algn="ctr"/>
+            <a:r>
+              <a:rPr sz="1300" b="1">
+                <a:solidFill>
+                  <a:srgbClr val="FFFFFF"/>
+                </a:solidFill>
+                <a:latin typeface="Open Sans"/>
+                <a:ea typeface="Open Sans"/>
+                <a:cs typeface="Open Sans"/>
+              </a:rPr>
+              <a:t>5</a:t>
+            </a:r>
+          </a:p>
+        </p:txBody>
+      </p:sp>
+      <p:sp>
+        <p:nvSpPr>
+          <p:cNvPr id="26" name="Rectangle 25"/>
+          <p:cNvSpPr/>
+          <p:nvPr/>
+        </p:nvSpPr>
+        <p:spPr>
+          <a:xfrm>
+            <a:off x="1400000" y="4200000"/>
+            <a:ext cx="10550000" cy="620000"/>
+          </a:xfrm>
+          <a:prstGeom prst="rect">
+            <a:avLst/>
+          </a:prstGeom>
+          <a:solidFill>
+            <a:srgbClr val="FFFFFF"/>
+          </a:solidFill>
+          <a:ln w="12700">
+            <a:solidFill>
+              <a:srgbClr val="999999"/>
+            </a:solidFill>
+          </a:ln>
+        </p:spPr>
+        <p:style>
+          <a:lnRef idx="1">
+            <a:schemeClr val="accent1"/>
+          </a:lnRef>
+          <a:fillRef idx="3">
+            <a:schemeClr val="accent1"/>
+          </a:fillRef>
+          <a:effectRef idx="2">
+            <a:schemeClr val="accent1"/>
+          </a:effectRef>
+          <a:fontRef idx="minor">
+            <a:schemeClr val="lt1"/>
+          </a:fontRef>
+        </p:style>
+        <p:txBody>
+          <a:bodyPr rtlCol="0" anchor="ctr"/>
+          <a:lstStyle/>
+          <a:p>
+            <a:pPr algn="ctr"/>
+          </a:p>
+        </p:txBody>
+      </p:sp>
+      <p:sp>
+        <p:nvSpPr>
+          <p:cNvPr id="27" name="TextBox 26"/>
+          <p:cNvSpPr txBox="1"/>
+          <p:nvPr/>
+        </p:nvSpPr>
+        <p:spPr>
+          <a:xfrm>
+            <a:off x="1600000" y="4200000"/>
+            <a:ext cx="10150000" cy="620000"/>
+          </a:xfrm>
+          <a:prstGeom prst="rect">
+            <a:avLst/>
+          </a:prstGeom>
+          <a:noFill/>
+        </p:spPr>
+        <p:txBody>
+          <a:bodyPr wrap="square" anchor="ctr">
+            <a:spAutoFit/>
+          </a:bodyPr>
+          <a:lstStyle/>
+          <a:p>
+            <a:pPr algn="l"/>
             <a:r>
               <a:rPr sz="1300" b="0">
                 <a:solidFill>
@@ -8091,7 +10398,169 @@
                 <a:ea typeface="Open Sans"/>
                 <a:cs typeface="Open Sans"/>
               </a:rPr>
-              <a:t>•  без сознания, но при дыхании — уложите на бок</a:t>
+              <a:t>Немедленно вызовите скорую помощь и сообщите название вещества.</a:t>
+            </a:r>
+          </a:p>
+        </p:txBody>
+      </p:sp>
+      <p:sp>
+        <p:nvSpPr>
+          <p:cNvPr id="28" name="Oval 27"/>
+          <p:cNvSpPr/>
+          <p:nvPr/>
+        </p:nvSpPr>
+        <p:spPr>
+          <a:xfrm>
+            <a:off x="700000" y="4900000"/>
+            <a:ext cx="500000" cy="500000"/>
+          </a:xfrm>
+          <a:prstGeom prst="ellipse">
+            <a:avLst/>
+          </a:prstGeom>
+          <a:solidFill>
+            <a:srgbClr val="555555"/>
+          </a:solidFill>
+          <a:ln>
+            <a:noFill/>
+          </a:ln>
+        </p:spPr>
+        <p:style>
+          <a:lnRef idx="1">
+            <a:schemeClr val="accent1"/>
+          </a:lnRef>
+          <a:fillRef idx="3">
+            <a:schemeClr val="accent1"/>
+          </a:fillRef>
+          <a:effectRef idx="2">
+            <a:schemeClr val="accent1"/>
+          </a:effectRef>
+          <a:fontRef idx="minor">
+            <a:schemeClr val="lt1"/>
+          </a:fontRef>
+        </p:style>
+        <p:txBody>
+          <a:bodyPr rtlCol="0" anchor="ctr"/>
+          <a:lstStyle/>
+          <a:p>
+            <a:pPr algn="ctr"/>
+          </a:p>
+        </p:txBody>
+      </p:sp>
+      <p:sp>
+        <p:nvSpPr>
+          <p:cNvPr id="29" name="TextBox 28"/>
+          <p:cNvSpPr txBox="1"/>
+          <p:nvPr/>
+        </p:nvSpPr>
+        <p:spPr>
+          <a:xfrm>
+            <a:off x="700000" y="4900000"/>
+            <a:ext cx="500000" cy="500000"/>
+          </a:xfrm>
+          <a:prstGeom prst="rect">
+            <a:avLst/>
+          </a:prstGeom>
+          <a:noFill/>
+        </p:spPr>
+        <p:txBody>
+          <a:bodyPr wrap="square" anchor="ctr">
+            <a:spAutoFit/>
+          </a:bodyPr>
+          <a:lstStyle/>
+          <a:p>
+            <a:pPr algn="ctr"/>
+            <a:r>
+              <a:rPr sz="1300" b="1">
+                <a:solidFill>
+                  <a:srgbClr val="FFFFFF"/>
+                </a:solidFill>
+                <a:latin typeface="Open Sans"/>
+                <a:ea typeface="Open Sans"/>
+                <a:cs typeface="Open Sans"/>
+              </a:rPr>
+              <a:t>6</a:t>
+            </a:r>
+          </a:p>
+        </p:txBody>
+      </p:sp>
+      <p:sp>
+        <p:nvSpPr>
+          <p:cNvPr id="30" name="Rectangle 29"/>
+          <p:cNvSpPr/>
+          <p:nvPr/>
+        </p:nvSpPr>
+        <p:spPr>
+          <a:xfrm>
+            <a:off x="1400000" y="4900000"/>
+            <a:ext cx="10550000" cy="620000"/>
+          </a:xfrm>
+          <a:prstGeom prst="rect">
+            <a:avLst/>
+          </a:prstGeom>
+          <a:solidFill>
+            <a:srgbClr val="FFFFFF"/>
+          </a:solidFill>
+          <a:ln w="12700">
+            <a:solidFill>
+              <a:srgbClr val="999999"/>
+            </a:solidFill>
+          </a:ln>
+        </p:spPr>
+        <p:style>
+          <a:lnRef idx="1">
+            <a:schemeClr val="accent1"/>
+          </a:lnRef>
+          <a:fillRef idx="3">
+            <a:schemeClr val="accent1"/>
+          </a:fillRef>
+          <a:effectRef idx="2">
+            <a:schemeClr val="accent1"/>
+          </a:effectRef>
+          <a:fontRef idx="minor">
+            <a:schemeClr val="lt1"/>
+          </a:fontRef>
+        </p:style>
+        <p:txBody>
+          <a:bodyPr rtlCol="0" anchor="ctr"/>
+          <a:lstStyle/>
+          <a:p>
+            <a:pPr algn="ctr"/>
+          </a:p>
+        </p:txBody>
+      </p:sp>
+      <p:sp>
+        <p:nvSpPr>
+          <p:cNvPr id="31" name="TextBox 30"/>
+          <p:cNvSpPr txBox="1"/>
+          <p:nvPr/>
+        </p:nvSpPr>
+        <p:spPr>
+          <a:xfrm>
+            <a:off x="1600000" y="4900000"/>
+            <a:ext cx="10150000" cy="620000"/>
+          </a:xfrm>
+          <a:prstGeom prst="rect">
+            <a:avLst/>
+          </a:prstGeom>
+          <a:noFill/>
+        </p:spPr>
+        <p:txBody>
+          <a:bodyPr wrap="square" anchor="ctr">
+            <a:spAutoFit/>
+          </a:bodyPr>
+          <a:lstStyle/>
+          <a:p>
+            <a:pPr algn="l"/>
+            <a:r>
+              <a:rPr sz="1300" b="0">
+                <a:solidFill>
+                  <a:srgbClr val="333333"/>
+                </a:solidFill>
+                <a:latin typeface="Open Sans"/>
+                <a:ea typeface="Open Sans"/>
+                <a:cs typeface="Open Sans"/>
+              </a:rPr>
+              <a:t>Контролируйте сознание и дыхание; сохраните упаковку.</a:t>
             </a:r>
           </a:p>
         </p:txBody>
@@ -8189,7 +10658,7 @@
                 <a:ea typeface="Open Sans"/>
                 <a:cs typeface="Open Sans"/>
               </a:rPr>
-              <a:t>ГЛАВНОЕ ЗАПОМНИТЬ</a:t>
+              <a:t>ЭЛЕКТРОТРАВМА: БЫТОВАЯ СЕТЬ И ВЫСОКОЕ НАПРЯЖЕНИЕ</a:t>
             </a:r>
           </a:p>
         </p:txBody>
@@ -8356,89 +10825,75 @@
       </p:sp>
       <p:sp>
         <p:nvSpPr>
-          <p:cNvPr id="8" name="Rectangle 7"/>
-          <p:cNvSpPr/>
-          <p:nvPr/>
-        </p:nvSpPr>
-        <p:spPr>
-          <a:xfrm>
-            <a:off x="700000" y="1450000"/>
-            <a:ext cx="11000000" cy="850000"/>
-          </a:xfrm>
-          <a:prstGeom prst="rect">
-            <a:avLst/>
-          </a:prstGeom>
-          <a:solidFill>
-            <a:srgbClr val="FFFFFF"/>
-          </a:solidFill>
-          <a:ln w="12700">
-            <a:solidFill>
-              <a:srgbClr val="999999"/>
-            </a:solidFill>
-          </a:ln>
-        </p:spPr>
-        <p:style>
-          <a:lnRef idx="1">
-            <a:schemeClr val="accent1"/>
-          </a:lnRef>
-          <a:fillRef idx="3">
-            <a:schemeClr val="accent1"/>
-          </a:fillRef>
-          <a:effectRef idx="2">
-            <a:schemeClr val="accent1"/>
-          </a:effectRef>
-          <a:fontRef idx="minor">
-            <a:schemeClr val="lt1"/>
-          </a:fontRef>
-        </p:style>
-        <p:txBody>
-          <a:bodyPr rtlCol="0" anchor="ctr"/>
-          <a:lstStyle/>
-          <a:p>
-            <a:pPr algn="ctr"/>
-          </a:p>
-        </p:txBody>
-      </p:sp>
-      <p:sp>
-        <p:nvSpPr>
-          <p:cNvPr id="9" name="Rectangle 8"/>
-          <p:cNvSpPr/>
-          <p:nvPr/>
-        </p:nvSpPr>
-        <p:spPr>
-          <a:xfrm>
-            <a:off x="700000" y="1450000"/>
-            <a:ext cx="90000" cy="850000"/>
-          </a:xfrm>
-          <a:prstGeom prst="rect">
-            <a:avLst/>
-          </a:prstGeom>
-          <a:solidFill>
-            <a:srgbClr val="CC0000"/>
-          </a:solidFill>
-          <a:ln>
-            <a:noFill/>
-          </a:ln>
-        </p:spPr>
-        <p:style>
-          <a:lnRef idx="1">
-            <a:schemeClr val="accent1"/>
-          </a:lnRef>
-          <a:fillRef idx="3">
-            <a:schemeClr val="accent1"/>
-          </a:fillRef>
-          <a:effectRef idx="2">
-            <a:schemeClr val="accent1"/>
-          </a:effectRef>
-          <a:fontRef idx="minor">
-            <a:schemeClr val="lt1"/>
-          </a:fontRef>
-        </p:style>
-        <p:txBody>
-          <a:bodyPr rtlCol="0" anchor="ctr"/>
-          <a:lstStyle/>
-          <a:p>
-            <a:pPr algn="ctr"/>
+          <p:cNvPr id="8" name="TextBox 7"/>
+          <p:cNvSpPr txBox="1"/>
+          <p:nvPr/>
+        </p:nvSpPr>
+        <p:spPr>
+          <a:xfrm>
+            <a:off x="700000" y="1400000"/>
+            <a:ext cx="5400000" cy="400000"/>
+          </a:xfrm>
+          <a:prstGeom prst="rect">
+            <a:avLst/>
+          </a:prstGeom>
+          <a:noFill/>
+        </p:spPr>
+        <p:txBody>
+          <a:bodyPr wrap="square" anchor="t">
+            <a:spAutoFit/>
+          </a:bodyPr>
+          <a:lstStyle/>
+          <a:p>
+            <a:pPr algn="l"/>
+            <a:r>
+              <a:rPr sz="1400" b="1">
+                <a:solidFill>
+                  <a:srgbClr val="333333"/>
+                </a:solidFill>
+                <a:latin typeface="Open Sans"/>
+                <a:ea typeface="Open Sans"/>
+                <a:cs typeface="Open Sans"/>
+              </a:rPr>
+              <a:t>Бытовая сеть</a:t>
+            </a:r>
+          </a:p>
+        </p:txBody>
+      </p:sp>
+      <p:sp>
+        <p:nvSpPr>
+          <p:cNvPr id="9" name="TextBox 8"/>
+          <p:cNvSpPr txBox="1"/>
+          <p:nvPr/>
+        </p:nvSpPr>
+        <p:spPr>
+          <a:xfrm>
+            <a:off x="6600000" y="1400000"/>
+            <a:ext cx="5400000" cy="400000"/>
+          </a:xfrm>
+          <a:prstGeom prst="rect">
+            <a:avLst/>
+          </a:prstGeom>
+          <a:noFill/>
+        </p:spPr>
+        <p:txBody>
+          <a:bodyPr wrap="square" anchor="t">
+            <a:spAutoFit/>
+          </a:bodyPr>
+          <a:lstStyle/>
+          <a:p>
+            <a:pPr algn="l"/>
+            <a:r>
+              <a:rPr sz="1400" b="1">
+                <a:solidFill>
+                  <a:srgbClr val="333333"/>
+                </a:solidFill>
+                <a:latin typeface="Open Sans"/>
+                <a:ea typeface="Open Sans"/>
+                <a:cs typeface="Open Sans"/>
+              </a:rPr>
+              <a:t>Высокое напряжение</a:t>
+            </a:r>
           </a:p>
         </p:txBody>
       </p:sp>
@@ -8450,8 +10905,8 @@
         </p:nvSpPr>
         <p:spPr>
           <a:xfrm>
-            <a:off x="1000000" y="1550000"/>
-            <a:ext cx="10400000" cy="650000"/>
+            <a:off x="700000" y="1850000"/>
+            <a:ext cx="5400000" cy="4000000"/>
           </a:xfrm>
           <a:prstGeom prst="rect">
             <a:avLst/>
@@ -8459,12 +10914,16 @@
           <a:noFill/>
         </p:spPr>
         <p:txBody>
-          <a:bodyPr wrap="square" anchor="ctr">
+          <a:bodyPr wrap="square">
             <a:spAutoFit/>
           </a:bodyPr>
           <a:lstStyle/>
           <a:p>
-            <a:pPr algn="l"/>
+            <a:pPr algn="l">
+              <a:spcAft>
+                <a:spcPts val="800"/>
+              </a:spcAft>
+            </a:pPr>
             <a:r>
               <a:rPr sz="1300" b="0">
                 <a:solidFill>
@@ -8474,109 +10933,75 @@
                 <a:ea typeface="Open Sans"/>
                 <a:cs typeface="Open Sans"/>
               </a:rPr>
-              <a:t>Сначала защитите себя</a:t>
-            </a:r>
-          </a:p>
-        </p:txBody>
-      </p:sp>
-      <p:sp>
-        <p:nvSpPr>
-          <p:cNvPr id="11" name="Rectangle 10"/>
-          <p:cNvSpPr/>
-          <p:nvPr/>
-        </p:nvSpPr>
-        <p:spPr>
-          <a:xfrm>
-            <a:off x="700000" y="2400000"/>
-            <a:ext cx="11000000" cy="850000"/>
-          </a:xfrm>
-          <a:prstGeom prst="rect">
-            <a:avLst/>
-          </a:prstGeom>
-          <a:solidFill>
-            <a:srgbClr val="FFFFFF"/>
-          </a:solidFill>
-          <a:ln w="12700">
-            <a:solidFill>
-              <a:srgbClr val="999999"/>
-            </a:solidFill>
-          </a:ln>
-        </p:spPr>
-        <p:style>
-          <a:lnRef idx="1">
-            <a:schemeClr val="accent1"/>
-          </a:lnRef>
-          <a:fillRef idx="3">
-            <a:schemeClr val="accent1"/>
-          </a:fillRef>
-          <a:effectRef idx="2">
-            <a:schemeClr val="accent1"/>
-          </a:effectRef>
-          <a:fontRef idx="minor">
-            <a:schemeClr val="lt1"/>
-          </a:fontRef>
-        </p:style>
-        <p:txBody>
-          <a:bodyPr rtlCol="0" anchor="ctr"/>
-          <a:lstStyle/>
-          <a:p>
-            <a:pPr algn="ctr"/>
-          </a:p>
-        </p:txBody>
-      </p:sp>
-      <p:sp>
-        <p:nvSpPr>
-          <p:cNvPr id="12" name="Rectangle 11"/>
-          <p:cNvSpPr/>
-          <p:nvPr/>
-        </p:nvSpPr>
-        <p:spPr>
-          <a:xfrm>
-            <a:off x="700000" y="2400000"/>
-            <a:ext cx="90000" cy="850000"/>
-          </a:xfrm>
-          <a:prstGeom prst="rect">
-            <a:avLst/>
-          </a:prstGeom>
-          <a:solidFill>
-            <a:srgbClr val="CC0000"/>
-          </a:solidFill>
-          <a:ln>
-            <a:noFill/>
-          </a:ln>
-        </p:spPr>
-        <p:style>
-          <a:lnRef idx="1">
-            <a:schemeClr val="accent1"/>
-          </a:lnRef>
-          <a:fillRef idx="3">
-            <a:schemeClr val="accent1"/>
-          </a:fillRef>
-          <a:effectRef idx="2">
-            <a:schemeClr val="accent1"/>
-          </a:effectRef>
-          <a:fontRef idx="minor">
-            <a:schemeClr val="lt1"/>
-          </a:fontRef>
-        </p:style>
-        <p:txBody>
-          <a:bodyPr rtlCol="0" anchor="ctr"/>
-          <a:lstStyle/>
-          <a:p>
-            <a:pPr algn="ctr"/>
-          </a:p>
-        </p:txBody>
-      </p:sp>
-      <p:sp>
-        <p:nvSpPr>
-          <p:cNvPr id="13" name="TextBox 12"/>
+              <a:t>•  не касайтесь человека, пока ток надежно не отключен</a:t>
+            </a:r>
+          </a:p>
+          <a:p>
+            <a:pPr algn="l">
+              <a:spcAft>
+                <a:spcPts val="800"/>
+              </a:spcAft>
+            </a:pPr>
+            <a:r>
+              <a:rPr sz="1300" b="0">
+                <a:solidFill>
+                  <a:srgbClr val="333333"/>
+                </a:solidFill>
+                <a:latin typeface="Open Sans"/>
+                <a:ea typeface="Open Sans"/>
+                <a:cs typeface="Open Sans"/>
+              </a:rPr>
+              <a:t>•  выключите автомат, рубильник или выньте вилку, если это безопасно</a:t>
+            </a:r>
+          </a:p>
+          <a:p>
+            <a:pPr algn="l">
+              <a:spcAft>
+                <a:spcPts val="800"/>
+              </a:spcAft>
+            </a:pPr>
+            <a:r>
+              <a:rPr sz="1300" b="0">
+                <a:solidFill>
+                  <a:srgbClr val="333333"/>
+                </a:solidFill>
+                <a:latin typeface="Open Sans"/>
+                <a:ea typeface="Open Sans"/>
+                <a:cs typeface="Open Sans"/>
+              </a:rPr>
+              <a:t>•  не используйте влажные предметы и не стойте на мокрой поверхности</a:t>
+            </a:r>
+          </a:p>
+          <a:p>
+            <a:pPr algn="l">
+              <a:spcAft>
+                <a:spcPts val="800"/>
+              </a:spcAft>
+            </a:pPr>
+            <a:r>
+              <a:rPr sz="1300" b="0">
+                <a:solidFill>
+                  <a:srgbClr val="333333"/>
+                </a:solidFill>
+                <a:latin typeface="Open Sans"/>
+                <a:ea typeface="Open Sans"/>
+                <a:cs typeface="Open Sans"/>
+              </a:rPr>
+              <a:t>•  после отключения сразу оцените сознание и дыхание</a:t>
+            </a:r>
+          </a:p>
+        </p:txBody>
+      </p:sp>
+      <p:sp>
+        <p:nvSpPr>
+          <p:cNvPr id="11" name="TextBox 10"/>
           <p:cNvSpPr txBox="1"/>
           <p:nvPr/>
         </p:nvSpPr>
         <p:spPr>
           <a:xfrm>
-            <a:off x="1000000" y="2500000"/>
-            <a:ext cx="10400000" cy="650000"/>
+            <a:off x="6600000" y="1850000"/>
+            <a:ext cx="5400000" cy="4000000"/>
           </a:xfrm>
           <a:prstGeom prst="rect">
             <a:avLst/>
@@ -8584,12 +11009,16 @@
           <a:noFill/>
         </p:spPr>
         <p:txBody>
-          <a:bodyPr wrap="square" anchor="ctr">
+          <a:bodyPr wrap="square">
             <a:spAutoFit/>
           </a:bodyPr>
           <a:lstStyle/>
           <a:p>
-            <a:pPr algn="l"/>
+            <a:pPr algn="l">
+              <a:spcAft>
+                <a:spcPts val="800"/>
+              </a:spcAft>
+            </a:pPr>
             <a:r>
               <a:rPr sz="1300" b="0">
                 <a:solidFill>
@@ -8599,122 +11028,15 @@
                 <a:ea typeface="Open Sans"/>
                 <a:cs typeface="Open Sans"/>
               </a:rPr>
-              <a:t>Химикат смывайте не менее 20 минут</a:t>
-            </a:r>
-          </a:p>
-        </p:txBody>
-      </p:sp>
-      <p:sp>
-        <p:nvSpPr>
-          <p:cNvPr id="14" name="Rectangle 13"/>
-          <p:cNvSpPr/>
-          <p:nvPr/>
-        </p:nvSpPr>
-        <p:spPr>
-          <a:xfrm>
-            <a:off x="700000" y="3350000"/>
-            <a:ext cx="11000000" cy="850000"/>
-          </a:xfrm>
-          <a:prstGeom prst="rect">
-            <a:avLst/>
-          </a:prstGeom>
-          <a:solidFill>
-            <a:srgbClr val="FFFFFF"/>
-          </a:solidFill>
-          <a:ln w="12700">
-            <a:solidFill>
-              <a:srgbClr val="999999"/>
-            </a:solidFill>
-          </a:ln>
-        </p:spPr>
-        <p:style>
-          <a:lnRef idx="1">
-            <a:schemeClr val="accent1"/>
-          </a:lnRef>
-          <a:fillRef idx="3">
-            <a:schemeClr val="accent1"/>
-          </a:fillRef>
-          <a:effectRef idx="2">
-            <a:schemeClr val="accent1"/>
-          </a:effectRef>
-          <a:fontRef idx="minor">
-            <a:schemeClr val="lt1"/>
-          </a:fontRef>
-        </p:style>
-        <p:txBody>
-          <a:bodyPr rtlCol="0" anchor="ctr"/>
-          <a:lstStyle/>
-          <a:p>
-            <a:pPr algn="ctr"/>
-          </a:p>
-        </p:txBody>
-      </p:sp>
-      <p:sp>
-        <p:nvSpPr>
-          <p:cNvPr id="15" name="Rectangle 14"/>
-          <p:cNvSpPr/>
-          <p:nvPr/>
-        </p:nvSpPr>
-        <p:spPr>
-          <a:xfrm>
-            <a:off x="700000" y="3350000"/>
-            <a:ext cx="90000" cy="850000"/>
-          </a:xfrm>
-          <a:prstGeom prst="rect">
-            <a:avLst/>
-          </a:prstGeom>
-          <a:solidFill>
-            <a:srgbClr val="CC0000"/>
-          </a:solidFill>
-          <a:ln>
-            <a:noFill/>
-          </a:ln>
-        </p:spPr>
-        <p:style>
-          <a:lnRef idx="1">
-            <a:schemeClr val="accent1"/>
-          </a:lnRef>
-          <a:fillRef idx="3">
-            <a:schemeClr val="accent1"/>
-          </a:fillRef>
-          <a:effectRef idx="2">
-            <a:schemeClr val="accent1"/>
-          </a:effectRef>
-          <a:fontRef idx="minor">
-            <a:schemeClr val="lt1"/>
-          </a:fontRef>
-        </p:style>
-        <p:txBody>
-          <a:bodyPr rtlCol="0" anchor="ctr"/>
-          <a:lstStyle/>
-          <a:p>
-            <a:pPr algn="ctr"/>
-          </a:p>
-        </p:txBody>
-      </p:sp>
-      <p:sp>
-        <p:nvSpPr>
-          <p:cNvPr id="16" name="TextBox 15"/>
-          <p:cNvSpPr txBox="1"/>
-          <p:nvPr/>
-        </p:nvSpPr>
-        <p:spPr>
-          <a:xfrm>
-            <a:off x="1000000" y="3450000"/>
-            <a:ext cx="10400000" cy="650000"/>
-          </a:xfrm>
-          <a:prstGeom prst="rect">
-            <a:avLst/>
-          </a:prstGeom>
-          <a:noFill/>
-        </p:spPr>
-        <p:txBody>
-          <a:bodyPr wrap="square" anchor="ctr">
-            <a:spAutoFit/>
-          </a:bodyPr>
-          <a:lstStyle/>
-          <a:p>
-            <a:pPr algn="l"/>
+              <a:t>•  не приближайтесь к оборванному проводу и пострадавшему</a:t>
+            </a:r>
+          </a:p>
+          <a:p>
+            <a:pPr algn="l">
+              <a:spcAft>
+                <a:spcPts val="800"/>
+              </a:spcAft>
+            </a:pPr>
             <a:r>
               <a:rPr sz="1300" b="0">
                 <a:solidFill>
@@ -8724,122 +11046,15 @@
                 <a:ea typeface="Open Sans"/>
                 <a:cs typeface="Open Sans"/>
               </a:rPr>
-              <a:t>При высоком напряжении ждите специалистов</a:t>
-            </a:r>
-          </a:p>
-        </p:txBody>
-      </p:sp>
-      <p:sp>
-        <p:nvSpPr>
-          <p:cNvPr id="17" name="Rectangle 16"/>
-          <p:cNvSpPr/>
-          <p:nvPr/>
-        </p:nvSpPr>
-        <p:spPr>
-          <a:xfrm>
-            <a:off x="700000" y="4300000"/>
-            <a:ext cx="11000000" cy="850000"/>
-          </a:xfrm>
-          <a:prstGeom prst="rect">
-            <a:avLst/>
-          </a:prstGeom>
-          <a:solidFill>
-            <a:srgbClr val="FFFFFF"/>
-          </a:solidFill>
-          <a:ln w="12700">
-            <a:solidFill>
-              <a:srgbClr val="999999"/>
-            </a:solidFill>
-          </a:ln>
-        </p:spPr>
-        <p:style>
-          <a:lnRef idx="1">
-            <a:schemeClr val="accent1"/>
-          </a:lnRef>
-          <a:fillRef idx="3">
-            <a:schemeClr val="accent1"/>
-          </a:fillRef>
-          <a:effectRef idx="2">
-            <a:schemeClr val="accent1"/>
-          </a:effectRef>
-          <a:fontRef idx="minor">
-            <a:schemeClr val="lt1"/>
-          </a:fontRef>
-        </p:style>
-        <p:txBody>
-          <a:bodyPr rtlCol="0" anchor="ctr"/>
-          <a:lstStyle/>
-          <a:p>
-            <a:pPr algn="ctr"/>
-          </a:p>
-        </p:txBody>
-      </p:sp>
-      <p:sp>
-        <p:nvSpPr>
-          <p:cNvPr id="18" name="Rectangle 17"/>
-          <p:cNvSpPr/>
-          <p:nvPr/>
-        </p:nvSpPr>
-        <p:spPr>
-          <a:xfrm>
-            <a:off x="700000" y="4300000"/>
-            <a:ext cx="90000" cy="850000"/>
-          </a:xfrm>
-          <a:prstGeom prst="rect">
-            <a:avLst/>
-          </a:prstGeom>
-          <a:solidFill>
-            <a:srgbClr val="CC0000"/>
-          </a:solidFill>
-          <a:ln>
-            <a:noFill/>
-          </a:ln>
-        </p:spPr>
-        <p:style>
-          <a:lnRef idx="1">
-            <a:schemeClr val="accent1"/>
-          </a:lnRef>
-          <a:fillRef idx="3">
-            <a:schemeClr val="accent1"/>
-          </a:fillRef>
-          <a:effectRef idx="2">
-            <a:schemeClr val="accent1"/>
-          </a:effectRef>
-          <a:fontRef idx="minor">
-            <a:schemeClr val="lt1"/>
-          </a:fontRef>
-        </p:style>
-        <p:txBody>
-          <a:bodyPr rtlCol="0" anchor="ctr"/>
-          <a:lstStyle/>
-          <a:p>
-            <a:pPr algn="ctr"/>
-          </a:p>
-        </p:txBody>
-      </p:sp>
-      <p:sp>
-        <p:nvSpPr>
-          <p:cNvPr id="19" name="TextBox 18"/>
-          <p:cNvSpPr txBox="1"/>
-          <p:nvPr/>
-        </p:nvSpPr>
-        <p:spPr>
-          <a:xfrm>
-            <a:off x="1000000" y="4400000"/>
-            <a:ext cx="10400000" cy="650000"/>
-          </a:xfrm>
-          <a:prstGeom prst="rect">
-            <a:avLst/>
-          </a:prstGeom>
-          <a:noFill/>
-        </p:spPr>
-        <p:txBody>
-          <a:bodyPr wrap="square" anchor="ctr">
-            <a:spAutoFit/>
-          </a:bodyPr>
-          <a:lstStyle/>
-          <a:p>
-            <a:pPr algn="l"/>
+              <a:t>•  учитывайте электрическую дугу и шаговое напряжение</a:t>
+            </a:r>
+          </a:p>
+          <a:p>
+            <a:pPr algn="l">
+              <a:spcAft>
+                <a:spcPts val="800"/>
+              </a:spcAft>
+            </a:pPr>
             <a:r>
               <a:rPr sz="1300" b="0">
                 <a:solidFill>
@@ -8849,122 +11064,15 @@
                 <a:ea typeface="Open Sans"/>
                 <a:cs typeface="Open Sans"/>
               </a:rPr>
-              <a:t>После тока проверьте дыхание</a:t>
-            </a:r>
-          </a:p>
-        </p:txBody>
-      </p:sp>
-      <p:sp>
-        <p:nvSpPr>
-          <p:cNvPr id="20" name="Rectangle 19"/>
-          <p:cNvSpPr/>
-          <p:nvPr/>
-        </p:nvSpPr>
-        <p:spPr>
-          <a:xfrm>
-            <a:off x="700000" y="5250000"/>
-            <a:ext cx="11000000" cy="850000"/>
-          </a:xfrm>
-          <a:prstGeom prst="rect">
-            <a:avLst/>
-          </a:prstGeom>
-          <a:solidFill>
-            <a:srgbClr val="FFFFFF"/>
-          </a:solidFill>
-          <a:ln w="12700">
-            <a:solidFill>
-              <a:srgbClr val="999999"/>
-            </a:solidFill>
-          </a:ln>
-        </p:spPr>
-        <p:style>
-          <a:lnRef idx="1">
-            <a:schemeClr val="accent1"/>
-          </a:lnRef>
-          <a:fillRef idx="3">
-            <a:schemeClr val="accent1"/>
-          </a:fillRef>
-          <a:effectRef idx="2">
-            <a:schemeClr val="accent1"/>
-          </a:effectRef>
-          <a:fontRef idx="minor">
-            <a:schemeClr val="lt1"/>
-          </a:fontRef>
-        </p:style>
-        <p:txBody>
-          <a:bodyPr rtlCol="0" anchor="ctr"/>
-          <a:lstStyle/>
-          <a:p>
-            <a:pPr algn="ctr"/>
-          </a:p>
-        </p:txBody>
-      </p:sp>
-      <p:sp>
-        <p:nvSpPr>
-          <p:cNvPr id="21" name="Rectangle 20"/>
-          <p:cNvSpPr/>
-          <p:nvPr/>
-        </p:nvSpPr>
-        <p:spPr>
-          <a:xfrm>
-            <a:off x="700000" y="5250000"/>
-            <a:ext cx="90000" cy="850000"/>
-          </a:xfrm>
-          <a:prstGeom prst="rect">
-            <a:avLst/>
-          </a:prstGeom>
-          <a:solidFill>
-            <a:srgbClr val="CC0000"/>
-          </a:solidFill>
-          <a:ln>
-            <a:noFill/>
-          </a:ln>
-        </p:spPr>
-        <p:style>
-          <a:lnRef idx="1">
-            <a:schemeClr val="accent1"/>
-          </a:lnRef>
-          <a:fillRef idx="3">
-            <a:schemeClr val="accent1"/>
-          </a:fillRef>
-          <a:effectRef idx="2">
-            <a:schemeClr val="accent1"/>
-          </a:effectRef>
-          <a:fontRef idx="minor">
-            <a:schemeClr val="lt1"/>
-          </a:fontRef>
-        </p:style>
-        <p:txBody>
-          <a:bodyPr rtlCol="0" anchor="ctr"/>
-          <a:lstStyle/>
-          <a:p>
-            <a:pPr algn="ctr"/>
-          </a:p>
-        </p:txBody>
-      </p:sp>
-      <p:sp>
-        <p:nvSpPr>
-          <p:cNvPr id="22" name="TextBox 21"/>
-          <p:cNvSpPr txBox="1"/>
-          <p:nvPr/>
-        </p:nvSpPr>
-        <p:spPr>
-          <a:xfrm>
-            <a:off x="1000000" y="5350000"/>
-            <a:ext cx="10400000" cy="650000"/>
-          </a:xfrm>
-          <a:prstGeom prst="rect">
-            <a:avLst/>
-          </a:prstGeom>
-          <a:noFill/>
-        </p:spPr>
-        <p:txBody>
-          <a:bodyPr wrap="square" anchor="ctr">
-            <a:spAutoFit/>
-          </a:bodyPr>
-          <a:lstStyle/>
-          <a:p>
-            <a:pPr algn="l"/>
+              <a:t>•  не пытайтесь отбрасывать провод или самостоятельно отключать линию</a:t>
+            </a:r>
+          </a:p>
+          <a:p>
+            <a:pPr algn="l">
+              <a:spcAft>
+                <a:spcPts val="800"/>
+              </a:spcAft>
+            </a:pPr>
             <a:r>
               <a:rPr sz="1300" b="0">
                 <a:solidFill>
@@ -8974,7 +11082,7 @@
                 <a:ea typeface="Open Sans"/>
                 <a:cs typeface="Open Sans"/>
               </a:rPr>
-              <a:t>При солнечном ударе перенесите в тень</a:t>
+              <a:t>•  вызовите экстренные и аварийные службы и ждите разрешения специалистов</a:t>
             </a:r>
           </a:p>
         </p:txBody>
@@ -9072,7 +11180,7 @@
                 <a:ea typeface="Open Sans"/>
                 <a:cs typeface="Open Sans"/>
               </a:rPr>
-              <a:t>ПАМЯТКА</a:t>
+              <a:t>ПОСЛЕ ПРЕКРАЩЕНИЯ ДЕЙСТВИЯ ТОКА</a:t>
             </a:r>
           </a:p>
         </p:txBody>
@@ -9237,30 +11345,802 @@
           </a:p>
         </p:txBody>
       </p:sp>
-      <p:pic>
-        <p:nvPicPr>
-          <p:cNvPr id="8" name="Picture 7" descr="pamyatka-tema4-khim-elektro-izluchenie-16x9.png"/>
-          <p:cNvPicPr>
-            <a:picLocks noChangeAspect="1"/>
-          </p:cNvPicPr>
-          <p:nvPr/>
-        </p:nvPicPr>
-        <p:blipFill>
-          <a:blip r:embed="rId2"/>
-          <a:stretch>
-            <a:fillRect/>
-          </a:stretch>
-        </p:blipFill>
-        <p:spPr>
-          <a:xfrm>
-            <a:off x="2300000" y="1400000"/>
-            <a:ext cx="7800000" cy="5200000"/>
-          </a:xfrm>
-          <a:prstGeom prst="rect">
-            <a:avLst/>
-          </a:prstGeom>
-        </p:spPr>
-      </p:pic>
+      <p:sp>
+        <p:nvSpPr>
+          <p:cNvPr id="8" name="Rectangle 7"/>
+          <p:cNvSpPr/>
+          <p:nvPr/>
+        </p:nvSpPr>
+        <p:spPr>
+          <a:xfrm>
+            <a:off x="700000" y="1400000"/>
+            <a:ext cx="5400000" cy="2420000"/>
+          </a:xfrm>
+          <a:prstGeom prst="rect">
+            <a:avLst/>
+          </a:prstGeom>
+          <a:solidFill>
+            <a:srgbClr val="FFFFFF"/>
+          </a:solidFill>
+          <a:ln w="12700">
+            <a:solidFill>
+              <a:srgbClr val="999999"/>
+            </a:solidFill>
+          </a:ln>
+        </p:spPr>
+        <p:style>
+          <a:lnRef idx="1">
+            <a:schemeClr val="accent1"/>
+          </a:lnRef>
+          <a:fillRef idx="3">
+            <a:schemeClr val="accent1"/>
+          </a:fillRef>
+          <a:effectRef idx="2">
+            <a:schemeClr val="accent1"/>
+          </a:effectRef>
+          <a:fontRef idx="minor">
+            <a:schemeClr val="lt1"/>
+          </a:fontRef>
+        </p:style>
+        <p:txBody>
+          <a:bodyPr rtlCol="0" anchor="ctr"/>
+          <a:lstStyle/>
+          <a:p>
+            <a:pPr algn="ctr"/>
+          </a:p>
+        </p:txBody>
+      </p:sp>
+      <p:sp>
+        <p:nvSpPr>
+          <p:cNvPr id="9" name="Oval 8"/>
+          <p:cNvSpPr/>
+          <p:nvPr/>
+        </p:nvSpPr>
+        <p:spPr>
+          <a:xfrm>
+            <a:off x="820000" y="1550000"/>
+            <a:ext cx="450000" cy="450000"/>
+          </a:xfrm>
+          <a:prstGeom prst="ellipse">
+            <a:avLst/>
+          </a:prstGeom>
+          <a:solidFill>
+            <a:srgbClr val="555555"/>
+          </a:solidFill>
+          <a:ln>
+            <a:noFill/>
+          </a:ln>
+        </p:spPr>
+        <p:style>
+          <a:lnRef idx="1">
+            <a:schemeClr val="accent1"/>
+          </a:lnRef>
+          <a:fillRef idx="3">
+            <a:schemeClr val="accent1"/>
+          </a:fillRef>
+          <a:effectRef idx="2">
+            <a:schemeClr val="accent1"/>
+          </a:effectRef>
+          <a:fontRef idx="minor">
+            <a:schemeClr val="lt1"/>
+          </a:fontRef>
+        </p:style>
+        <p:txBody>
+          <a:bodyPr rtlCol="0" anchor="ctr"/>
+          <a:lstStyle/>
+          <a:p>
+            <a:pPr algn="ctr"/>
+          </a:p>
+        </p:txBody>
+      </p:sp>
+      <p:sp>
+        <p:nvSpPr>
+          <p:cNvPr id="10" name="TextBox 9"/>
+          <p:cNvSpPr txBox="1"/>
+          <p:nvPr/>
+        </p:nvSpPr>
+        <p:spPr>
+          <a:xfrm>
+            <a:off x="820000" y="1550000"/>
+            <a:ext cx="450000" cy="450000"/>
+          </a:xfrm>
+          <a:prstGeom prst="rect">
+            <a:avLst/>
+          </a:prstGeom>
+          <a:noFill/>
+        </p:spPr>
+        <p:txBody>
+          <a:bodyPr wrap="square" anchor="ctr">
+            <a:spAutoFit/>
+          </a:bodyPr>
+          <a:lstStyle/>
+          <a:p>
+            <a:pPr algn="ctr"/>
+            <a:r>
+              <a:rPr sz="1300" b="1">
+                <a:solidFill>
+                  <a:srgbClr val="FFFFFF"/>
+                </a:solidFill>
+                <a:latin typeface="Open Sans"/>
+                <a:ea typeface="Open Sans"/>
+                <a:cs typeface="Open Sans"/>
+              </a:rPr>
+              <a:t>1</a:t>
+            </a:r>
+          </a:p>
+        </p:txBody>
+      </p:sp>
+      <p:sp>
+        <p:nvSpPr>
+          <p:cNvPr id="11" name="TextBox 10"/>
+          <p:cNvSpPr txBox="1"/>
+          <p:nvPr/>
+        </p:nvSpPr>
+        <p:spPr>
+          <a:xfrm>
+            <a:off x="1350000" y="1580000"/>
+            <a:ext cx="4600000" cy="400000"/>
+          </a:xfrm>
+          <a:prstGeom prst="rect">
+            <a:avLst/>
+          </a:prstGeom>
+          <a:noFill/>
+        </p:spPr>
+        <p:txBody>
+          <a:bodyPr wrap="square" anchor="t">
+            <a:spAutoFit/>
+          </a:bodyPr>
+          <a:lstStyle/>
+          <a:p>
+            <a:pPr algn="l"/>
+            <a:r>
+              <a:rPr sz="1200" b="1">
+                <a:solidFill>
+                  <a:srgbClr val="333333"/>
+                </a:solidFill>
+                <a:latin typeface="Open Sans"/>
+                <a:ea typeface="Open Sans"/>
+                <a:cs typeface="Open Sans"/>
+              </a:rPr>
+              <a:t>Дыхание и сердце</a:t>
+            </a:r>
+          </a:p>
+        </p:txBody>
+      </p:sp>
+      <p:sp>
+        <p:nvSpPr>
+          <p:cNvPr id="12" name="TextBox 11"/>
+          <p:cNvSpPr txBox="1"/>
+          <p:nvPr/>
+        </p:nvSpPr>
+        <p:spPr>
+          <a:xfrm>
+            <a:off x="820000" y="2100000"/>
+            <a:ext cx="5160000" cy="1570000"/>
+          </a:xfrm>
+          <a:prstGeom prst="rect">
+            <a:avLst/>
+          </a:prstGeom>
+          <a:noFill/>
+        </p:spPr>
+        <p:txBody>
+          <a:bodyPr wrap="square" anchor="t">
+            <a:spAutoFit/>
+          </a:bodyPr>
+          <a:lstStyle/>
+          <a:p>
+            <a:pPr algn="l"/>
+            <a:r>
+              <a:rPr sz="1200" b="0">
+                <a:solidFill>
+                  <a:srgbClr val="666666"/>
+                </a:solidFill>
+                <a:latin typeface="Open Sans"/>
+                <a:ea typeface="Open Sans"/>
+                <a:cs typeface="Open Sans"/>
+              </a:rPr>
+              <a:t>Ток может вызвать внезапную остановку дыхания и кровообращения; будьте готовы немедленно начать реанимацию.</a:t>
+            </a:r>
+          </a:p>
+        </p:txBody>
+      </p:sp>
+      <p:sp>
+        <p:nvSpPr>
+          <p:cNvPr id="13" name="Rectangle 12"/>
+          <p:cNvSpPr/>
+          <p:nvPr/>
+        </p:nvSpPr>
+        <p:spPr>
+          <a:xfrm>
+            <a:off x="6300000" y="1400000"/>
+            <a:ext cx="5400000" cy="2420000"/>
+          </a:xfrm>
+          <a:prstGeom prst="rect">
+            <a:avLst/>
+          </a:prstGeom>
+          <a:solidFill>
+            <a:srgbClr val="FFFFFF"/>
+          </a:solidFill>
+          <a:ln w="12700">
+            <a:solidFill>
+              <a:srgbClr val="999999"/>
+            </a:solidFill>
+          </a:ln>
+        </p:spPr>
+        <p:style>
+          <a:lnRef idx="1">
+            <a:schemeClr val="accent1"/>
+          </a:lnRef>
+          <a:fillRef idx="3">
+            <a:schemeClr val="accent1"/>
+          </a:fillRef>
+          <a:effectRef idx="2">
+            <a:schemeClr val="accent1"/>
+          </a:effectRef>
+          <a:fontRef idx="minor">
+            <a:schemeClr val="lt1"/>
+          </a:fontRef>
+        </p:style>
+        <p:txBody>
+          <a:bodyPr rtlCol="0" anchor="ctr"/>
+          <a:lstStyle/>
+          <a:p>
+            <a:pPr algn="ctr"/>
+          </a:p>
+        </p:txBody>
+      </p:sp>
+      <p:sp>
+        <p:nvSpPr>
+          <p:cNvPr id="14" name="Oval 13"/>
+          <p:cNvSpPr/>
+          <p:nvPr/>
+        </p:nvSpPr>
+        <p:spPr>
+          <a:xfrm>
+            <a:off x="6420000" y="1550000"/>
+            <a:ext cx="450000" cy="450000"/>
+          </a:xfrm>
+          <a:prstGeom prst="ellipse">
+            <a:avLst/>
+          </a:prstGeom>
+          <a:solidFill>
+            <a:srgbClr val="555555"/>
+          </a:solidFill>
+          <a:ln>
+            <a:noFill/>
+          </a:ln>
+        </p:spPr>
+        <p:style>
+          <a:lnRef idx="1">
+            <a:schemeClr val="accent1"/>
+          </a:lnRef>
+          <a:fillRef idx="3">
+            <a:schemeClr val="accent1"/>
+          </a:fillRef>
+          <a:effectRef idx="2">
+            <a:schemeClr val="accent1"/>
+          </a:effectRef>
+          <a:fontRef idx="minor">
+            <a:schemeClr val="lt1"/>
+          </a:fontRef>
+        </p:style>
+        <p:txBody>
+          <a:bodyPr rtlCol="0" anchor="ctr"/>
+          <a:lstStyle/>
+          <a:p>
+            <a:pPr algn="ctr"/>
+          </a:p>
+        </p:txBody>
+      </p:sp>
+      <p:sp>
+        <p:nvSpPr>
+          <p:cNvPr id="15" name="TextBox 14"/>
+          <p:cNvSpPr txBox="1"/>
+          <p:nvPr/>
+        </p:nvSpPr>
+        <p:spPr>
+          <a:xfrm>
+            <a:off x="6420000" y="1550000"/>
+            <a:ext cx="450000" cy="450000"/>
+          </a:xfrm>
+          <a:prstGeom prst="rect">
+            <a:avLst/>
+          </a:prstGeom>
+          <a:noFill/>
+        </p:spPr>
+        <p:txBody>
+          <a:bodyPr wrap="square" anchor="ctr">
+            <a:spAutoFit/>
+          </a:bodyPr>
+          <a:lstStyle/>
+          <a:p>
+            <a:pPr algn="ctr"/>
+            <a:r>
+              <a:rPr sz="1300" b="1">
+                <a:solidFill>
+                  <a:srgbClr val="FFFFFF"/>
+                </a:solidFill>
+                <a:latin typeface="Open Sans"/>
+                <a:ea typeface="Open Sans"/>
+                <a:cs typeface="Open Sans"/>
+              </a:rPr>
+              <a:t>2</a:t>
+            </a:r>
+          </a:p>
+        </p:txBody>
+      </p:sp>
+      <p:sp>
+        <p:nvSpPr>
+          <p:cNvPr id="16" name="TextBox 15"/>
+          <p:cNvSpPr txBox="1"/>
+          <p:nvPr/>
+        </p:nvSpPr>
+        <p:spPr>
+          <a:xfrm>
+            <a:off x="6950000" y="1580000"/>
+            <a:ext cx="4600000" cy="400000"/>
+          </a:xfrm>
+          <a:prstGeom prst="rect">
+            <a:avLst/>
+          </a:prstGeom>
+          <a:noFill/>
+        </p:spPr>
+        <p:txBody>
+          <a:bodyPr wrap="square" anchor="t">
+            <a:spAutoFit/>
+          </a:bodyPr>
+          <a:lstStyle/>
+          <a:p>
+            <a:pPr algn="l"/>
+            <a:r>
+              <a:rPr sz="1200" b="1">
+                <a:solidFill>
+                  <a:srgbClr val="333333"/>
+                </a:solidFill>
+                <a:latin typeface="Open Sans"/>
+                <a:ea typeface="Open Sans"/>
+                <a:cs typeface="Open Sans"/>
+              </a:rPr>
+              <a:t>Ожоги</a:t>
+            </a:r>
+          </a:p>
+        </p:txBody>
+      </p:sp>
+      <p:sp>
+        <p:nvSpPr>
+          <p:cNvPr id="17" name="TextBox 16"/>
+          <p:cNvSpPr txBox="1"/>
+          <p:nvPr/>
+        </p:nvSpPr>
+        <p:spPr>
+          <a:xfrm>
+            <a:off x="6420000" y="2100000"/>
+            <a:ext cx="5160000" cy="1570000"/>
+          </a:xfrm>
+          <a:prstGeom prst="rect">
+            <a:avLst/>
+          </a:prstGeom>
+          <a:noFill/>
+        </p:spPr>
+        <p:txBody>
+          <a:bodyPr wrap="square" anchor="t">
+            <a:spAutoFit/>
+          </a:bodyPr>
+          <a:lstStyle/>
+          <a:p>
+            <a:pPr algn="l"/>
+            <a:r>
+              <a:rPr sz="1200" b="0">
+                <a:solidFill>
+                  <a:srgbClr val="666666"/>
+                </a:solidFill>
+                <a:latin typeface="Open Sans"/>
+                <a:ea typeface="Open Sans"/>
+                <a:cs typeface="Open Sans"/>
+              </a:rPr>
+              <a:t>Найдите места входа и выхода тока, охлаждайте свежий ожог и закрывайте свободной повязкой.</a:t>
+            </a:r>
+          </a:p>
+        </p:txBody>
+      </p:sp>
+      <p:sp>
+        <p:nvSpPr>
+          <p:cNvPr id="18" name="Rectangle 17"/>
+          <p:cNvSpPr/>
+          <p:nvPr/>
+        </p:nvSpPr>
+        <p:spPr>
+          <a:xfrm>
+            <a:off x="700000" y="3980000"/>
+            <a:ext cx="5400000" cy="2420000"/>
+          </a:xfrm>
+          <a:prstGeom prst="rect">
+            <a:avLst/>
+          </a:prstGeom>
+          <a:solidFill>
+            <a:srgbClr val="FFFFFF"/>
+          </a:solidFill>
+          <a:ln w="12700">
+            <a:solidFill>
+              <a:srgbClr val="999999"/>
+            </a:solidFill>
+          </a:ln>
+        </p:spPr>
+        <p:style>
+          <a:lnRef idx="1">
+            <a:schemeClr val="accent1"/>
+          </a:lnRef>
+          <a:fillRef idx="3">
+            <a:schemeClr val="accent1"/>
+          </a:fillRef>
+          <a:effectRef idx="2">
+            <a:schemeClr val="accent1"/>
+          </a:effectRef>
+          <a:fontRef idx="minor">
+            <a:schemeClr val="lt1"/>
+          </a:fontRef>
+        </p:style>
+        <p:txBody>
+          <a:bodyPr rtlCol="0" anchor="ctr"/>
+          <a:lstStyle/>
+          <a:p>
+            <a:pPr algn="ctr"/>
+          </a:p>
+        </p:txBody>
+      </p:sp>
+      <p:sp>
+        <p:nvSpPr>
+          <p:cNvPr id="19" name="Oval 18"/>
+          <p:cNvSpPr/>
+          <p:nvPr/>
+        </p:nvSpPr>
+        <p:spPr>
+          <a:xfrm>
+            <a:off x="820000" y="4130000"/>
+            <a:ext cx="450000" cy="450000"/>
+          </a:xfrm>
+          <a:prstGeom prst="ellipse">
+            <a:avLst/>
+          </a:prstGeom>
+          <a:solidFill>
+            <a:srgbClr val="555555"/>
+          </a:solidFill>
+          <a:ln>
+            <a:noFill/>
+          </a:ln>
+        </p:spPr>
+        <p:style>
+          <a:lnRef idx="1">
+            <a:schemeClr val="accent1"/>
+          </a:lnRef>
+          <a:fillRef idx="3">
+            <a:schemeClr val="accent1"/>
+          </a:fillRef>
+          <a:effectRef idx="2">
+            <a:schemeClr val="accent1"/>
+          </a:effectRef>
+          <a:fontRef idx="minor">
+            <a:schemeClr val="lt1"/>
+          </a:fontRef>
+        </p:style>
+        <p:txBody>
+          <a:bodyPr rtlCol="0" anchor="ctr"/>
+          <a:lstStyle/>
+          <a:p>
+            <a:pPr algn="ctr"/>
+          </a:p>
+        </p:txBody>
+      </p:sp>
+      <p:sp>
+        <p:nvSpPr>
+          <p:cNvPr id="20" name="TextBox 19"/>
+          <p:cNvSpPr txBox="1"/>
+          <p:nvPr/>
+        </p:nvSpPr>
+        <p:spPr>
+          <a:xfrm>
+            <a:off x="820000" y="4130000"/>
+            <a:ext cx="450000" cy="450000"/>
+          </a:xfrm>
+          <a:prstGeom prst="rect">
+            <a:avLst/>
+          </a:prstGeom>
+          <a:noFill/>
+        </p:spPr>
+        <p:txBody>
+          <a:bodyPr wrap="square" anchor="ctr">
+            <a:spAutoFit/>
+          </a:bodyPr>
+          <a:lstStyle/>
+          <a:p>
+            <a:pPr algn="ctr"/>
+            <a:r>
+              <a:rPr sz="1300" b="1">
+                <a:solidFill>
+                  <a:srgbClr val="FFFFFF"/>
+                </a:solidFill>
+                <a:latin typeface="Open Sans"/>
+                <a:ea typeface="Open Sans"/>
+                <a:cs typeface="Open Sans"/>
+              </a:rPr>
+              <a:t>3</a:t>
+            </a:r>
+          </a:p>
+        </p:txBody>
+      </p:sp>
+      <p:sp>
+        <p:nvSpPr>
+          <p:cNvPr id="21" name="TextBox 20"/>
+          <p:cNvSpPr txBox="1"/>
+          <p:nvPr/>
+        </p:nvSpPr>
+        <p:spPr>
+          <a:xfrm>
+            <a:off x="1350000" y="4160000"/>
+            <a:ext cx="4600000" cy="400000"/>
+          </a:xfrm>
+          <a:prstGeom prst="rect">
+            <a:avLst/>
+          </a:prstGeom>
+          <a:noFill/>
+        </p:spPr>
+        <p:txBody>
+          <a:bodyPr wrap="square" anchor="t">
+            <a:spAutoFit/>
+          </a:bodyPr>
+          <a:lstStyle/>
+          <a:p>
+            <a:pPr algn="l"/>
+            <a:r>
+              <a:rPr sz="1200" b="1">
+                <a:solidFill>
+                  <a:srgbClr val="333333"/>
+                </a:solidFill>
+                <a:latin typeface="Open Sans"/>
+                <a:ea typeface="Open Sans"/>
+                <a:cs typeface="Open Sans"/>
+              </a:rPr>
+              <a:t>Падение</a:t>
+            </a:r>
+          </a:p>
+        </p:txBody>
+      </p:sp>
+      <p:sp>
+        <p:nvSpPr>
+          <p:cNvPr id="22" name="TextBox 21"/>
+          <p:cNvSpPr txBox="1"/>
+          <p:nvPr/>
+        </p:nvSpPr>
+        <p:spPr>
+          <a:xfrm>
+            <a:off x="820000" y="4680000"/>
+            <a:ext cx="5160000" cy="1570000"/>
+          </a:xfrm>
+          <a:prstGeom prst="rect">
+            <a:avLst/>
+          </a:prstGeom>
+          <a:noFill/>
+        </p:spPr>
+        <p:txBody>
+          <a:bodyPr wrap="square" anchor="t">
+            <a:spAutoFit/>
+          </a:bodyPr>
+          <a:lstStyle/>
+          <a:p>
+            <a:pPr algn="l"/>
+            <a:r>
+              <a:rPr sz="1200" b="0">
+                <a:solidFill>
+                  <a:srgbClr val="666666"/>
+                </a:solidFill>
+                <a:latin typeface="Open Sans"/>
+                <a:ea typeface="Open Sans"/>
+                <a:cs typeface="Open Sans"/>
+              </a:rPr>
+              <a:t>Учитывайте возможные травмы головы, позвоночника и конечностей после падения или сокращения мышц.</a:t>
+            </a:r>
+          </a:p>
+        </p:txBody>
+      </p:sp>
+      <p:sp>
+        <p:nvSpPr>
+          <p:cNvPr id="23" name="Rectangle 22"/>
+          <p:cNvSpPr/>
+          <p:nvPr/>
+        </p:nvSpPr>
+        <p:spPr>
+          <a:xfrm>
+            <a:off x="6300000" y="3980000"/>
+            <a:ext cx="5400000" cy="2420000"/>
+          </a:xfrm>
+          <a:prstGeom prst="rect">
+            <a:avLst/>
+          </a:prstGeom>
+          <a:solidFill>
+            <a:srgbClr val="FFFFFF"/>
+          </a:solidFill>
+          <a:ln w="12700">
+            <a:solidFill>
+              <a:srgbClr val="999999"/>
+            </a:solidFill>
+          </a:ln>
+        </p:spPr>
+        <p:style>
+          <a:lnRef idx="1">
+            <a:schemeClr val="accent1"/>
+          </a:lnRef>
+          <a:fillRef idx="3">
+            <a:schemeClr val="accent1"/>
+          </a:fillRef>
+          <a:effectRef idx="2">
+            <a:schemeClr val="accent1"/>
+          </a:effectRef>
+          <a:fontRef idx="minor">
+            <a:schemeClr val="lt1"/>
+          </a:fontRef>
+        </p:style>
+        <p:txBody>
+          <a:bodyPr rtlCol="0" anchor="ctr"/>
+          <a:lstStyle/>
+          <a:p>
+            <a:pPr algn="ctr"/>
+          </a:p>
+        </p:txBody>
+      </p:sp>
+      <p:sp>
+        <p:nvSpPr>
+          <p:cNvPr id="24" name="Oval 23"/>
+          <p:cNvSpPr/>
+          <p:nvPr/>
+        </p:nvSpPr>
+        <p:spPr>
+          <a:xfrm>
+            <a:off x="6420000" y="4130000"/>
+            <a:ext cx="450000" cy="450000"/>
+          </a:xfrm>
+          <a:prstGeom prst="ellipse">
+            <a:avLst/>
+          </a:prstGeom>
+          <a:solidFill>
+            <a:srgbClr val="555555"/>
+          </a:solidFill>
+          <a:ln>
+            <a:noFill/>
+          </a:ln>
+        </p:spPr>
+        <p:style>
+          <a:lnRef idx="1">
+            <a:schemeClr val="accent1"/>
+          </a:lnRef>
+          <a:fillRef idx="3">
+            <a:schemeClr val="accent1"/>
+          </a:fillRef>
+          <a:effectRef idx="2">
+            <a:schemeClr val="accent1"/>
+          </a:effectRef>
+          <a:fontRef idx="minor">
+            <a:schemeClr val="lt1"/>
+          </a:fontRef>
+        </p:style>
+        <p:txBody>
+          <a:bodyPr rtlCol="0" anchor="ctr"/>
+          <a:lstStyle/>
+          <a:p>
+            <a:pPr algn="ctr"/>
+          </a:p>
+        </p:txBody>
+      </p:sp>
+      <p:sp>
+        <p:nvSpPr>
+          <p:cNvPr id="25" name="TextBox 24"/>
+          <p:cNvSpPr txBox="1"/>
+          <p:nvPr/>
+        </p:nvSpPr>
+        <p:spPr>
+          <a:xfrm>
+            <a:off x="6420000" y="4130000"/>
+            <a:ext cx="450000" cy="450000"/>
+          </a:xfrm>
+          <a:prstGeom prst="rect">
+            <a:avLst/>
+          </a:prstGeom>
+          <a:noFill/>
+        </p:spPr>
+        <p:txBody>
+          <a:bodyPr wrap="square" anchor="ctr">
+            <a:spAutoFit/>
+          </a:bodyPr>
+          <a:lstStyle/>
+          <a:p>
+            <a:pPr algn="ctr"/>
+            <a:r>
+              <a:rPr sz="1300" b="1">
+                <a:solidFill>
+                  <a:srgbClr val="FFFFFF"/>
+                </a:solidFill>
+                <a:latin typeface="Open Sans"/>
+                <a:ea typeface="Open Sans"/>
+                <a:cs typeface="Open Sans"/>
+              </a:rPr>
+              <a:t>4</a:t>
+            </a:r>
+          </a:p>
+        </p:txBody>
+      </p:sp>
+      <p:sp>
+        <p:nvSpPr>
+          <p:cNvPr id="26" name="TextBox 25"/>
+          <p:cNvSpPr txBox="1"/>
+          <p:nvPr/>
+        </p:nvSpPr>
+        <p:spPr>
+          <a:xfrm>
+            <a:off x="6950000" y="4160000"/>
+            <a:ext cx="4600000" cy="400000"/>
+          </a:xfrm>
+          <a:prstGeom prst="rect">
+            <a:avLst/>
+          </a:prstGeom>
+          <a:noFill/>
+        </p:spPr>
+        <p:txBody>
+          <a:bodyPr wrap="square" anchor="t">
+            <a:spAutoFit/>
+          </a:bodyPr>
+          <a:lstStyle/>
+          <a:p>
+            <a:pPr algn="l"/>
+            <a:r>
+              <a:rPr sz="1200" b="1">
+                <a:solidFill>
+                  <a:srgbClr val="333333"/>
+                </a:solidFill>
+                <a:latin typeface="Open Sans"/>
+                <a:ea typeface="Open Sans"/>
+                <a:cs typeface="Open Sans"/>
+              </a:rPr>
+              <a:t>Наблюдение</a:t>
+            </a:r>
+          </a:p>
+        </p:txBody>
+      </p:sp>
+      <p:sp>
+        <p:nvSpPr>
+          <p:cNvPr id="27" name="TextBox 26"/>
+          <p:cNvSpPr txBox="1"/>
+          <p:nvPr/>
+        </p:nvSpPr>
+        <p:spPr>
+          <a:xfrm>
+            <a:off x="6420000" y="4680000"/>
+            <a:ext cx="5160000" cy="1570000"/>
+          </a:xfrm>
+          <a:prstGeom prst="rect">
+            <a:avLst/>
+          </a:prstGeom>
+          <a:noFill/>
+        </p:spPr>
+        <p:txBody>
+          <a:bodyPr wrap="square" anchor="t">
+            <a:spAutoFit/>
+          </a:bodyPr>
+          <a:lstStyle/>
+          <a:p>
+            <a:pPr algn="l"/>
+            <a:r>
+              <a:rPr sz="1200" b="0">
+                <a:solidFill>
+                  <a:srgbClr val="666666"/>
+                </a:solidFill>
+                <a:latin typeface="Open Sans"/>
+                <a:ea typeface="Open Sans"/>
+                <a:cs typeface="Open Sans"/>
+              </a:rPr>
+              <a:t>Даже при хорошем самочувствии необходима медицинская оценка из-за возможных нарушений ритма сердца.</a:t>
+            </a:r>
+          </a:p>
+        </p:txBody>
+      </p:sp>
     </p:spTree>
   </p:cSld>
   <p:clrMapOvr>
